--- a/docs/Orcamento_Familiar.pptx
+++ b/docs/Orcamento_Familiar.pptx
@@ -2,21 +2,24 @@
 <file path=ppt/presentation.xml><?xml version="1.0" encoding="utf-8"?>
 <p:presentation xmlns:a="http://schemas.openxmlformats.org/drawingml/2006/main" xmlns:r="http://schemas.openxmlformats.org/officeDocument/2006/relationships" xmlns:p="http://schemas.openxmlformats.org/presentationml/2006/main" saveSubsetFonts="1" autoCompressPictures="0">
   <p:sldMasterIdLst>
-    <p:sldMasterId id="2147483648" r:id="rId1"/>
+    <p:sldMasterId id="2147483650" r:id="rId1"/>
   </p:sldMasterIdLst>
-  <p:sldIdLst>
-    <p:sldId id="256" r:id="rId2"/>
-    <p:sldId id="257" r:id="rId3"/>
-    <p:sldId id="258" r:id="rId4"/>
-    <p:sldId id="259" r:id="rId5"/>
-  </p:sldIdLst>
   <p:notesMasterIdLst>
     <p:notesMasterId r:id="rId6"/>
   </p:notesMasterIdLst>
-  <p:sldSz cx="9144000" cy="5143500"/>
+  <p:sldIdLst>
+    <p:sldId id="256" r:id="rId2"/>
+    <p:sldId id="258" r:id="rId3"/>
+    <p:sldId id="257" r:id="rId4"/>
+    <p:sldId id="259" r:id="rId5"/>
+  </p:sldIdLst>
+  <p:sldSz cx="9144000" cy="5143500" type="screen16x9"/>
   <p:notesSz cx="5143500" cy="9144000"/>
   <p:defaultTextStyle>
-    <a:lvl1pPr marL="0" algn="l" defTabSz="914400" rtl="0" eaLnBrk="1" latinLnBrk="0" hangingPunct="1">
+    <a:defPPr>
+      <a:defRPr lang="en-US"/>
+    </a:defPPr>
+    <a:lvl1pPr marL="0" algn="l" defTabSz="457200" rtl="0" eaLnBrk="1" latinLnBrk="0" hangingPunct="1">
       <a:defRPr sz="1800" kern="1200">
         <a:solidFill>
           <a:schemeClr val="tx1"/>
@@ -26,7 +29,7 @@
         <a:cs typeface="+mn-cs"/>
       </a:defRPr>
     </a:lvl1pPr>
-    <a:lvl2pPr marL="457200" algn="l" defTabSz="914400" rtl="0" eaLnBrk="1" latinLnBrk="0" hangingPunct="1">
+    <a:lvl2pPr marL="457200" algn="l" defTabSz="457200" rtl="0" eaLnBrk="1" latinLnBrk="0" hangingPunct="1">
       <a:defRPr sz="1800" kern="1200">
         <a:solidFill>
           <a:schemeClr val="tx1"/>
@@ -36,7 +39,7 @@
         <a:cs typeface="+mn-cs"/>
       </a:defRPr>
     </a:lvl2pPr>
-    <a:lvl3pPr marL="914400" algn="l" defTabSz="914400" rtl="0" eaLnBrk="1" latinLnBrk="0" hangingPunct="1">
+    <a:lvl3pPr marL="914400" algn="l" defTabSz="457200" rtl="0" eaLnBrk="1" latinLnBrk="0" hangingPunct="1">
       <a:defRPr sz="1800" kern="1200">
         <a:solidFill>
           <a:schemeClr val="tx1"/>
@@ -46,7 +49,7 @@
         <a:cs typeface="+mn-cs"/>
       </a:defRPr>
     </a:lvl3pPr>
-    <a:lvl4pPr marL="1371600" algn="l" defTabSz="914400" rtl="0" eaLnBrk="1" latinLnBrk="0" hangingPunct="1">
+    <a:lvl4pPr marL="1371600" algn="l" defTabSz="457200" rtl="0" eaLnBrk="1" latinLnBrk="0" hangingPunct="1">
       <a:defRPr sz="1800" kern="1200">
         <a:solidFill>
           <a:schemeClr val="tx1"/>
@@ -56,7 +59,7 @@
         <a:cs typeface="+mn-cs"/>
       </a:defRPr>
     </a:lvl4pPr>
-    <a:lvl5pPr marL="1828800" algn="l" defTabSz="914400" rtl="0" eaLnBrk="1" latinLnBrk="0" hangingPunct="1">
+    <a:lvl5pPr marL="1828800" algn="l" defTabSz="457200" rtl="0" eaLnBrk="1" latinLnBrk="0" hangingPunct="1">
       <a:defRPr sz="1800" kern="1200">
         <a:solidFill>
           <a:schemeClr val="tx1"/>
@@ -66,7 +69,7 @@
         <a:cs typeface="+mn-cs"/>
       </a:defRPr>
     </a:lvl5pPr>
-    <a:lvl6pPr marL="2286000" algn="l" defTabSz="914400" rtl="0" eaLnBrk="1" latinLnBrk="0" hangingPunct="1">
+    <a:lvl6pPr marL="2286000" algn="l" defTabSz="457200" rtl="0" eaLnBrk="1" latinLnBrk="0" hangingPunct="1">
       <a:defRPr sz="1800" kern="1200">
         <a:solidFill>
           <a:schemeClr val="tx1"/>
@@ -76,7 +79,7 @@
         <a:cs typeface="+mn-cs"/>
       </a:defRPr>
     </a:lvl6pPr>
-    <a:lvl7pPr marL="2743200" algn="l" defTabSz="914400" rtl="0" eaLnBrk="1" latinLnBrk="0" hangingPunct="1">
+    <a:lvl7pPr marL="2743200" algn="l" defTabSz="457200" rtl="0" eaLnBrk="1" latinLnBrk="0" hangingPunct="1">
       <a:defRPr sz="1800" kern="1200">
         <a:solidFill>
           <a:schemeClr val="tx1"/>
@@ -86,7 +89,7 @@
         <a:cs typeface="+mn-cs"/>
       </a:defRPr>
     </a:lvl7pPr>
-    <a:lvl8pPr marL="3200400" algn="l" defTabSz="914400" rtl="0" eaLnBrk="1" latinLnBrk="0" hangingPunct="1">
+    <a:lvl8pPr marL="3200400" algn="l" defTabSz="457200" rtl="0" eaLnBrk="1" latinLnBrk="0" hangingPunct="1">
       <a:defRPr sz="1800" kern="1200">
         <a:solidFill>
           <a:schemeClr val="tx1"/>
@@ -96,7 +99,7 @@
         <a:cs typeface="+mn-cs"/>
       </a:defRPr>
     </a:lvl8pPr>
-    <a:lvl9pPr marL="3657600" algn="l" defTabSz="914400" rtl="0" eaLnBrk="1" latinLnBrk="0" hangingPunct="1">
+    <a:lvl9pPr marL="3657600" algn="l" defTabSz="457200" rtl="0" eaLnBrk="1" latinLnBrk="0" hangingPunct="1">
       <a:defRPr sz="1800" kern="1200">
         <a:solidFill>
           <a:schemeClr val="tx1"/>
@@ -107,6 +110,11 @@
       </a:defRPr>
     </a:lvl9pPr>
   </p:defaultTextStyle>
+  <p:extLst>
+    <p:ext uri="{EFAFB233-063F-42B5-8137-9DF3F51BA10A}">
+      <p15:sldGuideLst xmlns:p15="http://schemas.microsoft.com/office/powerpoint/2012/main"/>
+    </p:ext>
+  </p:extLst>
 </p:presentation>
 </file>
 
@@ -132,234 +140,10 @@
           <a:chExt cx="0" cy="0"/>
         </a:xfrm>
       </p:grpSpPr>
-      <p:sp>
-        <p:nvSpPr>
-          <p:cNvPr id="2" name="Header Placeholder 1"/>
-          <p:cNvSpPr>
-            <a:spLocks noGrp="1"/>
-          </p:cNvSpPr>
-          <p:nvPr>
-            <p:ph type="hdr" sz="quarter"/>
-          </p:nvPr>
-        </p:nvSpPr>
-        <p:spPr>
-          <a:xfrm>
-            <a:off x="0" y="0"/>
-            <a:ext cx="2971800" cy="458788"/>
-          </a:xfrm>
-          <a:prstGeom prst="rect">
-            <a:avLst/>
-          </a:prstGeom>
-        </p:spPr>
-        <p:txBody>
-          <a:bodyPr vert="horz" lIns="91440" tIns="45720" rIns="91440" bIns="45720" rtlCol="0"/>
-          <a:lstStyle>
-            <a:lvl1pPr algn="l">
-              <a:defRPr sz="1200"/>
-            </a:lvl1pPr>
-          </a:lstStyle>
-          <a:p>
-            <a:endParaRPr lang="en-US"/>
-          </a:p>
-        </p:txBody>
-      </p:sp>
-      <p:sp>
-        <p:nvSpPr>
-          <p:cNvPr id="3" name="Date Placeholder 2"/>
-          <p:cNvSpPr>
-            <a:spLocks noGrp="1"/>
-          </p:cNvSpPr>
-          <p:nvPr>
-            <p:ph type="dt" idx="1"/>
-          </p:nvPr>
-        </p:nvSpPr>
-        <p:spPr>
-          <a:xfrm>
-            <a:off x="3884613" y="0"/>
-            <a:ext cx="2971800" cy="458788"/>
-          </a:xfrm>
-          <a:prstGeom prst="rect">
-            <a:avLst/>
-          </a:prstGeom>
-        </p:spPr>
-        <p:txBody>
-          <a:bodyPr vert="horz" lIns="91440" tIns="45720" rIns="91440" bIns="45720" rtlCol="0"/>
-          <a:lstStyle>
-            <a:lvl1pPr algn="r">
-              <a:defRPr sz="1200"/>
-            </a:lvl1pPr>
-          </a:lstStyle>
-          <a:p>
-            <a:fld id="{5282F153-3F37-0F45-9E97-73ACFA13230C}" type="datetimeFigureOut">
-              <a:rPr lang="en-US"/>
-              <a:t>7/23/19</a:t>
-            </a:fld>
-            <a:endParaRPr lang="en-US"/>
-          </a:p>
-        </p:txBody>
-      </p:sp>
-      <p:sp>
-        <p:nvSpPr>
-          <p:cNvPr id="4" name="Slide Image Placeholder 3"/>
-          <p:cNvSpPr>
-            <a:spLocks noGrp="1" noRot="1" noChangeAspect="1"/>
-          </p:cNvSpPr>
-          <p:nvPr>
-            <p:ph type="sldImg" idx="2"/>
-          </p:nvPr>
-        </p:nvSpPr>
-        <p:spPr>
-          <a:xfrm>
-            <a:off x="685800" y="1143000"/>
-            <a:ext cx="5486400" cy="3086100"/>
-          </a:xfrm>
-          <a:prstGeom prst="rect">
-            <a:avLst/>
-          </a:prstGeom>
-          <a:noFill/>
-          <a:ln w="12700">
-            <a:solidFill>
-              <a:prstClr val="black"/>
-            </a:solidFill>
-          </a:ln>
-        </p:spPr>
-        <p:txBody>
-          <a:bodyPr vert="horz" lIns="91440" tIns="45720" rIns="91440" bIns="45720" rtlCol="0" anchor="ctr"/>
-          <a:lstStyle/>
-          <a:p>
-            <a:endParaRPr lang="en-US"/>
-          </a:p>
-        </p:txBody>
-      </p:sp>
-      <p:sp>
-        <p:nvSpPr>
-          <p:cNvPr id="5" name="Notes Placeholder 4"/>
-          <p:cNvSpPr>
-            <a:spLocks noGrp="1"/>
-          </p:cNvSpPr>
-          <p:nvPr>
-            <p:ph type="body" sz="quarter" idx="3"/>
-          </p:nvPr>
-        </p:nvSpPr>
-        <p:spPr>
-          <a:xfrm>
-            <a:off x="685800" y="4400550"/>
-            <a:ext cx="5486400" cy="3600450"/>
-          </a:xfrm>
-          <a:prstGeom prst="rect">
-            <a:avLst/>
-          </a:prstGeom>
-        </p:spPr>
-        <p:txBody>
-          <a:bodyPr vert="horz" lIns="91440" tIns="45720" rIns="91440" bIns="45720" rtlCol="0"/>
-          <a:lstStyle/>
-          <a:p>
-            <a:pPr lvl="0"/>
-            <a:r>
-              <a:rPr lang="en-US"/>
-              <a:t>Click to edit Master text styles</a:t>
-            </a:r>
-          </a:p>
-          <a:p>
-            <a:pPr lvl="1"/>
-            <a:r>
-              <a:rPr lang="en-US"/>
-              <a:t>Second level</a:t>
-            </a:r>
-          </a:p>
-          <a:p>
-            <a:pPr lvl="2"/>
-            <a:r>
-              <a:rPr lang="en-US"/>
-              <a:t>Third level</a:t>
-            </a:r>
-          </a:p>
-          <a:p>
-            <a:pPr lvl="3"/>
-            <a:r>
-              <a:rPr lang="en-US"/>
-              <a:t>Fourth level</a:t>
-            </a:r>
-          </a:p>
-          <a:p>
-            <a:pPr lvl="4"/>
-            <a:r>
-              <a:rPr lang="en-US"/>
-              <a:t>Fifth level</a:t>
-            </a:r>
-          </a:p>
-        </p:txBody>
-      </p:sp>
-      <p:sp>
-        <p:nvSpPr>
-          <p:cNvPr id="6" name="Footer Placeholder 5"/>
-          <p:cNvSpPr>
-            <a:spLocks noGrp="1"/>
-          </p:cNvSpPr>
-          <p:nvPr>
-            <p:ph type="ftr" sz="quarter" idx="4"/>
-          </p:nvPr>
-        </p:nvSpPr>
-        <p:spPr>
-          <a:xfrm>
-            <a:off x="0" y="8685213"/>
-            <a:ext cx="2971800" cy="458787"/>
-          </a:xfrm>
-          <a:prstGeom prst="rect">
-            <a:avLst/>
-          </a:prstGeom>
-        </p:spPr>
-        <p:txBody>
-          <a:bodyPr vert="horz" lIns="91440" tIns="45720" rIns="91440" bIns="45720" rtlCol="0" anchor="b"/>
-          <a:lstStyle>
-            <a:lvl1pPr algn="l">
-              <a:defRPr sz="1200"/>
-            </a:lvl1pPr>
-          </a:lstStyle>
-          <a:p>
-            <a:endParaRPr lang="en-US"/>
-          </a:p>
-        </p:txBody>
-      </p:sp>
-      <p:sp>
-        <p:nvSpPr>
-          <p:cNvPr id="7" name="Slide Number Placeholder 6"/>
-          <p:cNvSpPr>
-            <a:spLocks noGrp="1"/>
-          </p:cNvSpPr>
-          <p:nvPr>
-            <p:ph type="sldNum" sz="quarter" idx="5"/>
-          </p:nvPr>
-        </p:nvSpPr>
-        <p:spPr>
-          <a:xfrm>
-            <a:off x="3884613" y="8685213"/>
-            <a:ext cx="2971800" cy="458787"/>
-          </a:xfrm>
-          <a:prstGeom prst="rect">
-            <a:avLst/>
-          </a:prstGeom>
-        </p:spPr>
-        <p:txBody>
-          <a:bodyPr vert="horz" lIns="91440" tIns="45720" rIns="91440" bIns="45720" rtlCol="0" anchor="b"/>
-          <a:lstStyle>
-            <a:lvl1pPr algn="r">
-              <a:defRPr sz="1200"/>
-            </a:lvl1pPr>
-          </a:lstStyle>
-          <a:p>
-            <a:fld id="{CE5E9CC1-C706-0F49-92D6-E571CC5EEA8F}" type="slidenum">
-              <a:rPr lang="en-US"/>
-              <a:t>‹#›</a:t>
-            </a:fld>
-            <a:endParaRPr lang="en-US"/>
-          </a:p>
-        </p:txBody>
-      </p:sp>
     </p:spTree>
     <p:extLst>
       <p:ext uri="{BB962C8B-B14F-4D97-AF65-F5344CB8AC3E}">
-        <p14:creationId xmlns:p14="http://schemas.microsoft.com/office/powerpoint/2010/main" val="1024086991"/>
+        <p14:creationId xmlns:p14="http://schemas.microsoft.com/office/powerpoint/2010/main" val="2216809628"/>
       </p:ext>
     </p:extLst>
   </p:cSld>
@@ -503,10 +287,6 @@
           <a:bodyPr/>
           <a:lstStyle/>
           <a:p>
-            <a:r>
-              <a:rPr lang="en-US" dirty="0"/>
-              <a:t/>
-            </a:r>
             <a:endParaRPr lang="en-US" dirty="0"/>
           </a:p>
         </p:txBody>
@@ -591,10 +371,6 @@
           <a:bodyPr/>
           <a:lstStyle/>
           <a:p>
-            <a:r>
-              <a:rPr lang="en-US" dirty="0"/>
-              <a:t/>
-            </a:r>
             <a:endParaRPr lang="en-US" dirty="0"/>
           </a:p>
         </p:txBody>
@@ -679,10 +455,6 @@
           <a:bodyPr/>
           <a:lstStyle/>
           <a:p>
-            <a:r>
-              <a:rPr lang="en-US" dirty="0"/>
-              <a:t/>
-            </a:r>
             <a:endParaRPr lang="en-US" dirty="0"/>
           </a:p>
         </p:txBody>
@@ -767,10 +539,6 @@
           <a:bodyPr/>
           <a:lstStyle/>
           <a:p>
-            <a:r>
-              <a:rPr lang="en-US" dirty="0"/>
-              <a:t/>
-            </a:r>
             <a:endParaRPr lang="en-US" dirty="0"/>
           </a:p>
         </p:txBody>
@@ -812,7 +580,667 @@
 </file>
 
 <file path=ppt/slideLayouts/slideLayout1.xml><?xml version="1.0" encoding="utf-8"?>
-<p:sldLayout xmlns:a="http://schemas.openxmlformats.org/drawingml/2006/main" xmlns:r="http://schemas.openxmlformats.org/officeDocument/2006/relationships" xmlns:p="http://schemas.openxmlformats.org/presentationml/2006/main" preserve="1">
+<p:sldLayout xmlns:a="http://schemas.openxmlformats.org/drawingml/2006/main" xmlns:r="http://schemas.openxmlformats.org/officeDocument/2006/relationships" xmlns:p="http://schemas.openxmlformats.org/presentationml/2006/main" type="title" preserve="1">
+  <p:cSld name="Diapositivo de Título">
+    <p:spTree>
+      <p:nvGrpSpPr>
+        <p:cNvPr id="1" name=""/>
+        <p:cNvGrpSpPr/>
+        <p:nvPr/>
+      </p:nvGrpSpPr>
+      <p:grpSpPr>
+        <a:xfrm>
+          <a:off x="0" y="0"/>
+          <a:ext cx="0" cy="0"/>
+          <a:chOff x="0" y="0"/>
+          <a:chExt cx="0" cy="0"/>
+        </a:xfrm>
+      </p:grpSpPr>
+      <p:sp>
+        <p:nvSpPr>
+          <p:cNvPr id="2" name="Title 1"/>
+          <p:cNvSpPr>
+            <a:spLocks noGrp="1"/>
+          </p:cNvSpPr>
+          <p:nvPr>
+            <p:ph type="ctrTitle"/>
+          </p:nvPr>
+        </p:nvSpPr>
+        <p:spPr>
+          <a:xfrm>
+            <a:off x="1813335" y="601724"/>
+            <a:ext cx="6477805" cy="1906073"/>
+          </a:xfrm>
+        </p:spPr>
+        <p:txBody>
+          <a:bodyPr bIns="0" anchor="b">
+            <a:normAutofit/>
+          </a:bodyPr>
+          <a:lstStyle>
+            <a:lvl1pPr algn="l">
+              <a:defRPr sz="4950"/>
+            </a:lvl1pPr>
+          </a:lstStyle>
+          <a:p>
+            <a:r>
+              <a:rPr lang="pt-PT"/>
+              <a:t>Clique para editar o estilo de título do Modelo Global</a:t>
+            </a:r>
+            <a:endParaRPr lang="en-US" dirty="0"/>
+          </a:p>
+        </p:txBody>
+      </p:sp>
+      <p:sp>
+        <p:nvSpPr>
+          <p:cNvPr id="3" name="Subtitle 2"/>
+          <p:cNvSpPr>
+            <a:spLocks noGrp="1"/>
+          </p:cNvSpPr>
+          <p:nvPr>
+            <p:ph type="subTitle" idx="1"/>
+          </p:nvPr>
+        </p:nvSpPr>
+        <p:spPr>
+          <a:xfrm>
+            <a:off x="1813335" y="2648403"/>
+            <a:ext cx="6477804" cy="733216"/>
+          </a:xfrm>
+        </p:spPr>
+        <p:txBody>
+          <a:bodyPr tIns="91440" bIns="91440">
+            <a:normAutofit/>
+          </a:bodyPr>
+          <a:lstStyle>
+            <a:lvl1pPr marL="0" indent="0" algn="l">
+              <a:buNone/>
+              <a:defRPr sz="1350" b="0" cap="all" baseline="0">
+                <a:solidFill>
+                  <a:schemeClr val="tx1"/>
+                </a:solidFill>
+              </a:defRPr>
+            </a:lvl1pPr>
+            <a:lvl2pPr marL="342900" indent="0" algn="ctr">
+              <a:buNone/>
+              <a:defRPr sz="1350"/>
+            </a:lvl2pPr>
+            <a:lvl3pPr marL="685800" indent="0" algn="ctr">
+              <a:buNone/>
+              <a:defRPr sz="1350"/>
+            </a:lvl3pPr>
+            <a:lvl4pPr marL="1028700" indent="0" algn="ctr">
+              <a:buNone/>
+              <a:defRPr sz="1200"/>
+            </a:lvl4pPr>
+            <a:lvl5pPr marL="1371600" indent="0" algn="ctr">
+              <a:buNone/>
+              <a:defRPr sz="1200"/>
+            </a:lvl5pPr>
+            <a:lvl6pPr marL="1714500" indent="0" algn="ctr">
+              <a:buNone/>
+              <a:defRPr sz="1200"/>
+            </a:lvl6pPr>
+            <a:lvl7pPr marL="2057400" indent="0" algn="ctr">
+              <a:buNone/>
+              <a:defRPr sz="1200"/>
+            </a:lvl7pPr>
+            <a:lvl8pPr marL="2400300" indent="0" algn="ctr">
+              <a:buNone/>
+              <a:defRPr sz="1200"/>
+            </a:lvl8pPr>
+            <a:lvl9pPr marL="2743200" indent="0" algn="ctr">
+              <a:buNone/>
+              <a:defRPr sz="1200"/>
+            </a:lvl9pPr>
+          </a:lstStyle>
+          <a:p>
+            <a:r>
+              <a:rPr lang="pt-PT"/>
+              <a:t>Clique para editar o estilo de subtítulo do Modelo Global</a:t>
+            </a:r>
+            <a:endParaRPr lang="en-US" dirty="0"/>
+          </a:p>
+        </p:txBody>
+      </p:sp>
+      <p:sp>
+        <p:nvSpPr>
+          <p:cNvPr id="4" name="Date Placeholder 3"/>
+          <p:cNvSpPr>
+            <a:spLocks noGrp="1"/>
+          </p:cNvSpPr>
+          <p:nvPr>
+            <p:ph type="dt" sz="half" idx="10"/>
+          </p:nvPr>
+        </p:nvSpPr>
+        <p:spPr/>
+        <p:txBody>
+          <a:bodyPr/>
+          <a:lstStyle/>
+          <a:p>
+            <a:fld id="{48A87A34-81AB-432B-8DAE-1953F412C126}" type="datetimeFigureOut">
+              <a:rPr lang="en-US" dirty="0"/>
+              <a:t>5/5/2026</a:t>
+            </a:fld>
+            <a:endParaRPr lang="en-US" dirty="0"/>
+          </a:p>
+        </p:txBody>
+      </p:sp>
+      <p:sp>
+        <p:nvSpPr>
+          <p:cNvPr id="5" name="Footer Placeholder 4"/>
+          <p:cNvSpPr>
+            <a:spLocks noGrp="1"/>
+          </p:cNvSpPr>
+          <p:nvPr>
+            <p:ph type="ftr" sz="quarter" idx="11"/>
+          </p:nvPr>
+        </p:nvSpPr>
+        <p:spPr>
+          <a:xfrm>
+            <a:off x="1812376" y="246981"/>
+            <a:ext cx="3730436" cy="231901"/>
+          </a:xfrm>
+        </p:spPr>
+        <p:txBody>
+          <a:bodyPr/>
+          <a:lstStyle/>
+          <a:p>
+            <a:endParaRPr lang="en-US" dirty="0"/>
+          </a:p>
+        </p:txBody>
+      </p:sp>
+      <p:sp>
+        <p:nvSpPr>
+          <p:cNvPr id="6" name="Slide Number Placeholder 5"/>
+          <p:cNvSpPr>
+            <a:spLocks noGrp="1"/>
+          </p:cNvSpPr>
+          <p:nvPr>
+            <p:ph type="sldNum" sz="quarter" idx="12"/>
+          </p:nvPr>
+        </p:nvSpPr>
+        <p:spPr>
+          <a:xfrm>
+            <a:off x="1078249" y="599230"/>
+            <a:ext cx="608264" cy="377684"/>
+          </a:xfrm>
+        </p:spPr>
+        <p:txBody>
+          <a:bodyPr/>
+          <a:lstStyle/>
+          <a:p>
+            <a:fld id="{6D22F896-40B5-4ADD-8801-0D06FADFA095}" type="slidenum">
+              <a:rPr lang="en-US" dirty="0"/>
+              <a:t>‹nº›</a:t>
+            </a:fld>
+            <a:endParaRPr lang="en-US" dirty="0"/>
+          </a:p>
+        </p:txBody>
+      </p:sp>
+      <p:cxnSp>
+        <p:nvCxnSpPr>
+          <p:cNvPr id="15" name="Straight Connector 14"/>
+          <p:cNvCxnSpPr/>
+          <p:nvPr/>
+        </p:nvCxnSpPr>
+        <p:spPr>
+          <a:xfrm>
+            <a:off x="1813335" y="2646407"/>
+            <a:ext cx="6477804" cy="0"/>
+          </a:xfrm>
+          <a:prstGeom prst="line">
+            <a:avLst/>
+          </a:prstGeom>
+          <a:ln w="31750"/>
+        </p:spPr>
+        <p:style>
+          <a:lnRef idx="3">
+            <a:schemeClr val="accent1"/>
+          </a:lnRef>
+          <a:fillRef idx="0">
+            <a:schemeClr val="accent1"/>
+          </a:fillRef>
+          <a:effectRef idx="2">
+            <a:schemeClr val="accent1"/>
+          </a:effectRef>
+          <a:fontRef idx="minor">
+            <a:schemeClr val="tx1"/>
+          </a:fontRef>
+        </p:style>
+      </p:cxnSp>
+    </p:spTree>
+    <p:extLst>
+      <p:ext uri="{BB962C8B-B14F-4D97-AF65-F5344CB8AC3E}">
+        <p14:creationId xmlns:p14="http://schemas.microsoft.com/office/powerpoint/2010/main" val="1310124242"/>
+      </p:ext>
+    </p:extLst>
+  </p:cSld>
+  <p:clrMapOvr>
+    <a:masterClrMapping/>
+  </p:clrMapOvr>
+  <p:hf sldNum="0" hdr="0" ftr="0" dt="0"/>
+</p:sldLayout>
+</file>
+
+<file path=ppt/slideLayouts/slideLayout10.xml><?xml version="1.0" encoding="utf-8"?>
+<p:sldLayout xmlns:a="http://schemas.openxmlformats.org/drawingml/2006/main" xmlns:r="http://schemas.openxmlformats.org/officeDocument/2006/relationships" xmlns:p="http://schemas.openxmlformats.org/presentationml/2006/main" type="vertTx" preserve="1">
+  <p:cSld name="Título e Texto Vertical">
+    <p:spTree>
+      <p:nvGrpSpPr>
+        <p:cNvPr id="1" name=""/>
+        <p:cNvGrpSpPr/>
+        <p:nvPr/>
+      </p:nvGrpSpPr>
+      <p:grpSpPr>
+        <a:xfrm>
+          <a:off x="0" y="0"/>
+          <a:ext cx="0" cy="0"/>
+          <a:chOff x="0" y="0"/>
+          <a:chExt cx="0" cy="0"/>
+        </a:xfrm>
+      </p:grpSpPr>
+      <p:sp>
+        <p:nvSpPr>
+          <p:cNvPr id="2" name="Title 1"/>
+          <p:cNvSpPr>
+            <a:spLocks noGrp="1"/>
+          </p:cNvSpPr>
+          <p:nvPr>
+            <p:ph type="title"/>
+          </p:nvPr>
+        </p:nvSpPr>
+        <p:spPr/>
+        <p:txBody>
+          <a:bodyPr/>
+          <a:lstStyle/>
+          <a:p>
+            <a:r>
+              <a:rPr lang="pt-PT"/>
+              <a:t>Clique para editar o estilo de título do Modelo Global</a:t>
+            </a:r>
+            <a:endParaRPr lang="en-US" dirty="0"/>
+          </a:p>
+        </p:txBody>
+      </p:sp>
+      <p:sp>
+        <p:nvSpPr>
+          <p:cNvPr id="3" name="Vertical Text Placeholder 2"/>
+          <p:cNvSpPr>
+            <a:spLocks noGrp="1"/>
+          </p:cNvSpPr>
+          <p:nvPr>
+            <p:ph type="body" orient="vert" idx="1"/>
+          </p:nvPr>
+        </p:nvSpPr>
+        <p:spPr/>
+        <p:txBody>
+          <a:bodyPr vert="eaVert"/>
+          <a:lstStyle/>
+          <a:p>
+            <a:pPr lvl="0"/>
+            <a:r>
+              <a:rPr lang="pt-PT"/>
+              <a:t>Clique para editar os estilos do texto de Modelo Global</a:t>
+            </a:r>
+          </a:p>
+          <a:p>
+            <a:pPr lvl="1"/>
+            <a:r>
+              <a:rPr lang="pt-PT"/>
+              <a:t>Segundo nível</a:t>
+            </a:r>
+          </a:p>
+          <a:p>
+            <a:pPr lvl="2"/>
+            <a:r>
+              <a:rPr lang="pt-PT"/>
+              <a:t>Terceiro nível</a:t>
+            </a:r>
+          </a:p>
+          <a:p>
+            <a:pPr lvl="3"/>
+            <a:r>
+              <a:rPr lang="pt-PT"/>
+              <a:t>Quarto nível</a:t>
+            </a:r>
+          </a:p>
+          <a:p>
+            <a:pPr lvl="4"/>
+            <a:r>
+              <a:rPr lang="pt-PT"/>
+              <a:t>Quinto nível</a:t>
+            </a:r>
+            <a:endParaRPr lang="en-US" dirty="0"/>
+          </a:p>
+        </p:txBody>
+      </p:sp>
+      <p:sp>
+        <p:nvSpPr>
+          <p:cNvPr id="4" name="Date Placeholder 3"/>
+          <p:cNvSpPr>
+            <a:spLocks noGrp="1"/>
+          </p:cNvSpPr>
+          <p:nvPr>
+            <p:ph type="dt" sz="half" idx="10"/>
+          </p:nvPr>
+        </p:nvSpPr>
+        <p:spPr/>
+        <p:txBody>
+          <a:bodyPr/>
+          <a:lstStyle/>
+          <a:p>
+            <a:fld id="{48A87A34-81AB-432B-8DAE-1953F412C126}" type="datetimeFigureOut">
+              <a:rPr lang="en-US" dirty="0"/>
+              <a:t>5/5/2026</a:t>
+            </a:fld>
+            <a:endParaRPr lang="en-US" dirty="0"/>
+          </a:p>
+        </p:txBody>
+      </p:sp>
+      <p:sp>
+        <p:nvSpPr>
+          <p:cNvPr id="5" name="Footer Placeholder 4"/>
+          <p:cNvSpPr>
+            <a:spLocks noGrp="1"/>
+          </p:cNvSpPr>
+          <p:nvPr>
+            <p:ph type="ftr" sz="quarter" idx="11"/>
+          </p:nvPr>
+        </p:nvSpPr>
+        <p:spPr/>
+        <p:txBody>
+          <a:bodyPr/>
+          <a:lstStyle/>
+          <a:p>
+            <a:endParaRPr lang="en-US" dirty="0"/>
+          </a:p>
+        </p:txBody>
+      </p:sp>
+      <p:sp>
+        <p:nvSpPr>
+          <p:cNvPr id="6" name="Slide Number Placeholder 5"/>
+          <p:cNvSpPr>
+            <a:spLocks noGrp="1"/>
+          </p:cNvSpPr>
+          <p:nvPr>
+            <p:ph type="sldNum" sz="quarter" idx="12"/>
+          </p:nvPr>
+        </p:nvSpPr>
+        <p:spPr/>
+        <p:txBody>
+          <a:bodyPr/>
+          <a:lstStyle/>
+          <a:p>
+            <a:fld id="{6D22F896-40B5-4ADD-8801-0D06FADFA095}" type="slidenum">
+              <a:rPr lang="en-US" dirty="0"/>
+              <a:t>‹nº›</a:t>
+            </a:fld>
+            <a:endParaRPr lang="en-US" dirty="0"/>
+          </a:p>
+        </p:txBody>
+      </p:sp>
+      <p:cxnSp>
+        <p:nvCxnSpPr>
+          <p:cNvPr id="26" name="Straight Connector 25"/>
+          <p:cNvCxnSpPr/>
+          <p:nvPr/>
+        </p:nvCxnSpPr>
+        <p:spPr>
+          <a:xfrm>
+            <a:off x="1090422" y="1385316"/>
+            <a:ext cx="7205642" cy="0"/>
+          </a:xfrm>
+          <a:prstGeom prst="line">
+            <a:avLst/>
+          </a:prstGeom>
+          <a:ln w="31750"/>
+        </p:spPr>
+        <p:style>
+          <a:lnRef idx="3">
+            <a:schemeClr val="accent1"/>
+          </a:lnRef>
+          <a:fillRef idx="0">
+            <a:schemeClr val="accent1"/>
+          </a:fillRef>
+          <a:effectRef idx="2">
+            <a:schemeClr val="accent1"/>
+          </a:effectRef>
+          <a:fontRef idx="minor">
+            <a:schemeClr val="tx1"/>
+          </a:fontRef>
+        </p:style>
+      </p:cxnSp>
+    </p:spTree>
+    <p:extLst>
+      <p:ext uri="{BB962C8B-B14F-4D97-AF65-F5344CB8AC3E}">
+        <p14:creationId xmlns:p14="http://schemas.microsoft.com/office/powerpoint/2010/main" val="3331470041"/>
+      </p:ext>
+    </p:extLst>
+  </p:cSld>
+  <p:clrMapOvr>
+    <a:masterClrMapping/>
+  </p:clrMapOvr>
+  <p:hf sldNum="0" hdr="0" ftr="0" dt="0"/>
+</p:sldLayout>
+</file>
+
+<file path=ppt/slideLayouts/slideLayout11.xml><?xml version="1.0" encoding="utf-8"?>
+<p:sldLayout xmlns:a="http://schemas.openxmlformats.org/drawingml/2006/main" xmlns:r="http://schemas.openxmlformats.org/officeDocument/2006/relationships" xmlns:p="http://schemas.openxmlformats.org/presentationml/2006/main" type="vertTitleAndTx" preserve="1">
+  <p:cSld name="Título Vertical e Texto">
+    <p:spTree>
+      <p:nvGrpSpPr>
+        <p:cNvPr id="1" name=""/>
+        <p:cNvGrpSpPr/>
+        <p:nvPr/>
+      </p:nvGrpSpPr>
+      <p:grpSpPr>
+        <a:xfrm>
+          <a:off x="0" y="0"/>
+          <a:ext cx="0" cy="0"/>
+          <a:chOff x="0" y="0"/>
+          <a:chExt cx="0" cy="0"/>
+        </a:xfrm>
+      </p:grpSpPr>
+      <p:sp>
+        <p:nvSpPr>
+          <p:cNvPr id="2" name="Vertical Title 1"/>
+          <p:cNvSpPr>
+            <a:spLocks noGrp="1"/>
+          </p:cNvSpPr>
+          <p:nvPr>
+            <p:ph type="title" orient="vert"/>
+          </p:nvPr>
+        </p:nvSpPr>
+        <p:spPr>
+          <a:xfrm>
+            <a:off x="7079333" y="599230"/>
+            <a:ext cx="1211807" cy="3494917"/>
+          </a:xfrm>
+        </p:spPr>
+        <p:txBody>
+          <a:bodyPr vert="eaVert"/>
+          <a:lstStyle>
+            <a:lvl1pPr algn="l">
+              <a:defRPr/>
+            </a:lvl1pPr>
+          </a:lstStyle>
+          <a:p>
+            <a:r>
+              <a:rPr lang="pt-PT"/>
+              <a:t>Clique para editar o estilo de título do Modelo Global</a:t>
+            </a:r>
+            <a:endParaRPr lang="en-US" dirty="0"/>
+          </a:p>
+        </p:txBody>
+      </p:sp>
+      <p:sp>
+        <p:nvSpPr>
+          <p:cNvPr id="3" name="Vertical Text Placeholder 2"/>
+          <p:cNvSpPr>
+            <a:spLocks noGrp="1"/>
+          </p:cNvSpPr>
+          <p:nvPr>
+            <p:ph type="body" orient="vert" idx="1"/>
+          </p:nvPr>
+        </p:nvSpPr>
+        <p:spPr>
+          <a:xfrm>
+            <a:off x="1083504" y="599230"/>
+            <a:ext cx="5871623" cy="3494917"/>
+          </a:xfrm>
+        </p:spPr>
+        <p:txBody>
+          <a:bodyPr vert="eaVert"/>
+          <a:lstStyle/>
+          <a:p>
+            <a:pPr lvl="0"/>
+            <a:r>
+              <a:rPr lang="pt-PT"/>
+              <a:t>Clique para editar os estilos do texto de Modelo Global</a:t>
+            </a:r>
+          </a:p>
+          <a:p>
+            <a:pPr lvl="1"/>
+            <a:r>
+              <a:rPr lang="pt-PT"/>
+              <a:t>Segundo nível</a:t>
+            </a:r>
+          </a:p>
+          <a:p>
+            <a:pPr lvl="2"/>
+            <a:r>
+              <a:rPr lang="pt-PT"/>
+              <a:t>Terceiro nível</a:t>
+            </a:r>
+          </a:p>
+          <a:p>
+            <a:pPr lvl="3"/>
+            <a:r>
+              <a:rPr lang="pt-PT"/>
+              <a:t>Quarto nível</a:t>
+            </a:r>
+          </a:p>
+          <a:p>
+            <a:pPr lvl="4"/>
+            <a:r>
+              <a:rPr lang="pt-PT"/>
+              <a:t>Quinto nível</a:t>
+            </a:r>
+            <a:endParaRPr lang="en-US" dirty="0"/>
+          </a:p>
+        </p:txBody>
+      </p:sp>
+      <p:sp>
+        <p:nvSpPr>
+          <p:cNvPr id="4" name="Date Placeholder 3"/>
+          <p:cNvSpPr>
+            <a:spLocks noGrp="1"/>
+          </p:cNvSpPr>
+          <p:nvPr>
+            <p:ph type="dt" sz="half" idx="10"/>
+          </p:nvPr>
+        </p:nvSpPr>
+        <p:spPr/>
+        <p:txBody>
+          <a:bodyPr/>
+          <a:lstStyle/>
+          <a:p>
+            <a:fld id="{48A87A34-81AB-432B-8DAE-1953F412C126}" type="datetimeFigureOut">
+              <a:rPr lang="en-US" dirty="0"/>
+              <a:t>5/5/2026</a:t>
+            </a:fld>
+            <a:endParaRPr lang="en-US" dirty="0"/>
+          </a:p>
+        </p:txBody>
+      </p:sp>
+      <p:sp>
+        <p:nvSpPr>
+          <p:cNvPr id="5" name="Footer Placeholder 4"/>
+          <p:cNvSpPr>
+            <a:spLocks noGrp="1"/>
+          </p:cNvSpPr>
+          <p:nvPr>
+            <p:ph type="ftr" sz="quarter" idx="11"/>
+          </p:nvPr>
+        </p:nvSpPr>
+        <p:spPr/>
+        <p:txBody>
+          <a:bodyPr/>
+          <a:lstStyle/>
+          <a:p>
+            <a:endParaRPr lang="en-US" dirty="0"/>
+          </a:p>
+        </p:txBody>
+      </p:sp>
+      <p:sp>
+        <p:nvSpPr>
+          <p:cNvPr id="6" name="Slide Number Placeholder 5"/>
+          <p:cNvSpPr>
+            <a:spLocks noGrp="1"/>
+          </p:cNvSpPr>
+          <p:nvPr>
+            <p:ph type="sldNum" sz="quarter" idx="12"/>
+          </p:nvPr>
+        </p:nvSpPr>
+        <p:spPr/>
+        <p:txBody>
+          <a:bodyPr/>
+          <a:lstStyle/>
+          <a:p>
+            <a:fld id="{6D22F896-40B5-4ADD-8801-0D06FADFA095}" type="slidenum">
+              <a:rPr lang="en-US" dirty="0"/>
+              <a:t>‹nº›</a:t>
+            </a:fld>
+            <a:endParaRPr lang="en-US" dirty="0"/>
+          </a:p>
+        </p:txBody>
+      </p:sp>
+      <p:cxnSp>
+        <p:nvCxnSpPr>
+          <p:cNvPr id="15" name="Straight Connector 14"/>
+          <p:cNvCxnSpPr/>
+          <p:nvPr/>
+        </p:nvCxnSpPr>
+        <p:spPr>
+          <a:xfrm>
+            <a:off x="7079333" y="599230"/>
+            <a:ext cx="0" cy="3494917"/>
+          </a:xfrm>
+          <a:prstGeom prst="line">
+            <a:avLst/>
+          </a:prstGeom>
+          <a:ln w="31750"/>
+        </p:spPr>
+        <p:style>
+          <a:lnRef idx="3">
+            <a:schemeClr val="accent1"/>
+          </a:lnRef>
+          <a:fillRef idx="0">
+            <a:schemeClr val="accent1"/>
+          </a:fillRef>
+          <a:effectRef idx="2">
+            <a:schemeClr val="accent1"/>
+          </a:effectRef>
+          <a:fontRef idx="minor">
+            <a:schemeClr val="tx1"/>
+          </a:fontRef>
+        </p:style>
+      </p:cxnSp>
+    </p:spTree>
+    <p:extLst>
+      <p:ext uri="{BB962C8B-B14F-4D97-AF65-F5344CB8AC3E}">
+        <p14:creationId xmlns:p14="http://schemas.microsoft.com/office/powerpoint/2010/main" val="1756497580"/>
+      </p:ext>
+    </p:extLst>
+  </p:cSld>
+  <p:clrMapOvr>
+    <a:masterClrMapping/>
+  </p:clrMapOvr>
+  <p:hf sldNum="0" hdr="0" ftr="0" dt="0"/>
+</p:sldLayout>
+</file>
+
+<file path=ppt/slideLayouts/slideLayout12.xml><?xml version="1.0" encoding="utf-8"?>
+<p:sldLayout xmlns:a="http://schemas.openxmlformats.org/drawingml/2006/main" xmlns:r="http://schemas.openxmlformats.org/officeDocument/2006/relationships" xmlns:p="http://schemas.openxmlformats.org/presentationml/2006/main">
   <p:cSld name="DEFAULT">
     <p:bg>
       <p:bgRef idx="1001">
@@ -834,6 +1262,11 @@
         </a:xfrm>
       </p:grpSpPr>
     </p:spTree>
+    <p:extLst>
+      <p:ext uri="{BB962C8B-B14F-4D97-AF65-F5344CB8AC3E}">
+        <p14:creationId xmlns:p14="http://schemas.microsoft.com/office/powerpoint/2010/main" val="1555776610"/>
+      </p:ext>
+    </p:extLst>
   </p:cSld>
   <p:clrMapOvr>
     <a:masterClrMapping/>
@@ -841,9 +1274,9 @@
 </p:sldLayout>
 </file>
 
-<file path=ppt/slideMasters/slideMaster1.xml><?xml version="1.0" encoding="utf-8"?>
-<p:sldMaster xmlns:a="http://schemas.openxmlformats.org/drawingml/2006/main" xmlns:r="http://schemas.openxmlformats.org/officeDocument/2006/relationships" xmlns:p="http://schemas.openxmlformats.org/presentationml/2006/main">
-  <p:cSld>
+<file path=ppt/slideLayouts/slideLayout2.xml><?xml version="1.0" encoding="utf-8"?>
+<p:sldLayout xmlns:a="http://schemas.openxmlformats.org/drawingml/2006/main" xmlns:r="http://schemas.openxmlformats.org/officeDocument/2006/relationships" xmlns:p="http://schemas.openxmlformats.org/presentationml/2006/main" type="obj" preserve="1">
+  <p:cSld name="Título e Objeto">
     <p:spTree>
       <p:nvGrpSpPr>
         <p:cNvPr id="1" name=""/>
@@ -858,24 +1291,2527 @@
           <a:chExt cx="0" cy="0"/>
         </a:xfrm>
       </p:grpSpPr>
+      <p:sp>
+        <p:nvSpPr>
+          <p:cNvPr id="2" name="Title 1"/>
+          <p:cNvSpPr>
+            <a:spLocks noGrp="1"/>
+          </p:cNvSpPr>
+          <p:nvPr>
+            <p:ph type="title"/>
+          </p:nvPr>
+        </p:nvSpPr>
+        <p:spPr/>
+        <p:txBody>
+          <a:bodyPr/>
+          <a:lstStyle/>
+          <a:p>
+            <a:r>
+              <a:rPr lang="pt-PT"/>
+              <a:t>Clique para editar o estilo de título do Modelo Global</a:t>
+            </a:r>
+            <a:endParaRPr lang="en-US" dirty="0"/>
+          </a:p>
+        </p:txBody>
+      </p:sp>
+      <p:sp>
+        <p:nvSpPr>
+          <p:cNvPr id="3" name="Content Placeholder 2"/>
+          <p:cNvSpPr>
+            <a:spLocks noGrp="1"/>
+          </p:cNvSpPr>
+          <p:nvPr>
+            <p:ph idx="1"/>
+          </p:nvPr>
+        </p:nvSpPr>
+        <p:spPr/>
+        <p:txBody>
+          <a:bodyPr anchor="t"/>
+          <a:lstStyle/>
+          <a:p>
+            <a:pPr lvl="0"/>
+            <a:r>
+              <a:rPr lang="pt-PT"/>
+              <a:t>Clique para editar os estilos do texto de Modelo Global</a:t>
+            </a:r>
+          </a:p>
+          <a:p>
+            <a:pPr lvl="1"/>
+            <a:r>
+              <a:rPr lang="pt-PT"/>
+              <a:t>Segundo nível</a:t>
+            </a:r>
+          </a:p>
+          <a:p>
+            <a:pPr lvl="2"/>
+            <a:r>
+              <a:rPr lang="pt-PT"/>
+              <a:t>Terceiro nível</a:t>
+            </a:r>
+          </a:p>
+          <a:p>
+            <a:pPr lvl="3"/>
+            <a:r>
+              <a:rPr lang="pt-PT"/>
+              <a:t>Quarto nível</a:t>
+            </a:r>
+          </a:p>
+          <a:p>
+            <a:pPr lvl="4"/>
+            <a:r>
+              <a:rPr lang="pt-PT"/>
+              <a:t>Quinto nível</a:t>
+            </a:r>
+            <a:endParaRPr lang="en-US" dirty="0"/>
+          </a:p>
+        </p:txBody>
+      </p:sp>
+      <p:sp>
+        <p:nvSpPr>
+          <p:cNvPr id="4" name="Date Placeholder 3"/>
+          <p:cNvSpPr>
+            <a:spLocks noGrp="1"/>
+          </p:cNvSpPr>
+          <p:nvPr>
+            <p:ph type="dt" sz="half" idx="10"/>
+          </p:nvPr>
+        </p:nvSpPr>
+        <p:spPr/>
+        <p:txBody>
+          <a:bodyPr/>
+          <a:lstStyle/>
+          <a:p>
+            <a:fld id="{48A87A34-81AB-432B-8DAE-1953F412C126}" type="datetimeFigureOut">
+              <a:rPr lang="en-US" dirty="0"/>
+              <a:t>5/5/2026</a:t>
+            </a:fld>
+            <a:endParaRPr lang="en-US" dirty="0"/>
+          </a:p>
+        </p:txBody>
+      </p:sp>
+      <p:sp>
+        <p:nvSpPr>
+          <p:cNvPr id="5" name="Footer Placeholder 4"/>
+          <p:cNvSpPr>
+            <a:spLocks noGrp="1"/>
+          </p:cNvSpPr>
+          <p:nvPr>
+            <p:ph type="ftr" sz="quarter" idx="11"/>
+          </p:nvPr>
+        </p:nvSpPr>
+        <p:spPr/>
+        <p:txBody>
+          <a:bodyPr/>
+          <a:lstStyle/>
+          <a:p>
+            <a:endParaRPr lang="en-US" dirty="0"/>
+          </a:p>
+        </p:txBody>
+      </p:sp>
+      <p:sp>
+        <p:nvSpPr>
+          <p:cNvPr id="6" name="Slide Number Placeholder 5"/>
+          <p:cNvSpPr>
+            <a:spLocks noGrp="1"/>
+          </p:cNvSpPr>
+          <p:nvPr>
+            <p:ph type="sldNum" sz="quarter" idx="12"/>
+          </p:nvPr>
+        </p:nvSpPr>
+        <p:spPr/>
+        <p:txBody>
+          <a:bodyPr/>
+          <a:lstStyle/>
+          <a:p>
+            <a:fld id="{6D22F896-40B5-4ADD-8801-0D06FADFA095}" type="slidenum">
+              <a:rPr lang="en-US" dirty="0"/>
+              <a:t>‹nº›</a:t>
+            </a:fld>
+            <a:endParaRPr lang="en-US" dirty="0"/>
+          </a:p>
+        </p:txBody>
+      </p:sp>
+      <p:cxnSp>
+        <p:nvCxnSpPr>
+          <p:cNvPr id="33" name="Straight Connector 32"/>
+          <p:cNvCxnSpPr/>
+          <p:nvPr/>
+        </p:nvCxnSpPr>
+        <p:spPr>
+          <a:xfrm>
+            <a:off x="1090422" y="1385316"/>
+            <a:ext cx="7205642" cy="0"/>
+          </a:xfrm>
+          <a:prstGeom prst="line">
+            <a:avLst/>
+          </a:prstGeom>
+          <a:ln w="31750"/>
+        </p:spPr>
+        <p:style>
+          <a:lnRef idx="3">
+            <a:schemeClr val="accent1"/>
+          </a:lnRef>
+          <a:fillRef idx="0">
+            <a:schemeClr val="accent1"/>
+          </a:fillRef>
+          <a:effectRef idx="2">
+            <a:schemeClr val="accent1"/>
+          </a:effectRef>
+          <a:fontRef idx="minor">
+            <a:schemeClr val="tx1"/>
+          </a:fontRef>
+        </p:style>
+      </p:cxnSp>
     </p:spTree>
+    <p:extLst>
+      <p:ext uri="{BB962C8B-B14F-4D97-AF65-F5344CB8AC3E}">
+        <p14:creationId xmlns:p14="http://schemas.microsoft.com/office/powerpoint/2010/main" val="2820119360"/>
+      </p:ext>
+    </p:extLst>
+  </p:cSld>
+  <p:clrMapOvr>
+    <a:masterClrMapping/>
+  </p:clrMapOvr>
+  <p:hf sldNum="0" hdr="0" ftr="0" dt="0"/>
+</p:sldLayout>
+</file>
+
+<file path=ppt/slideLayouts/slideLayout3.xml><?xml version="1.0" encoding="utf-8"?>
+<p:sldLayout xmlns:a="http://schemas.openxmlformats.org/drawingml/2006/main" xmlns:r="http://schemas.openxmlformats.org/officeDocument/2006/relationships" xmlns:p="http://schemas.openxmlformats.org/presentationml/2006/main" type="secHead" preserve="1">
+  <p:cSld name="Cabeçalho da Secção">
+    <p:spTree>
+      <p:nvGrpSpPr>
+        <p:cNvPr id="1" name=""/>
+        <p:cNvGrpSpPr/>
+        <p:nvPr/>
+      </p:nvGrpSpPr>
+      <p:grpSpPr>
+        <a:xfrm>
+          <a:off x="0" y="0"/>
+          <a:ext cx="0" cy="0"/>
+          <a:chOff x="0" y="0"/>
+          <a:chExt cx="0" cy="0"/>
+        </a:xfrm>
+      </p:grpSpPr>
+      <p:sp>
+        <p:nvSpPr>
+          <p:cNvPr id="2" name="Title 1"/>
+          <p:cNvSpPr>
+            <a:spLocks noGrp="1"/>
+          </p:cNvSpPr>
+          <p:nvPr>
+            <p:ph type="title"/>
+          </p:nvPr>
+        </p:nvSpPr>
+        <p:spPr>
+          <a:xfrm>
+            <a:off x="1090679" y="1317097"/>
+            <a:ext cx="6482366" cy="1415963"/>
+          </a:xfrm>
+        </p:spPr>
+        <p:txBody>
+          <a:bodyPr anchor="b">
+            <a:normAutofit/>
+          </a:bodyPr>
+          <a:lstStyle>
+            <a:lvl1pPr algn="l">
+              <a:defRPr sz="2700"/>
+            </a:lvl1pPr>
+          </a:lstStyle>
+          <a:p>
+            <a:r>
+              <a:rPr lang="pt-PT"/>
+              <a:t>Clique para editar o estilo de título do Modelo Global</a:t>
+            </a:r>
+            <a:endParaRPr lang="en-US" dirty="0"/>
+          </a:p>
+        </p:txBody>
+      </p:sp>
+      <p:sp>
+        <p:nvSpPr>
+          <p:cNvPr id="3" name="Text Placeholder 2"/>
+          <p:cNvSpPr>
+            <a:spLocks noGrp="1"/>
+          </p:cNvSpPr>
+          <p:nvPr>
+            <p:ph type="body" idx="1"/>
+          </p:nvPr>
+        </p:nvSpPr>
+        <p:spPr>
+          <a:xfrm>
+            <a:off x="1090679" y="2854647"/>
+            <a:ext cx="6472835" cy="759697"/>
+          </a:xfrm>
+        </p:spPr>
+        <p:txBody>
+          <a:bodyPr tIns="91440">
+            <a:normAutofit/>
+          </a:bodyPr>
+          <a:lstStyle>
+            <a:lvl1pPr marL="0" indent="0" algn="l">
+              <a:buNone/>
+              <a:defRPr sz="1350">
+                <a:solidFill>
+                  <a:schemeClr val="tx1"/>
+                </a:solidFill>
+              </a:defRPr>
+            </a:lvl1pPr>
+            <a:lvl2pPr marL="342900" indent="0">
+              <a:buNone/>
+              <a:defRPr sz="1350">
+                <a:solidFill>
+                  <a:schemeClr val="tx1">
+                    <a:tint val="75000"/>
+                  </a:schemeClr>
+                </a:solidFill>
+              </a:defRPr>
+            </a:lvl2pPr>
+            <a:lvl3pPr marL="685800" indent="0">
+              <a:buNone/>
+              <a:defRPr sz="1350">
+                <a:solidFill>
+                  <a:schemeClr val="tx1">
+                    <a:tint val="75000"/>
+                  </a:schemeClr>
+                </a:solidFill>
+              </a:defRPr>
+            </a:lvl3pPr>
+            <a:lvl4pPr marL="1028700" indent="0">
+              <a:buNone/>
+              <a:defRPr sz="1200">
+                <a:solidFill>
+                  <a:schemeClr val="tx1">
+                    <a:tint val="75000"/>
+                  </a:schemeClr>
+                </a:solidFill>
+              </a:defRPr>
+            </a:lvl4pPr>
+            <a:lvl5pPr marL="1371600" indent="0">
+              <a:buNone/>
+              <a:defRPr sz="1200">
+                <a:solidFill>
+                  <a:schemeClr val="tx1">
+                    <a:tint val="75000"/>
+                  </a:schemeClr>
+                </a:solidFill>
+              </a:defRPr>
+            </a:lvl5pPr>
+            <a:lvl6pPr marL="1714500" indent="0">
+              <a:buNone/>
+              <a:defRPr sz="1200">
+                <a:solidFill>
+                  <a:schemeClr val="tx1">
+                    <a:tint val="75000"/>
+                  </a:schemeClr>
+                </a:solidFill>
+              </a:defRPr>
+            </a:lvl6pPr>
+            <a:lvl7pPr marL="2057400" indent="0">
+              <a:buNone/>
+              <a:defRPr sz="1200">
+                <a:solidFill>
+                  <a:schemeClr val="tx1">
+                    <a:tint val="75000"/>
+                  </a:schemeClr>
+                </a:solidFill>
+              </a:defRPr>
+            </a:lvl7pPr>
+            <a:lvl8pPr marL="2400300" indent="0">
+              <a:buNone/>
+              <a:defRPr sz="1200">
+                <a:solidFill>
+                  <a:schemeClr val="tx1">
+                    <a:tint val="75000"/>
+                  </a:schemeClr>
+                </a:solidFill>
+              </a:defRPr>
+            </a:lvl8pPr>
+            <a:lvl9pPr marL="2743200" indent="0">
+              <a:buNone/>
+              <a:defRPr sz="1200">
+                <a:solidFill>
+                  <a:schemeClr val="tx1">
+                    <a:tint val="75000"/>
+                  </a:schemeClr>
+                </a:solidFill>
+              </a:defRPr>
+            </a:lvl9pPr>
+          </a:lstStyle>
+          <a:p>
+            <a:pPr lvl="0"/>
+            <a:r>
+              <a:rPr lang="pt-PT"/>
+              <a:t>Clique para editar os estilos do texto de Modelo Global</a:t>
+            </a:r>
+          </a:p>
+        </p:txBody>
+      </p:sp>
+      <p:sp>
+        <p:nvSpPr>
+          <p:cNvPr id="4" name="Date Placeholder 3"/>
+          <p:cNvSpPr>
+            <a:spLocks noGrp="1"/>
+          </p:cNvSpPr>
+          <p:nvPr>
+            <p:ph type="dt" sz="half" idx="10"/>
+          </p:nvPr>
+        </p:nvSpPr>
+        <p:spPr/>
+        <p:txBody>
+          <a:bodyPr/>
+          <a:lstStyle/>
+          <a:p>
+            <a:fld id="{48A87A34-81AB-432B-8DAE-1953F412C126}" type="datetimeFigureOut">
+              <a:rPr lang="en-US" dirty="0"/>
+              <a:t>5/5/2026</a:t>
+            </a:fld>
+            <a:endParaRPr lang="en-US" dirty="0"/>
+          </a:p>
+        </p:txBody>
+      </p:sp>
+      <p:sp>
+        <p:nvSpPr>
+          <p:cNvPr id="5" name="Footer Placeholder 4"/>
+          <p:cNvSpPr>
+            <a:spLocks noGrp="1"/>
+          </p:cNvSpPr>
+          <p:nvPr>
+            <p:ph type="ftr" sz="quarter" idx="11"/>
+          </p:nvPr>
+        </p:nvSpPr>
+        <p:spPr/>
+        <p:txBody>
+          <a:bodyPr/>
+          <a:lstStyle/>
+          <a:p>
+            <a:endParaRPr lang="en-US" dirty="0"/>
+          </a:p>
+        </p:txBody>
+      </p:sp>
+      <p:sp>
+        <p:nvSpPr>
+          <p:cNvPr id="6" name="Slide Number Placeholder 5"/>
+          <p:cNvSpPr>
+            <a:spLocks noGrp="1"/>
+          </p:cNvSpPr>
+          <p:nvPr>
+            <p:ph type="sldNum" sz="quarter" idx="12"/>
+          </p:nvPr>
+        </p:nvSpPr>
+        <p:spPr/>
+        <p:txBody>
+          <a:bodyPr/>
+          <a:lstStyle/>
+          <a:p>
+            <a:fld id="{6D22F896-40B5-4ADD-8801-0D06FADFA095}" type="slidenum">
+              <a:rPr lang="en-US" dirty="0"/>
+              <a:t>‹nº›</a:t>
+            </a:fld>
+            <a:endParaRPr lang="en-US" dirty="0"/>
+          </a:p>
+        </p:txBody>
+      </p:sp>
+      <p:cxnSp>
+        <p:nvCxnSpPr>
+          <p:cNvPr id="15" name="Straight Connector 14"/>
+          <p:cNvCxnSpPr/>
+          <p:nvPr/>
+        </p:nvCxnSpPr>
+        <p:spPr>
+          <a:xfrm>
+            <a:off x="1090679" y="2853739"/>
+            <a:ext cx="6472835" cy="0"/>
+          </a:xfrm>
+          <a:prstGeom prst="line">
+            <a:avLst/>
+          </a:prstGeom>
+          <a:ln w="31750"/>
+        </p:spPr>
+        <p:style>
+          <a:lnRef idx="3">
+            <a:schemeClr val="accent1"/>
+          </a:lnRef>
+          <a:fillRef idx="0">
+            <a:schemeClr val="accent1"/>
+          </a:fillRef>
+          <a:effectRef idx="2">
+            <a:schemeClr val="accent1"/>
+          </a:effectRef>
+          <a:fontRef idx="minor">
+            <a:schemeClr val="tx1"/>
+          </a:fontRef>
+        </p:style>
+      </p:cxnSp>
+    </p:spTree>
+    <p:extLst>
+      <p:ext uri="{BB962C8B-B14F-4D97-AF65-F5344CB8AC3E}">
+        <p14:creationId xmlns:p14="http://schemas.microsoft.com/office/powerpoint/2010/main" val="4285077743"/>
+      </p:ext>
+    </p:extLst>
+  </p:cSld>
+  <p:clrMapOvr>
+    <a:masterClrMapping/>
+  </p:clrMapOvr>
+  <p:hf sldNum="0" hdr="0" ftr="0" dt="0"/>
+</p:sldLayout>
+</file>
+
+<file path=ppt/slideLayouts/slideLayout4.xml><?xml version="1.0" encoding="utf-8"?>
+<p:sldLayout xmlns:a="http://schemas.openxmlformats.org/drawingml/2006/main" xmlns:r="http://schemas.openxmlformats.org/officeDocument/2006/relationships" xmlns:p="http://schemas.openxmlformats.org/presentationml/2006/main" type="twoObj" preserve="1">
+  <p:cSld name="Conteúdo Duplo">
+    <p:spTree>
+      <p:nvGrpSpPr>
+        <p:cNvPr id="1" name=""/>
+        <p:cNvGrpSpPr/>
+        <p:nvPr/>
+      </p:nvGrpSpPr>
+      <p:grpSpPr>
+        <a:xfrm>
+          <a:off x="0" y="0"/>
+          <a:ext cx="0" cy="0"/>
+          <a:chOff x="0" y="0"/>
+          <a:chExt cx="0" cy="0"/>
+        </a:xfrm>
+      </p:grpSpPr>
+      <p:sp>
+        <p:nvSpPr>
+          <p:cNvPr id="2" name="Title 1"/>
+          <p:cNvSpPr>
+            <a:spLocks noGrp="1"/>
+          </p:cNvSpPr>
+          <p:nvPr>
+            <p:ph type="title"/>
+          </p:nvPr>
+        </p:nvSpPr>
+        <p:spPr>
+          <a:xfrm>
+            <a:off x="1086913" y="603667"/>
+            <a:ext cx="7204226" cy="794479"/>
+          </a:xfrm>
+        </p:spPr>
+        <p:txBody>
+          <a:bodyPr/>
+          <a:lstStyle/>
+          <a:p>
+            <a:r>
+              <a:rPr lang="pt-PT"/>
+              <a:t>Clique para editar o estilo de título do Modelo Global</a:t>
+            </a:r>
+            <a:endParaRPr lang="en-US" dirty="0"/>
+          </a:p>
+        </p:txBody>
+      </p:sp>
+      <p:sp>
+        <p:nvSpPr>
+          <p:cNvPr id="3" name="Content Placeholder 2"/>
+          <p:cNvSpPr>
+            <a:spLocks noGrp="1"/>
+          </p:cNvSpPr>
+          <p:nvPr>
+            <p:ph sz="half" idx="1"/>
+          </p:nvPr>
+        </p:nvSpPr>
+        <p:spPr>
+          <a:xfrm>
+            <a:off x="1085498" y="1508159"/>
+            <a:ext cx="3483864" cy="2586446"/>
+          </a:xfrm>
+        </p:spPr>
+        <p:txBody>
+          <a:bodyPr/>
+          <a:lstStyle/>
+          <a:p>
+            <a:pPr lvl="0"/>
+            <a:r>
+              <a:rPr lang="pt-PT"/>
+              <a:t>Clique para editar os estilos do texto de Modelo Global</a:t>
+            </a:r>
+          </a:p>
+          <a:p>
+            <a:pPr lvl="1"/>
+            <a:r>
+              <a:rPr lang="pt-PT"/>
+              <a:t>Segundo nível</a:t>
+            </a:r>
+          </a:p>
+          <a:p>
+            <a:pPr lvl="2"/>
+            <a:r>
+              <a:rPr lang="pt-PT"/>
+              <a:t>Terceiro nível</a:t>
+            </a:r>
+          </a:p>
+          <a:p>
+            <a:pPr lvl="3"/>
+            <a:r>
+              <a:rPr lang="pt-PT"/>
+              <a:t>Quarto nível</a:t>
+            </a:r>
+          </a:p>
+          <a:p>
+            <a:pPr lvl="4"/>
+            <a:r>
+              <a:rPr lang="pt-PT"/>
+              <a:t>Quinto nível</a:t>
+            </a:r>
+            <a:endParaRPr lang="en-US" dirty="0"/>
+          </a:p>
+        </p:txBody>
+      </p:sp>
+      <p:sp>
+        <p:nvSpPr>
+          <p:cNvPr id="4" name="Content Placeholder 3"/>
+          <p:cNvSpPr>
+            <a:spLocks noGrp="1"/>
+          </p:cNvSpPr>
+          <p:nvPr>
+            <p:ph sz="half" idx="2"/>
+          </p:nvPr>
+        </p:nvSpPr>
+        <p:spPr>
+          <a:xfrm>
+            <a:off x="4810328" y="1513007"/>
+            <a:ext cx="3483864" cy="2581140"/>
+          </a:xfrm>
+        </p:spPr>
+        <p:txBody>
+          <a:bodyPr/>
+          <a:lstStyle/>
+          <a:p>
+            <a:pPr lvl="0"/>
+            <a:r>
+              <a:rPr lang="pt-PT"/>
+              <a:t>Clique para editar os estilos do texto de Modelo Global</a:t>
+            </a:r>
+          </a:p>
+          <a:p>
+            <a:pPr lvl="1"/>
+            <a:r>
+              <a:rPr lang="pt-PT"/>
+              <a:t>Segundo nível</a:t>
+            </a:r>
+          </a:p>
+          <a:p>
+            <a:pPr lvl="2"/>
+            <a:r>
+              <a:rPr lang="pt-PT"/>
+              <a:t>Terceiro nível</a:t>
+            </a:r>
+          </a:p>
+          <a:p>
+            <a:pPr lvl="3"/>
+            <a:r>
+              <a:rPr lang="pt-PT"/>
+              <a:t>Quarto nível</a:t>
+            </a:r>
+          </a:p>
+          <a:p>
+            <a:pPr lvl="4"/>
+            <a:r>
+              <a:rPr lang="pt-PT"/>
+              <a:t>Quinto nível</a:t>
+            </a:r>
+            <a:endParaRPr lang="en-US" dirty="0"/>
+          </a:p>
+        </p:txBody>
+      </p:sp>
+      <p:sp>
+        <p:nvSpPr>
+          <p:cNvPr id="5" name="Date Placeholder 4"/>
+          <p:cNvSpPr>
+            <a:spLocks noGrp="1"/>
+          </p:cNvSpPr>
+          <p:nvPr>
+            <p:ph type="dt" sz="half" idx="10"/>
+          </p:nvPr>
+        </p:nvSpPr>
+        <p:spPr/>
+        <p:txBody>
+          <a:bodyPr/>
+          <a:lstStyle/>
+          <a:p>
+            <a:fld id="{48A87A34-81AB-432B-8DAE-1953F412C126}" type="datetimeFigureOut">
+              <a:rPr lang="en-US" dirty="0"/>
+              <a:t>5/5/2026</a:t>
+            </a:fld>
+            <a:endParaRPr lang="en-US" dirty="0"/>
+          </a:p>
+        </p:txBody>
+      </p:sp>
+      <p:sp>
+        <p:nvSpPr>
+          <p:cNvPr id="6" name="Footer Placeholder 5"/>
+          <p:cNvSpPr>
+            <a:spLocks noGrp="1"/>
+          </p:cNvSpPr>
+          <p:nvPr>
+            <p:ph type="ftr" sz="quarter" idx="11"/>
+          </p:nvPr>
+        </p:nvSpPr>
+        <p:spPr/>
+        <p:txBody>
+          <a:bodyPr/>
+          <a:lstStyle/>
+          <a:p>
+            <a:endParaRPr lang="en-US" dirty="0"/>
+          </a:p>
+        </p:txBody>
+      </p:sp>
+      <p:sp>
+        <p:nvSpPr>
+          <p:cNvPr id="7" name="Slide Number Placeholder 6"/>
+          <p:cNvSpPr>
+            <a:spLocks noGrp="1"/>
+          </p:cNvSpPr>
+          <p:nvPr>
+            <p:ph type="sldNum" sz="quarter" idx="12"/>
+          </p:nvPr>
+        </p:nvSpPr>
+        <p:spPr/>
+        <p:txBody>
+          <a:bodyPr/>
+          <a:lstStyle/>
+          <a:p>
+            <a:fld id="{6D22F896-40B5-4ADD-8801-0D06FADFA095}" type="slidenum">
+              <a:rPr lang="en-US" dirty="0"/>
+              <a:t>‹nº›</a:t>
+            </a:fld>
+            <a:endParaRPr lang="en-US" dirty="0"/>
+          </a:p>
+        </p:txBody>
+      </p:sp>
+      <p:cxnSp>
+        <p:nvCxnSpPr>
+          <p:cNvPr id="35" name="Straight Connector 34"/>
+          <p:cNvCxnSpPr/>
+          <p:nvPr/>
+        </p:nvCxnSpPr>
+        <p:spPr>
+          <a:xfrm>
+            <a:off x="1090422" y="1385316"/>
+            <a:ext cx="7205642" cy="0"/>
+          </a:xfrm>
+          <a:prstGeom prst="line">
+            <a:avLst/>
+          </a:prstGeom>
+          <a:ln w="31750"/>
+        </p:spPr>
+        <p:style>
+          <a:lnRef idx="3">
+            <a:schemeClr val="accent1"/>
+          </a:lnRef>
+          <a:fillRef idx="0">
+            <a:schemeClr val="accent1"/>
+          </a:fillRef>
+          <a:effectRef idx="2">
+            <a:schemeClr val="accent1"/>
+          </a:effectRef>
+          <a:fontRef idx="minor">
+            <a:schemeClr val="tx1"/>
+          </a:fontRef>
+        </p:style>
+      </p:cxnSp>
+    </p:spTree>
+    <p:extLst>
+      <p:ext uri="{BB962C8B-B14F-4D97-AF65-F5344CB8AC3E}">
+        <p14:creationId xmlns:p14="http://schemas.microsoft.com/office/powerpoint/2010/main" val="2906587969"/>
+      </p:ext>
+    </p:extLst>
+  </p:cSld>
+  <p:clrMapOvr>
+    <a:masterClrMapping/>
+  </p:clrMapOvr>
+  <p:hf sldNum="0" hdr="0" ftr="0" dt="0"/>
+</p:sldLayout>
+</file>
+
+<file path=ppt/slideLayouts/slideLayout5.xml><?xml version="1.0" encoding="utf-8"?>
+<p:sldLayout xmlns:a="http://schemas.openxmlformats.org/drawingml/2006/main" xmlns:r="http://schemas.openxmlformats.org/officeDocument/2006/relationships" xmlns:p="http://schemas.openxmlformats.org/presentationml/2006/main" type="twoTxTwoObj" preserve="1">
+  <p:cSld name="Comparação">
+    <p:spTree>
+      <p:nvGrpSpPr>
+        <p:cNvPr id="1" name=""/>
+        <p:cNvGrpSpPr/>
+        <p:nvPr/>
+      </p:nvGrpSpPr>
+      <p:grpSpPr>
+        <a:xfrm>
+          <a:off x="0" y="0"/>
+          <a:ext cx="0" cy="0"/>
+          <a:chOff x="0" y="0"/>
+          <a:chExt cx="0" cy="0"/>
+        </a:xfrm>
+      </p:grpSpPr>
+      <p:sp>
+        <p:nvSpPr>
+          <p:cNvPr id="2" name="Title 1"/>
+          <p:cNvSpPr>
+            <a:spLocks noGrp="1"/>
+          </p:cNvSpPr>
+          <p:nvPr>
+            <p:ph type="title"/>
+          </p:nvPr>
+        </p:nvSpPr>
+        <p:spPr>
+          <a:xfrm>
+            <a:off x="1085394" y="603123"/>
+            <a:ext cx="7205746" cy="792239"/>
+          </a:xfrm>
+        </p:spPr>
+        <p:txBody>
+          <a:bodyPr/>
+          <a:lstStyle/>
+          <a:p>
+            <a:r>
+              <a:rPr lang="pt-PT"/>
+              <a:t>Clique para editar o estilo de título do Modelo Global</a:t>
+            </a:r>
+            <a:endParaRPr lang="en-US" dirty="0"/>
+          </a:p>
+        </p:txBody>
+      </p:sp>
+      <p:sp>
+        <p:nvSpPr>
+          <p:cNvPr id="3" name="Text Placeholder 2"/>
+          <p:cNvSpPr>
+            <a:spLocks noGrp="1"/>
+          </p:cNvSpPr>
+          <p:nvPr>
+            <p:ph type="body" idx="1"/>
+          </p:nvPr>
+        </p:nvSpPr>
+        <p:spPr>
+          <a:xfrm>
+            <a:off x="1085393" y="1514662"/>
+            <a:ext cx="3483864" cy="601457"/>
+          </a:xfrm>
+        </p:spPr>
+        <p:txBody>
+          <a:bodyPr anchor="b">
+            <a:normAutofit/>
+          </a:bodyPr>
+          <a:lstStyle>
+            <a:lvl1pPr marL="0" indent="0">
+              <a:lnSpc>
+                <a:spcPct val="100000"/>
+              </a:lnSpc>
+              <a:buNone/>
+              <a:defRPr sz="1650" b="0" cap="all" baseline="0">
+                <a:solidFill>
+                  <a:schemeClr val="accent1"/>
+                </a:solidFill>
+              </a:defRPr>
+            </a:lvl1pPr>
+            <a:lvl2pPr marL="342900" indent="0">
+              <a:buNone/>
+              <a:defRPr sz="1500" b="1"/>
+            </a:lvl2pPr>
+            <a:lvl3pPr marL="685800" indent="0">
+              <a:buNone/>
+              <a:defRPr sz="1350" b="1"/>
+            </a:lvl3pPr>
+            <a:lvl4pPr marL="1028700" indent="0">
+              <a:buNone/>
+              <a:defRPr sz="1200" b="1"/>
+            </a:lvl4pPr>
+            <a:lvl5pPr marL="1371600" indent="0">
+              <a:buNone/>
+              <a:defRPr sz="1200" b="1"/>
+            </a:lvl5pPr>
+            <a:lvl6pPr marL="1714500" indent="0">
+              <a:buNone/>
+              <a:defRPr sz="1200" b="1"/>
+            </a:lvl6pPr>
+            <a:lvl7pPr marL="2057400" indent="0">
+              <a:buNone/>
+              <a:defRPr sz="1200" b="1"/>
+            </a:lvl7pPr>
+            <a:lvl8pPr marL="2400300" indent="0">
+              <a:buNone/>
+              <a:defRPr sz="1200" b="1"/>
+            </a:lvl8pPr>
+            <a:lvl9pPr marL="2743200" indent="0">
+              <a:buNone/>
+              <a:defRPr sz="1200" b="1"/>
+            </a:lvl9pPr>
+          </a:lstStyle>
+          <a:p>
+            <a:pPr lvl="0"/>
+            <a:r>
+              <a:rPr lang="pt-PT"/>
+              <a:t>Clique para editar os estilos do texto de Modelo Global</a:t>
+            </a:r>
+          </a:p>
+        </p:txBody>
+      </p:sp>
+      <p:sp>
+        <p:nvSpPr>
+          <p:cNvPr id="4" name="Content Placeholder 3"/>
+          <p:cNvSpPr>
+            <a:spLocks noGrp="1"/>
+          </p:cNvSpPr>
+          <p:nvPr>
+            <p:ph sz="half" idx="2"/>
+          </p:nvPr>
+        </p:nvSpPr>
+        <p:spPr>
+          <a:xfrm>
+            <a:off x="1085393" y="2118202"/>
+            <a:ext cx="3483864" cy="1983343"/>
+          </a:xfrm>
+        </p:spPr>
+        <p:txBody>
+          <a:bodyPr/>
+          <a:lstStyle/>
+          <a:p>
+            <a:pPr lvl="0"/>
+            <a:r>
+              <a:rPr lang="pt-PT"/>
+              <a:t>Clique para editar os estilos do texto de Modelo Global</a:t>
+            </a:r>
+          </a:p>
+          <a:p>
+            <a:pPr lvl="1"/>
+            <a:r>
+              <a:rPr lang="pt-PT"/>
+              <a:t>Segundo nível</a:t>
+            </a:r>
+          </a:p>
+          <a:p>
+            <a:pPr lvl="2"/>
+            <a:r>
+              <a:rPr lang="pt-PT"/>
+              <a:t>Terceiro nível</a:t>
+            </a:r>
+          </a:p>
+          <a:p>
+            <a:pPr lvl="3"/>
+            <a:r>
+              <a:rPr lang="pt-PT"/>
+              <a:t>Quarto nível</a:t>
+            </a:r>
+          </a:p>
+          <a:p>
+            <a:pPr lvl="4"/>
+            <a:r>
+              <a:rPr lang="pt-PT"/>
+              <a:t>Quinto nível</a:t>
+            </a:r>
+            <a:endParaRPr lang="en-US" dirty="0"/>
+          </a:p>
+        </p:txBody>
+      </p:sp>
+      <p:sp>
+        <p:nvSpPr>
+          <p:cNvPr id="5" name="Text Placeholder 4"/>
+          <p:cNvSpPr>
+            <a:spLocks noGrp="1"/>
+          </p:cNvSpPr>
+          <p:nvPr>
+            <p:ph type="body" sz="quarter" idx="3"/>
+          </p:nvPr>
+        </p:nvSpPr>
+        <p:spPr>
+          <a:xfrm>
+            <a:off x="4809272" y="1517253"/>
+            <a:ext cx="3483864" cy="601678"/>
+          </a:xfrm>
+        </p:spPr>
+        <p:txBody>
+          <a:bodyPr anchor="b">
+            <a:normAutofit/>
+          </a:bodyPr>
+          <a:lstStyle>
+            <a:lvl1pPr marL="0" indent="0">
+              <a:lnSpc>
+                <a:spcPct val="100000"/>
+              </a:lnSpc>
+              <a:buNone/>
+              <a:defRPr sz="1650" b="0" cap="all" baseline="0">
+                <a:solidFill>
+                  <a:schemeClr val="accent1"/>
+                </a:solidFill>
+              </a:defRPr>
+            </a:lvl1pPr>
+            <a:lvl2pPr marL="342900" indent="0">
+              <a:buNone/>
+              <a:defRPr sz="1500" b="1"/>
+            </a:lvl2pPr>
+            <a:lvl3pPr marL="685800" indent="0">
+              <a:buNone/>
+              <a:defRPr sz="1350" b="1"/>
+            </a:lvl3pPr>
+            <a:lvl4pPr marL="1028700" indent="0">
+              <a:buNone/>
+              <a:defRPr sz="1200" b="1"/>
+            </a:lvl4pPr>
+            <a:lvl5pPr marL="1371600" indent="0">
+              <a:buNone/>
+              <a:defRPr sz="1200" b="1"/>
+            </a:lvl5pPr>
+            <a:lvl6pPr marL="1714500" indent="0">
+              <a:buNone/>
+              <a:defRPr sz="1200" b="1"/>
+            </a:lvl6pPr>
+            <a:lvl7pPr marL="2057400" indent="0">
+              <a:buNone/>
+              <a:defRPr sz="1200" b="1"/>
+            </a:lvl7pPr>
+            <a:lvl8pPr marL="2400300" indent="0">
+              <a:buNone/>
+              <a:defRPr sz="1200" b="1"/>
+            </a:lvl8pPr>
+            <a:lvl9pPr marL="2743200" indent="0">
+              <a:buNone/>
+              <a:defRPr sz="1200" b="1"/>
+            </a:lvl9pPr>
+          </a:lstStyle>
+          <a:p>
+            <a:pPr lvl="0"/>
+            <a:r>
+              <a:rPr lang="pt-PT"/>
+              <a:t>Clique para editar os estilos do texto de Modelo Global</a:t>
+            </a:r>
+          </a:p>
+        </p:txBody>
+      </p:sp>
+      <p:sp>
+        <p:nvSpPr>
+          <p:cNvPr id="6" name="Content Placeholder 5"/>
+          <p:cNvSpPr>
+            <a:spLocks noGrp="1"/>
+          </p:cNvSpPr>
+          <p:nvPr>
+            <p:ph sz="quarter" idx="4"/>
+          </p:nvPr>
+        </p:nvSpPr>
+        <p:spPr>
+          <a:xfrm>
+            <a:off x="4809272" y="2116119"/>
+            <a:ext cx="3483864" cy="1978028"/>
+          </a:xfrm>
+        </p:spPr>
+        <p:txBody>
+          <a:bodyPr/>
+          <a:lstStyle/>
+          <a:p>
+            <a:pPr lvl="0"/>
+            <a:r>
+              <a:rPr lang="pt-PT"/>
+              <a:t>Clique para editar os estilos do texto de Modelo Global</a:t>
+            </a:r>
+          </a:p>
+          <a:p>
+            <a:pPr lvl="1"/>
+            <a:r>
+              <a:rPr lang="pt-PT"/>
+              <a:t>Segundo nível</a:t>
+            </a:r>
+          </a:p>
+          <a:p>
+            <a:pPr lvl="2"/>
+            <a:r>
+              <a:rPr lang="pt-PT"/>
+              <a:t>Terceiro nível</a:t>
+            </a:r>
+          </a:p>
+          <a:p>
+            <a:pPr lvl="3"/>
+            <a:r>
+              <a:rPr lang="pt-PT"/>
+              <a:t>Quarto nível</a:t>
+            </a:r>
+          </a:p>
+          <a:p>
+            <a:pPr lvl="4"/>
+            <a:r>
+              <a:rPr lang="pt-PT"/>
+              <a:t>Quinto nível</a:t>
+            </a:r>
+            <a:endParaRPr lang="en-US" dirty="0"/>
+          </a:p>
+        </p:txBody>
+      </p:sp>
+      <p:sp>
+        <p:nvSpPr>
+          <p:cNvPr id="7" name="Date Placeholder 6"/>
+          <p:cNvSpPr>
+            <a:spLocks noGrp="1"/>
+          </p:cNvSpPr>
+          <p:nvPr>
+            <p:ph type="dt" sz="half" idx="10"/>
+          </p:nvPr>
+        </p:nvSpPr>
+        <p:spPr/>
+        <p:txBody>
+          <a:bodyPr/>
+          <a:lstStyle/>
+          <a:p>
+            <a:fld id="{48A87A34-81AB-432B-8DAE-1953F412C126}" type="datetimeFigureOut">
+              <a:rPr lang="en-US" dirty="0"/>
+              <a:t>5/5/2026</a:t>
+            </a:fld>
+            <a:endParaRPr lang="en-US" dirty="0"/>
+          </a:p>
+        </p:txBody>
+      </p:sp>
+      <p:sp>
+        <p:nvSpPr>
+          <p:cNvPr id="8" name="Footer Placeholder 7"/>
+          <p:cNvSpPr>
+            <a:spLocks noGrp="1"/>
+          </p:cNvSpPr>
+          <p:nvPr>
+            <p:ph type="ftr" sz="quarter" idx="11"/>
+          </p:nvPr>
+        </p:nvSpPr>
+        <p:spPr/>
+        <p:txBody>
+          <a:bodyPr/>
+          <a:lstStyle/>
+          <a:p>
+            <a:endParaRPr lang="en-US" dirty="0"/>
+          </a:p>
+        </p:txBody>
+      </p:sp>
+      <p:sp>
+        <p:nvSpPr>
+          <p:cNvPr id="9" name="Slide Number Placeholder 8"/>
+          <p:cNvSpPr>
+            <a:spLocks noGrp="1"/>
+          </p:cNvSpPr>
+          <p:nvPr>
+            <p:ph type="sldNum" sz="quarter" idx="12"/>
+          </p:nvPr>
+        </p:nvSpPr>
+        <p:spPr/>
+        <p:txBody>
+          <a:bodyPr/>
+          <a:lstStyle/>
+          <a:p>
+            <a:fld id="{6D22F896-40B5-4ADD-8801-0D06FADFA095}" type="slidenum">
+              <a:rPr lang="en-US" dirty="0"/>
+              <a:t>‹nº›</a:t>
+            </a:fld>
+            <a:endParaRPr lang="en-US" dirty="0"/>
+          </a:p>
+        </p:txBody>
+      </p:sp>
+      <p:cxnSp>
+        <p:nvCxnSpPr>
+          <p:cNvPr id="29" name="Straight Connector 28"/>
+          <p:cNvCxnSpPr/>
+          <p:nvPr/>
+        </p:nvCxnSpPr>
+        <p:spPr>
+          <a:xfrm>
+            <a:off x="1090422" y="1385316"/>
+            <a:ext cx="7205642" cy="0"/>
+          </a:xfrm>
+          <a:prstGeom prst="line">
+            <a:avLst/>
+          </a:prstGeom>
+          <a:ln w="31750"/>
+        </p:spPr>
+        <p:style>
+          <a:lnRef idx="3">
+            <a:schemeClr val="accent1"/>
+          </a:lnRef>
+          <a:fillRef idx="0">
+            <a:schemeClr val="accent1"/>
+          </a:fillRef>
+          <a:effectRef idx="2">
+            <a:schemeClr val="accent1"/>
+          </a:effectRef>
+          <a:fontRef idx="minor">
+            <a:schemeClr val="tx1"/>
+          </a:fontRef>
+        </p:style>
+      </p:cxnSp>
+    </p:spTree>
+    <p:extLst>
+      <p:ext uri="{BB962C8B-B14F-4D97-AF65-F5344CB8AC3E}">
+        <p14:creationId xmlns:p14="http://schemas.microsoft.com/office/powerpoint/2010/main" val="3876520014"/>
+      </p:ext>
+    </p:extLst>
+  </p:cSld>
+  <p:clrMapOvr>
+    <a:masterClrMapping/>
+  </p:clrMapOvr>
+  <p:hf sldNum="0" hdr="0" ftr="0" dt="0"/>
+</p:sldLayout>
+</file>
+
+<file path=ppt/slideLayouts/slideLayout6.xml><?xml version="1.0" encoding="utf-8"?>
+<p:sldLayout xmlns:a="http://schemas.openxmlformats.org/drawingml/2006/main" xmlns:r="http://schemas.openxmlformats.org/officeDocument/2006/relationships" xmlns:p="http://schemas.openxmlformats.org/presentationml/2006/main" type="titleOnly" preserve="1">
+  <p:cSld name="Só Título">
+    <p:spTree>
+      <p:nvGrpSpPr>
+        <p:cNvPr id="1" name=""/>
+        <p:cNvGrpSpPr/>
+        <p:nvPr/>
+      </p:nvGrpSpPr>
+      <p:grpSpPr>
+        <a:xfrm>
+          <a:off x="0" y="0"/>
+          <a:ext cx="0" cy="0"/>
+          <a:chOff x="0" y="0"/>
+          <a:chExt cx="0" cy="0"/>
+        </a:xfrm>
+      </p:grpSpPr>
+      <p:sp>
+        <p:nvSpPr>
+          <p:cNvPr id="2" name="Title 1"/>
+          <p:cNvSpPr>
+            <a:spLocks noGrp="1"/>
+          </p:cNvSpPr>
+          <p:nvPr>
+            <p:ph type="title"/>
+          </p:nvPr>
+        </p:nvSpPr>
+        <p:spPr/>
+        <p:txBody>
+          <a:bodyPr/>
+          <a:lstStyle/>
+          <a:p>
+            <a:r>
+              <a:rPr lang="pt-PT"/>
+              <a:t>Clique para editar o estilo de título do Modelo Global</a:t>
+            </a:r>
+            <a:endParaRPr lang="en-US" dirty="0"/>
+          </a:p>
+        </p:txBody>
+      </p:sp>
+      <p:sp>
+        <p:nvSpPr>
+          <p:cNvPr id="3" name="Date Placeholder 2"/>
+          <p:cNvSpPr>
+            <a:spLocks noGrp="1"/>
+          </p:cNvSpPr>
+          <p:nvPr>
+            <p:ph type="dt" sz="half" idx="10"/>
+          </p:nvPr>
+        </p:nvSpPr>
+        <p:spPr/>
+        <p:txBody>
+          <a:bodyPr/>
+          <a:lstStyle/>
+          <a:p>
+            <a:fld id="{48A87A34-81AB-432B-8DAE-1953F412C126}" type="datetimeFigureOut">
+              <a:rPr lang="en-US" dirty="0"/>
+              <a:t>5/5/2026</a:t>
+            </a:fld>
+            <a:endParaRPr lang="en-US" dirty="0"/>
+          </a:p>
+        </p:txBody>
+      </p:sp>
+      <p:sp>
+        <p:nvSpPr>
+          <p:cNvPr id="4" name="Footer Placeholder 3"/>
+          <p:cNvSpPr>
+            <a:spLocks noGrp="1"/>
+          </p:cNvSpPr>
+          <p:nvPr>
+            <p:ph type="ftr" sz="quarter" idx="11"/>
+          </p:nvPr>
+        </p:nvSpPr>
+        <p:spPr/>
+        <p:txBody>
+          <a:bodyPr/>
+          <a:lstStyle/>
+          <a:p>
+            <a:endParaRPr lang="en-US" dirty="0"/>
+          </a:p>
+        </p:txBody>
+      </p:sp>
+      <p:sp>
+        <p:nvSpPr>
+          <p:cNvPr id="5" name="Slide Number Placeholder 4"/>
+          <p:cNvSpPr>
+            <a:spLocks noGrp="1"/>
+          </p:cNvSpPr>
+          <p:nvPr>
+            <p:ph type="sldNum" sz="quarter" idx="12"/>
+          </p:nvPr>
+        </p:nvSpPr>
+        <p:spPr/>
+        <p:txBody>
+          <a:bodyPr/>
+          <a:lstStyle/>
+          <a:p>
+            <a:fld id="{6D22F896-40B5-4ADD-8801-0D06FADFA095}" type="slidenum">
+              <a:rPr lang="en-US" dirty="0"/>
+              <a:t>‹nº›</a:t>
+            </a:fld>
+            <a:endParaRPr lang="en-US" dirty="0"/>
+          </a:p>
+        </p:txBody>
+      </p:sp>
+      <p:cxnSp>
+        <p:nvCxnSpPr>
+          <p:cNvPr id="25" name="Straight Connector 24"/>
+          <p:cNvCxnSpPr/>
+          <p:nvPr/>
+        </p:nvCxnSpPr>
+        <p:spPr>
+          <a:xfrm>
+            <a:off x="1090422" y="1385316"/>
+            <a:ext cx="7205642" cy="0"/>
+          </a:xfrm>
+          <a:prstGeom prst="line">
+            <a:avLst/>
+          </a:prstGeom>
+          <a:ln w="31750"/>
+        </p:spPr>
+        <p:style>
+          <a:lnRef idx="3">
+            <a:schemeClr val="accent1"/>
+          </a:lnRef>
+          <a:fillRef idx="0">
+            <a:schemeClr val="accent1"/>
+          </a:fillRef>
+          <a:effectRef idx="2">
+            <a:schemeClr val="accent1"/>
+          </a:effectRef>
+          <a:fontRef idx="minor">
+            <a:schemeClr val="tx1"/>
+          </a:fontRef>
+        </p:style>
+      </p:cxnSp>
+    </p:spTree>
+    <p:extLst>
+      <p:ext uri="{BB962C8B-B14F-4D97-AF65-F5344CB8AC3E}">
+        <p14:creationId xmlns:p14="http://schemas.microsoft.com/office/powerpoint/2010/main" val="4155266260"/>
+      </p:ext>
+    </p:extLst>
+  </p:cSld>
+  <p:clrMapOvr>
+    <a:masterClrMapping/>
+  </p:clrMapOvr>
+  <p:hf sldNum="0" hdr="0" ftr="0" dt="0"/>
+</p:sldLayout>
+</file>
+
+<file path=ppt/slideLayouts/slideLayout7.xml><?xml version="1.0" encoding="utf-8"?>
+<p:sldLayout xmlns:a="http://schemas.openxmlformats.org/drawingml/2006/main" xmlns:r="http://schemas.openxmlformats.org/officeDocument/2006/relationships" xmlns:p="http://schemas.openxmlformats.org/presentationml/2006/main" type="blank" preserve="1">
+  <p:cSld name="Em branco">
+    <p:spTree>
+      <p:nvGrpSpPr>
+        <p:cNvPr id="1" name=""/>
+        <p:cNvGrpSpPr/>
+        <p:nvPr/>
+      </p:nvGrpSpPr>
+      <p:grpSpPr>
+        <a:xfrm>
+          <a:off x="0" y="0"/>
+          <a:ext cx="0" cy="0"/>
+          <a:chOff x="0" y="0"/>
+          <a:chExt cx="0" cy="0"/>
+        </a:xfrm>
+      </p:grpSpPr>
+      <p:sp>
+        <p:nvSpPr>
+          <p:cNvPr id="2" name="Date Placeholder 1"/>
+          <p:cNvSpPr>
+            <a:spLocks noGrp="1"/>
+          </p:cNvSpPr>
+          <p:nvPr>
+            <p:ph type="dt" sz="half" idx="10"/>
+          </p:nvPr>
+        </p:nvSpPr>
+        <p:spPr/>
+        <p:txBody>
+          <a:bodyPr/>
+          <a:lstStyle/>
+          <a:p>
+            <a:fld id="{48A87A34-81AB-432B-8DAE-1953F412C126}" type="datetimeFigureOut">
+              <a:rPr lang="en-US" dirty="0"/>
+              <a:t>5/5/2026</a:t>
+            </a:fld>
+            <a:endParaRPr lang="en-US" dirty="0"/>
+          </a:p>
+        </p:txBody>
+      </p:sp>
+      <p:sp>
+        <p:nvSpPr>
+          <p:cNvPr id="3" name="Footer Placeholder 2"/>
+          <p:cNvSpPr>
+            <a:spLocks noGrp="1"/>
+          </p:cNvSpPr>
+          <p:nvPr>
+            <p:ph type="ftr" sz="quarter" idx="11"/>
+          </p:nvPr>
+        </p:nvSpPr>
+        <p:spPr/>
+        <p:txBody>
+          <a:bodyPr/>
+          <a:lstStyle/>
+          <a:p>
+            <a:endParaRPr lang="en-US" dirty="0"/>
+          </a:p>
+        </p:txBody>
+      </p:sp>
+      <p:sp>
+        <p:nvSpPr>
+          <p:cNvPr id="4" name="Slide Number Placeholder 3"/>
+          <p:cNvSpPr>
+            <a:spLocks noGrp="1"/>
+          </p:cNvSpPr>
+          <p:nvPr>
+            <p:ph type="sldNum" sz="quarter" idx="12"/>
+          </p:nvPr>
+        </p:nvSpPr>
+        <p:spPr/>
+        <p:txBody>
+          <a:bodyPr/>
+          <a:lstStyle/>
+          <a:p>
+            <a:fld id="{6D22F896-40B5-4ADD-8801-0D06FADFA095}" type="slidenum">
+              <a:rPr lang="en-US" dirty="0"/>
+              <a:t>‹nº›</a:t>
+            </a:fld>
+            <a:endParaRPr lang="en-US" dirty="0"/>
+          </a:p>
+        </p:txBody>
+      </p:sp>
+    </p:spTree>
+    <p:extLst>
+      <p:ext uri="{BB962C8B-B14F-4D97-AF65-F5344CB8AC3E}">
+        <p14:creationId xmlns:p14="http://schemas.microsoft.com/office/powerpoint/2010/main" val="1522430256"/>
+      </p:ext>
+    </p:extLst>
+  </p:cSld>
+  <p:clrMapOvr>
+    <a:masterClrMapping/>
+  </p:clrMapOvr>
+  <p:hf sldNum="0" hdr="0" ftr="0" dt="0"/>
+</p:sldLayout>
+</file>
+
+<file path=ppt/slideLayouts/slideLayout8.xml><?xml version="1.0" encoding="utf-8"?>
+<p:sldLayout xmlns:a="http://schemas.openxmlformats.org/drawingml/2006/main" xmlns:r="http://schemas.openxmlformats.org/officeDocument/2006/relationships" xmlns:p="http://schemas.openxmlformats.org/presentationml/2006/main" type="objTx" preserve="1">
+  <p:cSld name="Conteúdo com Legenda">
+    <p:spTree>
+      <p:nvGrpSpPr>
+        <p:cNvPr id="1" name=""/>
+        <p:cNvGrpSpPr/>
+        <p:nvPr/>
+      </p:nvGrpSpPr>
+      <p:grpSpPr>
+        <a:xfrm>
+          <a:off x="0" y="0"/>
+          <a:ext cx="0" cy="0"/>
+          <a:chOff x="0" y="0"/>
+          <a:chExt cx="0" cy="0"/>
+        </a:xfrm>
+      </p:grpSpPr>
+      <p:sp>
+        <p:nvSpPr>
+          <p:cNvPr id="2" name="Title 1"/>
+          <p:cNvSpPr>
+            <a:spLocks noGrp="1"/>
+          </p:cNvSpPr>
+          <p:nvPr>
+            <p:ph type="title"/>
+          </p:nvPr>
+        </p:nvSpPr>
+        <p:spPr>
+          <a:xfrm>
+            <a:off x="1083504" y="599230"/>
+            <a:ext cx="2454824" cy="1685338"/>
+          </a:xfrm>
+        </p:spPr>
+        <p:txBody>
+          <a:bodyPr anchor="b">
+            <a:normAutofit/>
+          </a:bodyPr>
+          <a:lstStyle>
+            <a:lvl1pPr algn="l">
+              <a:defRPr sz="1800"/>
+            </a:lvl1pPr>
+          </a:lstStyle>
+          <a:p>
+            <a:r>
+              <a:rPr lang="pt-PT"/>
+              <a:t>Clique para editar o estilo de título do Modelo Global</a:t>
+            </a:r>
+            <a:endParaRPr lang="en-US" dirty="0"/>
+          </a:p>
+        </p:txBody>
+      </p:sp>
+      <p:sp>
+        <p:nvSpPr>
+          <p:cNvPr id="3" name="Content Placeholder 2"/>
+          <p:cNvSpPr>
+            <a:spLocks noGrp="1"/>
+          </p:cNvSpPr>
+          <p:nvPr>
+            <p:ph idx="1"/>
+          </p:nvPr>
+        </p:nvSpPr>
+        <p:spPr>
+          <a:xfrm>
+            <a:off x="3782785" y="599230"/>
+            <a:ext cx="4509353" cy="3494120"/>
+          </a:xfrm>
+        </p:spPr>
+        <p:txBody>
+          <a:bodyPr anchor="ctr"/>
+          <a:lstStyle/>
+          <a:p>
+            <a:pPr lvl="0"/>
+            <a:r>
+              <a:rPr lang="pt-PT"/>
+              <a:t>Clique para editar os estilos do texto de Modelo Global</a:t>
+            </a:r>
+          </a:p>
+          <a:p>
+            <a:pPr lvl="1"/>
+            <a:r>
+              <a:rPr lang="pt-PT"/>
+              <a:t>Segundo nível</a:t>
+            </a:r>
+          </a:p>
+          <a:p>
+            <a:pPr lvl="2"/>
+            <a:r>
+              <a:rPr lang="pt-PT"/>
+              <a:t>Terceiro nível</a:t>
+            </a:r>
+          </a:p>
+          <a:p>
+            <a:pPr lvl="3"/>
+            <a:r>
+              <a:rPr lang="pt-PT"/>
+              <a:t>Quarto nível</a:t>
+            </a:r>
+          </a:p>
+          <a:p>
+            <a:pPr lvl="4"/>
+            <a:r>
+              <a:rPr lang="pt-PT"/>
+              <a:t>Quinto nível</a:t>
+            </a:r>
+            <a:endParaRPr lang="en-US" dirty="0"/>
+          </a:p>
+        </p:txBody>
+      </p:sp>
+      <p:sp>
+        <p:nvSpPr>
+          <p:cNvPr id="4" name="Text Placeholder 3"/>
+          <p:cNvSpPr>
+            <a:spLocks noGrp="1"/>
+          </p:cNvSpPr>
+          <p:nvPr>
+            <p:ph type="body" sz="half" idx="2"/>
+          </p:nvPr>
+        </p:nvSpPr>
+        <p:spPr>
+          <a:xfrm>
+            <a:off x="1083504" y="2404119"/>
+            <a:ext cx="2456260" cy="1686136"/>
+          </a:xfrm>
+        </p:spPr>
+        <p:txBody>
+          <a:bodyPr/>
+          <a:lstStyle>
+            <a:lvl1pPr marL="0" indent="0" algn="l">
+              <a:buNone/>
+              <a:defRPr sz="1200"/>
+            </a:lvl1pPr>
+            <a:lvl2pPr marL="342900" indent="0">
+              <a:buNone/>
+              <a:defRPr sz="1050"/>
+            </a:lvl2pPr>
+            <a:lvl3pPr marL="685800" indent="0">
+              <a:buNone/>
+              <a:defRPr sz="900"/>
+            </a:lvl3pPr>
+            <a:lvl4pPr marL="1028700" indent="0">
+              <a:buNone/>
+              <a:defRPr sz="750"/>
+            </a:lvl4pPr>
+            <a:lvl5pPr marL="1371600" indent="0">
+              <a:buNone/>
+              <a:defRPr sz="750"/>
+            </a:lvl5pPr>
+            <a:lvl6pPr marL="1714500" indent="0">
+              <a:buNone/>
+              <a:defRPr sz="750"/>
+            </a:lvl6pPr>
+            <a:lvl7pPr marL="2057400" indent="0">
+              <a:buNone/>
+              <a:defRPr sz="750"/>
+            </a:lvl7pPr>
+            <a:lvl8pPr marL="2400300" indent="0">
+              <a:buNone/>
+              <a:defRPr sz="750"/>
+            </a:lvl8pPr>
+            <a:lvl9pPr marL="2743200" indent="0">
+              <a:buNone/>
+              <a:defRPr sz="750"/>
+            </a:lvl9pPr>
+          </a:lstStyle>
+          <a:p>
+            <a:pPr lvl="0"/>
+            <a:r>
+              <a:rPr lang="pt-PT"/>
+              <a:t>Clique para editar os estilos do texto de Modelo Global</a:t>
+            </a:r>
+          </a:p>
+        </p:txBody>
+      </p:sp>
+      <p:sp>
+        <p:nvSpPr>
+          <p:cNvPr id="5" name="Date Placeholder 4"/>
+          <p:cNvSpPr>
+            <a:spLocks noGrp="1"/>
+          </p:cNvSpPr>
+          <p:nvPr>
+            <p:ph type="dt" sz="half" idx="10"/>
+          </p:nvPr>
+        </p:nvSpPr>
+        <p:spPr/>
+        <p:txBody>
+          <a:bodyPr/>
+          <a:lstStyle/>
+          <a:p>
+            <a:fld id="{48A87A34-81AB-432B-8DAE-1953F412C126}" type="datetimeFigureOut">
+              <a:rPr lang="en-US" dirty="0"/>
+              <a:t>5/5/2026</a:t>
+            </a:fld>
+            <a:endParaRPr lang="en-US" dirty="0"/>
+          </a:p>
+        </p:txBody>
+      </p:sp>
+      <p:sp>
+        <p:nvSpPr>
+          <p:cNvPr id="6" name="Footer Placeholder 5"/>
+          <p:cNvSpPr>
+            <a:spLocks noGrp="1"/>
+          </p:cNvSpPr>
+          <p:nvPr>
+            <p:ph type="ftr" sz="quarter" idx="11"/>
+          </p:nvPr>
+        </p:nvSpPr>
+        <p:spPr/>
+        <p:txBody>
+          <a:bodyPr/>
+          <a:lstStyle/>
+          <a:p>
+            <a:endParaRPr lang="en-US" dirty="0"/>
+          </a:p>
+        </p:txBody>
+      </p:sp>
+      <p:sp>
+        <p:nvSpPr>
+          <p:cNvPr id="7" name="Slide Number Placeholder 6"/>
+          <p:cNvSpPr>
+            <a:spLocks noGrp="1"/>
+          </p:cNvSpPr>
+          <p:nvPr>
+            <p:ph type="sldNum" sz="quarter" idx="12"/>
+          </p:nvPr>
+        </p:nvSpPr>
+        <p:spPr/>
+        <p:txBody>
+          <a:bodyPr/>
+          <a:lstStyle/>
+          <a:p>
+            <a:fld id="{6D22F896-40B5-4ADD-8801-0D06FADFA095}" type="slidenum">
+              <a:rPr lang="en-US" dirty="0"/>
+              <a:t>‹nº›</a:t>
+            </a:fld>
+            <a:endParaRPr lang="en-US" dirty="0"/>
+          </a:p>
+        </p:txBody>
+      </p:sp>
+      <p:cxnSp>
+        <p:nvCxnSpPr>
+          <p:cNvPr id="17" name="Straight Connector 16"/>
+          <p:cNvCxnSpPr/>
+          <p:nvPr/>
+        </p:nvCxnSpPr>
+        <p:spPr>
+          <a:xfrm>
+            <a:off x="1086210" y="2404118"/>
+            <a:ext cx="2452118" cy="0"/>
+          </a:xfrm>
+          <a:prstGeom prst="line">
+            <a:avLst/>
+          </a:prstGeom>
+          <a:ln w="31750"/>
+        </p:spPr>
+        <p:style>
+          <a:lnRef idx="3">
+            <a:schemeClr val="accent1"/>
+          </a:lnRef>
+          <a:fillRef idx="0">
+            <a:schemeClr val="accent1"/>
+          </a:fillRef>
+          <a:effectRef idx="2">
+            <a:schemeClr val="accent1"/>
+          </a:effectRef>
+          <a:fontRef idx="minor">
+            <a:schemeClr val="tx1"/>
+          </a:fontRef>
+        </p:style>
+      </p:cxnSp>
+    </p:spTree>
+    <p:extLst>
+      <p:ext uri="{BB962C8B-B14F-4D97-AF65-F5344CB8AC3E}">
+        <p14:creationId xmlns:p14="http://schemas.microsoft.com/office/powerpoint/2010/main" val="2334613974"/>
+      </p:ext>
+    </p:extLst>
+  </p:cSld>
+  <p:clrMapOvr>
+    <a:masterClrMapping/>
+  </p:clrMapOvr>
+  <p:hf sldNum="0" hdr="0" ftr="0" dt="0"/>
+</p:sldLayout>
+</file>
+
+<file path=ppt/slideLayouts/slideLayout9.xml><?xml version="1.0" encoding="utf-8"?>
+<p:sldLayout xmlns:a="http://schemas.openxmlformats.org/drawingml/2006/main" xmlns:r="http://schemas.openxmlformats.org/officeDocument/2006/relationships" xmlns:p="http://schemas.openxmlformats.org/presentationml/2006/main" type="picTx" preserve="1">
+  <p:cSld name="Imagem com Legenda">
+    <p:spTree>
+      <p:nvGrpSpPr>
+        <p:cNvPr id="1" name=""/>
+        <p:cNvGrpSpPr/>
+        <p:nvPr/>
+      </p:nvGrpSpPr>
+      <p:grpSpPr>
+        <a:xfrm>
+          <a:off x="0" y="0"/>
+          <a:ext cx="0" cy="0"/>
+          <a:chOff x="0" y="0"/>
+          <a:chExt cx="0" cy="0"/>
+        </a:xfrm>
+      </p:grpSpPr>
+      <p:grpSp>
+        <p:nvGrpSpPr>
+          <p:cNvPr id="8" name="Group 7"/>
+          <p:cNvGrpSpPr/>
+          <p:nvPr/>
+        </p:nvGrpSpPr>
+        <p:grpSpPr>
+          <a:xfrm>
+            <a:off x="5608041" y="361628"/>
+            <a:ext cx="3055900" cy="3861826"/>
+            <a:chOff x="7477387" y="482170"/>
+            <a:chExt cx="4074533" cy="5149101"/>
+          </a:xfrm>
+        </p:grpSpPr>
+        <p:sp>
+          <p:nvSpPr>
+            <p:cNvPr id="18" name="Rectangle 17"/>
+            <p:cNvSpPr/>
+            <p:nvPr/>
+          </p:nvSpPr>
+          <p:spPr bwMode="black">
+            <a:xfrm>
+              <a:off x="7477387" y="482170"/>
+              <a:ext cx="4074533" cy="5149101"/>
+            </a:xfrm>
+            <a:prstGeom prst="rect">
+              <a:avLst/>
+            </a:prstGeom>
+            <a:gradFill>
+              <a:gsLst>
+                <a:gs pos="0">
+                  <a:srgbClr val="000001"/>
+                </a:gs>
+                <a:gs pos="100000">
+                  <a:srgbClr val="191919"/>
+                </a:gs>
+              </a:gsLst>
+            </a:gradFill>
+            <a:ln w="76200" cmpd="sng">
+              <a:noFill/>
+              <a:miter lim="800000"/>
+            </a:ln>
+            <a:effectLst>
+              <a:outerShdw blurRad="127000" dist="228600" dir="4740000" sx="98000" sy="98000" algn="tl" rotWithShape="0">
+                <a:srgbClr val="000000">
+                  <a:alpha val="34000"/>
+                </a:srgbClr>
+              </a:outerShdw>
+            </a:effectLst>
+            <a:scene3d>
+              <a:camera prst="orthographicFront"/>
+              <a:lightRig rig="threePt" dir="t"/>
+            </a:scene3d>
+            <a:sp3d>
+              <a:bevelT w="152400" h="50800" prst="softRound"/>
+            </a:sp3d>
+          </p:spPr>
+          <p:style>
+            <a:lnRef idx="1">
+              <a:schemeClr val="accent1"/>
+            </a:lnRef>
+            <a:fillRef idx="3">
+              <a:schemeClr val="accent1"/>
+            </a:fillRef>
+            <a:effectRef idx="2">
+              <a:schemeClr val="accent1"/>
+            </a:effectRef>
+            <a:fontRef idx="minor">
+              <a:schemeClr val="lt1"/>
+            </a:fontRef>
+          </p:style>
+        </p:sp>
+        <p:sp>
+          <p:nvSpPr>
+            <p:cNvPr id="19" name="Rectangle 18"/>
+            <p:cNvSpPr/>
+            <p:nvPr/>
+          </p:nvSpPr>
+          <p:spPr bwMode="blackWhite">
+            <a:xfrm>
+              <a:off x="7790446" y="812506"/>
+              <a:ext cx="3450289" cy="4466452"/>
+            </a:xfrm>
+            <a:prstGeom prst="rect">
+              <a:avLst/>
+            </a:prstGeom>
+            <a:gradFill>
+              <a:gsLst>
+                <a:gs pos="0">
+                  <a:srgbClr val="DADADA"/>
+                </a:gs>
+                <a:gs pos="100000">
+                  <a:srgbClr val="FFFFFE"/>
+                </a:gs>
+              </a:gsLst>
+              <a:lin ang="16200000" scaled="0"/>
+            </a:gradFill>
+            <a:ln w="50800" cmpd="sng">
+              <a:solidFill>
+                <a:srgbClr val="191919"/>
+              </a:solidFill>
+              <a:miter lim="800000"/>
+            </a:ln>
+            <a:effectLst>
+              <a:innerShdw blurRad="63500" dist="88900" dir="14100000">
+                <a:srgbClr val="000000">
+                  <a:alpha val="30000"/>
+                </a:srgbClr>
+              </a:innerShdw>
+            </a:effectLst>
+            <a:scene3d>
+              <a:camera prst="orthographicFront"/>
+              <a:lightRig rig="threePt" dir="t"/>
+            </a:scene3d>
+            <a:sp3d>
+              <a:bevelT prst="relaxedInset"/>
+            </a:sp3d>
+          </p:spPr>
+          <p:style>
+            <a:lnRef idx="1">
+              <a:schemeClr val="accent1"/>
+            </a:lnRef>
+            <a:fillRef idx="3">
+              <a:schemeClr val="accent1"/>
+            </a:fillRef>
+            <a:effectRef idx="2">
+              <a:schemeClr val="accent1"/>
+            </a:effectRef>
+            <a:fontRef idx="minor">
+              <a:schemeClr val="lt1"/>
+            </a:fontRef>
+          </p:style>
+        </p:sp>
+      </p:grpSp>
+      <p:sp>
+        <p:nvSpPr>
+          <p:cNvPr id="2" name="Title 1"/>
+          <p:cNvSpPr>
+            <a:spLocks noGrp="1"/>
+          </p:cNvSpPr>
+          <p:nvPr>
+            <p:ph type="title"/>
+          </p:nvPr>
+        </p:nvSpPr>
+        <p:spPr>
+          <a:xfrm>
+            <a:off x="1088405" y="847135"/>
+            <a:ext cx="4149246" cy="1372938"/>
+          </a:xfrm>
+        </p:spPr>
+        <p:txBody>
+          <a:bodyPr anchor="b">
+            <a:normAutofit/>
+          </a:bodyPr>
+          <a:lstStyle>
+            <a:lvl1pPr>
+              <a:defRPr sz="2400"/>
+            </a:lvl1pPr>
+          </a:lstStyle>
+          <a:p>
+            <a:r>
+              <a:rPr lang="pt-PT"/>
+              <a:t>Clique para editar o estilo de título do Modelo Global</a:t>
+            </a:r>
+            <a:endParaRPr lang="en-US" dirty="0"/>
+          </a:p>
+        </p:txBody>
+      </p:sp>
+      <p:sp>
+        <p:nvSpPr>
+          <p:cNvPr id="3" name="Picture Placeholder 2"/>
+          <p:cNvSpPr>
+            <a:spLocks noGrp="1" noChangeAspect="1"/>
+          </p:cNvSpPr>
+          <p:nvPr>
+            <p:ph type="pic" idx="1"/>
+          </p:nvPr>
+        </p:nvSpPr>
+        <p:spPr>
+          <a:xfrm>
+            <a:off x="6093292" y="841907"/>
+            <a:ext cx="2093378" cy="2899745"/>
+          </a:xfrm>
+          <a:solidFill>
+            <a:schemeClr val="bg1">
+              <a:lumMod val="85000"/>
+            </a:schemeClr>
+          </a:solidFill>
+          <a:ln w="9525" cap="sq">
+            <a:noFill/>
+            <a:miter lim="800000"/>
+          </a:ln>
+          <a:effectLst/>
+        </p:spPr>
+        <p:txBody>
+          <a:bodyPr anchor="t"/>
+          <a:lstStyle>
+            <a:lvl1pPr marL="0" indent="0" algn="ctr">
+              <a:buNone/>
+              <a:defRPr sz="2400"/>
+            </a:lvl1pPr>
+            <a:lvl2pPr marL="342900" indent="0">
+              <a:buNone/>
+              <a:defRPr sz="2100"/>
+            </a:lvl2pPr>
+            <a:lvl3pPr marL="685800" indent="0">
+              <a:buNone/>
+              <a:defRPr sz="1800"/>
+            </a:lvl3pPr>
+            <a:lvl4pPr marL="1028700" indent="0">
+              <a:buNone/>
+              <a:defRPr sz="1500"/>
+            </a:lvl4pPr>
+            <a:lvl5pPr marL="1371600" indent="0">
+              <a:buNone/>
+              <a:defRPr sz="1500"/>
+            </a:lvl5pPr>
+            <a:lvl6pPr marL="1714500" indent="0">
+              <a:buNone/>
+              <a:defRPr sz="1500"/>
+            </a:lvl6pPr>
+            <a:lvl7pPr marL="2057400" indent="0">
+              <a:buNone/>
+              <a:defRPr sz="1500"/>
+            </a:lvl7pPr>
+            <a:lvl8pPr marL="2400300" indent="0">
+              <a:buNone/>
+              <a:defRPr sz="1500"/>
+            </a:lvl8pPr>
+            <a:lvl9pPr marL="2743200" indent="0">
+              <a:buNone/>
+              <a:defRPr sz="1500"/>
+            </a:lvl9pPr>
+          </a:lstStyle>
+          <a:p>
+            <a:r>
+              <a:rPr lang="pt-PT"/>
+              <a:t>Clique no ícone para adicionar uma imagem</a:t>
+            </a:r>
+            <a:endParaRPr lang="en-US" dirty="0"/>
+          </a:p>
+        </p:txBody>
+      </p:sp>
+      <p:sp>
+        <p:nvSpPr>
+          <p:cNvPr id="4" name="Text Placeholder 3"/>
+          <p:cNvSpPr>
+            <a:spLocks noGrp="1"/>
+          </p:cNvSpPr>
+          <p:nvPr>
+            <p:ph type="body" sz="half" idx="2"/>
+          </p:nvPr>
+        </p:nvSpPr>
+        <p:spPr>
+          <a:xfrm>
+            <a:off x="1087747" y="2359494"/>
+            <a:ext cx="4143303" cy="1502807"/>
+          </a:xfrm>
+        </p:spPr>
+        <p:txBody>
+          <a:bodyPr>
+            <a:normAutofit/>
+          </a:bodyPr>
+          <a:lstStyle>
+            <a:lvl1pPr marL="0" indent="0" algn="l">
+              <a:buNone/>
+              <a:defRPr sz="1350"/>
+            </a:lvl1pPr>
+            <a:lvl2pPr marL="342900" indent="0">
+              <a:buNone/>
+              <a:defRPr sz="1050"/>
+            </a:lvl2pPr>
+            <a:lvl3pPr marL="685800" indent="0">
+              <a:buNone/>
+              <a:defRPr sz="900"/>
+            </a:lvl3pPr>
+            <a:lvl4pPr marL="1028700" indent="0">
+              <a:buNone/>
+              <a:defRPr sz="750"/>
+            </a:lvl4pPr>
+            <a:lvl5pPr marL="1371600" indent="0">
+              <a:buNone/>
+              <a:defRPr sz="750"/>
+            </a:lvl5pPr>
+            <a:lvl6pPr marL="1714500" indent="0">
+              <a:buNone/>
+              <a:defRPr sz="750"/>
+            </a:lvl6pPr>
+            <a:lvl7pPr marL="2057400" indent="0">
+              <a:buNone/>
+              <a:defRPr sz="750"/>
+            </a:lvl7pPr>
+            <a:lvl8pPr marL="2400300" indent="0">
+              <a:buNone/>
+              <a:defRPr sz="750"/>
+            </a:lvl8pPr>
+            <a:lvl9pPr marL="2743200" indent="0">
+              <a:buNone/>
+              <a:defRPr sz="750"/>
+            </a:lvl9pPr>
+          </a:lstStyle>
+          <a:p>
+            <a:pPr lvl="0"/>
+            <a:r>
+              <a:rPr lang="pt-PT"/>
+              <a:t>Clique para editar os estilos do texto de Modelo Global</a:t>
+            </a:r>
+          </a:p>
+        </p:txBody>
+      </p:sp>
+      <p:sp>
+        <p:nvSpPr>
+          <p:cNvPr id="5" name="Date Placeholder 4"/>
+          <p:cNvSpPr>
+            <a:spLocks noGrp="1"/>
+          </p:cNvSpPr>
+          <p:nvPr>
+            <p:ph type="dt" sz="half" idx="10"/>
+          </p:nvPr>
+        </p:nvSpPr>
+        <p:spPr>
+          <a:xfrm>
+            <a:off x="1085537" y="4102393"/>
+            <a:ext cx="4145513" cy="240092"/>
+          </a:xfrm>
+        </p:spPr>
+        <p:txBody>
+          <a:bodyPr/>
+          <a:lstStyle>
+            <a:lvl1pPr algn="l">
+              <a:defRPr/>
+            </a:lvl1pPr>
+          </a:lstStyle>
+          <a:p>
+            <a:fld id="{48A87A34-81AB-432B-8DAE-1953F412C126}" type="datetimeFigureOut">
+              <a:rPr lang="en-US" dirty="0"/>
+              <a:pPr/>
+              <a:t>5/5/2026</a:t>
+            </a:fld>
+            <a:endParaRPr lang="en-US" dirty="0"/>
+          </a:p>
+        </p:txBody>
+      </p:sp>
+      <p:sp>
+        <p:nvSpPr>
+          <p:cNvPr id="6" name="Footer Placeholder 5"/>
+          <p:cNvSpPr>
+            <a:spLocks noGrp="1"/>
+          </p:cNvSpPr>
+          <p:nvPr>
+            <p:ph type="ftr" sz="quarter" idx="11"/>
+          </p:nvPr>
+        </p:nvSpPr>
+        <p:spPr>
+          <a:xfrm>
+            <a:off x="1085537" y="238981"/>
+            <a:ext cx="4155753" cy="240698"/>
+          </a:xfrm>
+        </p:spPr>
+        <p:txBody>
+          <a:bodyPr/>
+          <a:lstStyle/>
+          <a:p>
+            <a:endParaRPr lang="en-US" dirty="0"/>
+          </a:p>
+        </p:txBody>
+      </p:sp>
+      <p:sp>
+        <p:nvSpPr>
+          <p:cNvPr id="7" name="Slide Number Placeholder 6"/>
+          <p:cNvSpPr>
+            <a:spLocks noGrp="1"/>
+          </p:cNvSpPr>
+          <p:nvPr>
+            <p:ph type="sldNum" sz="quarter" idx="12"/>
+          </p:nvPr>
+        </p:nvSpPr>
+        <p:spPr/>
+        <p:txBody>
+          <a:bodyPr/>
+          <a:lstStyle/>
+          <a:p>
+            <a:fld id="{6D22F896-40B5-4ADD-8801-0D06FADFA095}" type="slidenum">
+              <a:rPr lang="en-US" dirty="0"/>
+              <a:t>‹nº›</a:t>
+            </a:fld>
+            <a:endParaRPr lang="en-US" dirty="0"/>
+          </a:p>
+        </p:txBody>
+      </p:sp>
+      <p:cxnSp>
+        <p:nvCxnSpPr>
+          <p:cNvPr id="31" name="Straight Connector 30"/>
+          <p:cNvCxnSpPr/>
+          <p:nvPr/>
+        </p:nvCxnSpPr>
+        <p:spPr>
+          <a:xfrm>
+            <a:off x="1085537" y="2357704"/>
+            <a:ext cx="4145513" cy="0"/>
+          </a:xfrm>
+          <a:prstGeom prst="line">
+            <a:avLst/>
+          </a:prstGeom>
+          <a:ln w="31750"/>
+        </p:spPr>
+        <p:style>
+          <a:lnRef idx="3">
+            <a:schemeClr val="accent1"/>
+          </a:lnRef>
+          <a:fillRef idx="0">
+            <a:schemeClr val="accent1"/>
+          </a:fillRef>
+          <a:effectRef idx="2">
+            <a:schemeClr val="accent1"/>
+          </a:effectRef>
+          <a:fontRef idx="minor">
+            <a:schemeClr val="tx1"/>
+          </a:fontRef>
+        </p:style>
+      </p:cxnSp>
+    </p:spTree>
+    <p:extLst>
+      <p:ext uri="{BB962C8B-B14F-4D97-AF65-F5344CB8AC3E}">
+        <p14:creationId xmlns:p14="http://schemas.microsoft.com/office/powerpoint/2010/main" val="1505675950"/>
+      </p:ext>
+    </p:extLst>
+  </p:cSld>
+  <p:clrMapOvr>
+    <a:masterClrMapping/>
+  </p:clrMapOvr>
+  <p:hf sldNum="0" hdr="0" ftr="0" dt="0"/>
+</p:sldLayout>
+</file>
+
+<file path=ppt/slideMasters/slideMaster1.xml><?xml version="1.0" encoding="utf-8"?>
+<p:sldMaster xmlns:a="http://schemas.openxmlformats.org/drawingml/2006/main" xmlns:r="http://schemas.openxmlformats.org/officeDocument/2006/relationships" xmlns:p="http://schemas.openxmlformats.org/presentationml/2006/main">
+  <p:cSld>
+    <p:bg>
+      <p:bgRef idx="1003">
+        <a:schemeClr val="bg2"/>
+      </p:bgRef>
+    </p:bg>
+    <p:spTree>
+      <p:nvGrpSpPr>
+        <p:cNvPr id="1" name=""/>
+        <p:cNvGrpSpPr/>
+        <p:nvPr/>
+      </p:nvGrpSpPr>
+      <p:grpSpPr>
+        <a:xfrm>
+          <a:off x="0" y="0"/>
+          <a:ext cx="0" cy="0"/>
+          <a:chOff x="0" y="0"/>
+          <a:chExt cx="0" cy="0"/>
+        </a:xfrm>
+      </p:grpSpPr>
+      <p:sp>
+        <p:nvSpPr>
+          <p:cNvPr id="8" name="Rectangle 7"/>
+          <p:cNvSpPr/>
+          <p:nvPr/>
+        </p:nvSpPr>
+        <p:spPr>
+          <a:xfrm>
+            <a:off x="0" y="1514607"/>
+            <a:ext cx="9144000" cy="3079456"/>
+          </a:xfrm>
+          <a:prstGeom prst="rect">
+            <a:avLst/>
+          </a:prstGeom>
+          <a:gradFill flip="none" rotWithShape="1">
+            <a:gsLst>
+              <a:gs pos="0">
+                <a:schemeClr val="bg2">
+                  <a:alpha val="0"/>
+                </a:schemeClr>
+              </a:gs>
+              <a:gs pos="100000">
+                <a:schemeClr val="bg2"/>
+              </a:gs>
+            </a:gsLst>
+            <a:lin ang="5400000" scaled="0"/>
+            <a:tileRect/>
+          </a:gradFill>
+          <a:ln>
+            <a:noFill/>
+          </a:ln>
+        </p:spPr>
+        <p:style>
+          <a:lnRef idx="2">
+            <a:schemeClr val="accent1">
+              <a:shade val="50000"/>
+            </a:schemeClr>
+          </a:lnRef>
+          <a:fillRef idx="1">
+            <a:schemeClr val="accent1"/>
+          </a:fillRef>
+          <a:effectRef idx="0">
+            <a:schemeClr val="accent1"/>
+          </a:effectRef>
+          <a:fontRef idx="minor">
+            <a:schemeClr val="lt1"/>
+          </a:fontRef>
+        </p:style>
+      </p:sp>
+      <p:pic>
+        <p:nvPicPr>
+          <p:cNvPr id="7" name="Picture 6"/>
+          <p:cNvPicPr>
+            <a:picLocks noChangeAspect="1"/>
+          </p:cNvPicPr>
+          <p:nvPr/>
+        </p:nvPicPr>
+        <p:blipFill rotWithShape="1">
+          <a:blip r:embed="rId14">
+            <a:extLst>
+              <a:ext uri="{28A0092B-C50C-407E-A947-70E740481C1C}">
+                <a14:useLocalDpi xmlns:a14="http://schemas.microsoft.com/office/drawing/2010/main" val="0"/>
+              </a:ext>
+            </a:extLst>
+          </a:blip>
+          <a:srcRect t="1538" b="-1538"/>
+          <a:stretch/>
+        </p:blipFill>
+        <p:spPr bwMode="black">
+          <a:xfrm>
+            <a:off x="0" y="4594860"/>
+            <a:ext cx="9144000" cy="557213"/>
+          </a:xfrm>
+          <a:prstGeom prst="rect">
+            <a:avLst/>
+          </a:prstGeom>
+        </p:spPr>
+      </p:pic>
+      <p:sp>
+        <p:nvSpPr>
+          <p:cNvPr id="2" name="Title Placeholder 1"/>
+          <p:cNvSpPr>
+            <a:spLocks noGrp="1"/>
+          </p:cNvSpPr>
+          <p:nvPr>
+            <p:ph type="title"/>
+          </p:nvPr>
+        </p:nvSpPr>
+        <p:spPr>
+          <a:xfrm>
+            <a:off x="1088685" y="603390"/>
+            <a:ext cx="7202456" cy="786926"/>
+          </a:xfrm>
+          <a:prstGeom prst="rect">
+            <a:avLst/>
+          </a:prstGeom>
+        </p:spPr>
+        <p:txBody>
+          <a:bodyPr vert="horz" lIns="91440" tIns="45720" rIns="91440" bIns="45720" rtlCol="0" anchor="t">
+            <a:normAutofit/>
+          </a:bodyPr>
+          <a:lstStyle/>
+          <a:p>
+            <a:r>
+              <a:rPr lang="pt-PT"/>
+              <a:t>Clique para editar o estilo de título do Modelo Global</a:t>
+            </a:r>
+            <a:endParaRPr lang="en-US" dirty="0"/>
+          </a:p>
+        </p:txBody>
+      </p:sp>
+      <p:sp>
+        <p:nvSpPr>
+          <p:cNvPr id="3" name="Text Placeholder 2"/>
+          <p:cNvSpPr>
+            <a:spLocks noGrp="1"/>
+          </p:cNvSpPr>
+          <p:nvPr>
+            <p:ph type="body" idx="1"/>
+          </p:nvPr>
+        </p:nvSpPr>
+        <p:spPr>
+          <a:xfrm>
+            <a:off x="1088685" y="1511799"/>
+            <a:ext cx="7202456" cy="2587960"/>
+          </a:xfrm>
+          <a:prstGeom prst="rect">
+            <a:avLst/>
+          </a:prstGeom>
+        </p:spPr>
+        <p:txBody>
+          <a:bodyPr vert="horz" lIns="91440" tIns="45720" rIns="91440" bIns="45720" rtlCol="0">
+            <a:normAutofit/>
+          </a:bodyPr>
+          <a:lstStyle/>
+          <a:p>
+            <a:pPr lvl="0"/>
+            <a:r>
+              <a:rPr lang="pt-PT"/>
+              <a:t>Clique para editar os estilos do texto de Modelo Global</a:t>
+            </a:r>
+          </a:p>
+          <a:p>
+            <a:pPr lvl="1"/>
+            <a:r>
+              <a:rPr lang="pt-PT"/>
+              <a:t>Segundo nível</a:t>
+            </a:r>
+          </a:p>
+          <a:p>
+            <a:pPr lvl="2"/>
+            <a:r>
+              <a:rPr lang="pt-PT"/>
+              <a:t>Terceiro nível</a:t>
+            </a:r>
+          </a:p>
+          <a:p>
+            <a:pPr lvl="3"/>
+            <a:r>
+              <a:rPr lang="pt-PT"/>
+              <a:t>Quarto nível</a:t>
+            </a:r>
+          </a:p>
+          <a:p>
+            <a:pPr lvl="4"/>
+            <a:r>
+              <a:rPr lang="pt-PT"/>
+              <a:t>Quinto nível</a:t>
+            </a:r>
+            <a:endParaRPr lang="en-US" dirty="0"/>
+          </a:p>
+        </p:txBody>
+      </p:sp>
+      <p:sp>
+        <p:nvSpPr>
+          <p:cNvPr id="4" name="Date Placeholder 3"/>
+          <p:cNvSpPr>
+            <a:spLocks noGrp="1"/>
+          </p:cNvSpPr>
+          <p:nvPr>
+            <p:ph type="dt" sz="half" idx="2"/>
+          </p:nvPr>
+        </p:nvSpPr>
+        <p:spPr>
+          <a:xfrm>
+            <a:off x="5665604" y="247778"/>
+            <a:ext cx="2625536" cy="231901"/>
+          </a:xfrm>
+          <a:prstGeom prst="rect">
+            <a:avLst/>
+          </a:prstGeom>
+        </p:spPr>
+        <p:txBody>
+          <a:bodyPr vert="horz" lIns="91440" tIns="45720" rIns="91440" bIns="45720" rtlCol="0" anchor="ctr"/>
+          <a:lstStyle>
+            <a:lvl1pPr algn="r">
+              <a:defRPr sz="750">
+                <a:solidFill>
+                  <a:schemeClr val="tx1">
+                    <a:tint val="75000"/>
+                  </a:schemeClr>
+                </a:solidFill>
+              </a:defRPr>
+            </a:lvl1pPr>
+          </a:lstStyle>
+          <a:p>
+            <a:fld id="{48A87A34-81AB-432B-8DAE-1953F412C126}" type="datetimeFigureOut">
+              <a:rPr lang="en-US" dirty="0"/>
+              <a:pPr/>
+              <a:t>5/5/2026</a:t>
+            </a:fld>
+            <a:endParaRPr lang="en-US" dirty="0"/>
+          </a:p>
+        </p:txBody>
+      </p:sp>
+      <p:sp>
+        <p:nvSpPr>
+          <p:cNvPr id="5" name="Footer Placeholder 4"/>
+          <p:cNvSpPr>
+            <a:spLocks noGrp="1"/>
+          </p:cNvSpPr>
+          <p:nvPr>
+            <p:ph type="ftr" sz="quarter" idx="3"/>
+          </p:nvPr>
+        </p:nvSpPr>
+        <p:spPr>
+          <a:xfrm>
+            <a:off x="1088684" y="246981"/>
+            <a:ext cx="4454127" cy="231901"/>
+          </a:xfrm>
+          <a:prstGeom prst="rect">
+            <a:avLst/>
+          </a:prstGeom>
+        </p:spPr>
+        <p:txBody>
+          <a:bodyPr vert="horz" lIns="91440" tIns="45720" rIns="91440" bIns="45720" rtlCol="0" anchor="ctr"/>
+          <a:lstStyle>
+            <a:lvl1pPr algn="l">
+              <a:defRPr sz="750">
+                <a:solidFill>
+                  <a:schemeClr val="tx1">
+                    <a:tint val="75000"/>
+                  </a:schemeClr>
+                </a:solidFill>
+              </a:defRPr>
+            </a:lvl1pPr>
+          </a:lstStyle>
+          <a:p>
+            <a:endParaRPr lang="en-US" dirty="0"/>
+          </a:p>
+        </p:txBody>
+      </p:sp>
+      <p:sp>
+        <p:nvSpPr>
+          <p:cNvPr id="6" name="Slide Number Placeholder 5"/>
+          <p:cNvSpPr>
+            <a:spLocks noGrp="1"/>
+          </p:cNvSpPr>
+          <p:nvPr>
+            <p:ph type="sldNum" sz="quarter" idx="4"/>
+          </p:nvPr>
+        </p:nvSpPr>
+        <p:spPr>
+          <a:xfrm>
+            <a:off x="360046" y="599230"/>
+            <a:ext cx="608264" cy="377684"/>
+          </a:xfrm>
+          <a:prstGeom prst="rect">
+            <a:avLst/>
+          </a:prstGeom>
+        </p:spPr>
+        <p:txBody>
+          <a:bodyPr vert="horz" lIns="91440" tIns="45720" rIns="91440" bIns="45720" rtlCol="0" anchor="t"/>
+          <a:lstStyle>
+            <a:lvl1pPr algn="r">
+              <a:defRPr sz="2100">
+                <a:solidFill>
+                  <a:schemeClr val="accent1"/>
+                </a:solidFill>
+              </a:defRPr>
+            </a:lvl1pPr>
+          </a:lstStyle>
+          <a:p>
+            <a:fld id="{6D22F896-40B5-4ADD-8801-0D06FADFA095}" type="slidenum">
+              <a:rPr lang="en-US" dirty="0"/>
+              <a:pPr/>
+              <a:t>‹nº›</a:t>
+            </a:fld>
+            <a:endParaRPr lang="en-US" dirty="0"/>
+          </a:p>
+        </p:txBody>
+      </p:sp>
+      <p:cxnSp>
+        <p:nvCxnSpPr>
+          <p:cNvPr id="10" name="Straight Connector 9"/>
+          <p:cNvCxnSpPr/>
+          <p:nvPr/>
+        </p:nvCxnSpPr>
+        <p:spPr>
+          <a:xfrm>
+            <a:off x="0" y="4596310"/>
+            <a:ext cx="9144000" cy="0"/>
+          </a:xfrm>
+          <a:prstGeom prst="line">
+            <a:avLst/>
+          </a:prstGeom>
+          <a:ln w="12700">
+            <a:solidFill>
+              <a:srgbClr val="000001">
+                <a:alpha val="20000"/>
+              </a:srgbClr>
+            </a:solidFill>
+          </a:ln>
+        </p:spPr>
+        <p:style>
+          <a:lnRef idx="1">
+            <a:schemeClr val="accent1"/>
+          </a:lnRef>
+          <a:fillRef idx="0">
+            <a:schemeClr val="accent1"/>
+          </a:fillRef>
+          <a:effectRef idx="0">
+            <a:schemeClr val="accent1"/>
+          </a:effectRef>
+          <a:fontRef idx="minor">
+            <a:schemeClr val="tx1"/>
+          </a:fontRef>
+        </p:style>
+      </p:cxnSp>
+    </p:spTree>
+    <p:extLst>
+      <p:ext uri="{BB962C8B-B14F-4D97-AF65-F5344CB8AC3E}">
+        <p14:creationId xmlns:p14="http://schemas.microsoft.com/office/powerpoint/2010/main" val="2501543897"/>
+      </p:ext>
+    </p:extLst>
   </p:cSld>
   <p:clrMap bg1="lt1" tx1="dk1" bg2="lt2" tx2="dk2" accent1="accent1" accent2="accent2" accent3="accent3" accent4="accent4" accent5="accent5" accent6="accent6" hlink="hlink" folHlink="folHlink"/>
   <p:sldLayoutIdLst>
-    <p:sldLayoutId id="2147483649" r:id="rId1"/>
+    <p:sldLayoutId id="2147483651" r:id="rId1"/>
+    <p:sldLayoutId id="2147483652" r:id="rId2"/>
+    <p:sldLayoutId id="2147483653" r:id="rId3"/>
+    <p:sldLayoutId id="2147483654" r:id="rId4"/>
+    <p:sldLayoutId id="2147483655" r:id="rId5"/>
+    <p:sldLayoutId id="2147483656" r:id="rId6"/>
+    <p:sldLayoutId id="2147483657" r:id="rId7"/>
+    <p:sldLayoutId id="2147483658" r:id="rId8"/>
+    <p:sldLayoutId id="2147483659" r:id="rId9"/>
+    <p:sldLayoutId id="2147483660" r:id="rId10"/>
+    <p:sldLayoutId id="2147483661" r:id="rId11"/>
+    <p:sldLayoutId id="2147483662" r:id="rId12"/>
   </p:sldLayoutIdLst>
   <p:hf sldNum="0" hdr="0" ftr="0" dt="0"/>
   <p:txStyles>
     <p:titleStyle>
-      <a:lvl1pPr algn="ctr" defTabSz="914400" rtl="0" eaLnBrk="1" latinLnBrk="0" hangingPunct="1">
+      <a:lvl1pPr algn="l" defTabSz="685800" rtl="0" eaLnBrk="1" latinLnBrk="0" hangingPunct="1">
+        <a:lnSpc>
+          <a:spcPct val="90000"/>
+        </a:lnSpc>
         <a:spcBef>
           <a:spcPct val="0"/>
         </a:spcBef>
         <a:buNone/>
-        <a:defRPr sz="4400" kern="1200">
+        <a:defRPr sz="2400" b="0" i="0" kern="1200" cap="all">
           <a:solidFill>
             <a:schemeClr val="tx1"/>
           </a:solidFill>
+          <a:effectLst/>
           <a:latin typeface="+mj-lt"/>
           <a:ea typeface="+mj-ea"/>
           <a:cs typeface="+mj-cs"/>
@@ -883,136 +3819,208 @@
       </a:lvl1pPr>
     </p:titleStyle>
     <p:bodyStyle>
-      <a:lvl1pPr marL="342900" indent="-342900" algn="l" defTabSz="914400" rtl="0" eaLnBrk="1" latinLnBrk="0" hangingPunct="1">
+      <a:lvl1pPr marL="171450" indent="-171450" algn="l" defTabSz="685800" rtl="0" eaLnBrk="1" latinLnBrk="0" hangingPunct="1">
+        <a:lnSpc>
+          <a:spcPct val="120000"/>
+        </a:lnSpc>
         <a:spcBef>
-          <a:spcPct val="20000"/>
+          <a:spcPts val="750"/>
         </a:spcBef>
-        <a:buFont typeface="Arial" pitchFamily="34" charset="0"/>
+        <a:buClr>
+          <a:schemeClr val="accent1"/>
+        </a:buClr>
+        <a:buSzPct val="100000"/>
+        <a:buFont typeface="Arial" panose="020B0604020202020204" pitchFamily="34" charset="0"/>
         <a:buChar char="•"/>
-        <a:defRPr sz="3200" kern="1200">
+        <a:defRPr sz="1500" kern="1200">
           <a:solidFill>
             <a:schemeClr val="tx1"/>
           </a:solidFill>
+          <a:effectLst/>
           <a:latin typeface="+mn-lt"/>
           <a:ea typeface="+mn-ea"/>
           <a:cs typeface="+mn-cs"/>
         </a:defRPr>
       </a:lvl1pPr>
-      <a:lvl2pPr marL="742950" indent="-285750" algn="l" defTabSz="914400" rtl="0" eaLnBrk="1" latinLnBrk="0" hangingPunct="1">
+      <a:lvl2pPr marL="514350" indent="-171450" algn="l" defTabSz="685800" rtl="0" eaLnBrk="1" latinLnBrk="0" hangingPunct="1">
+        <a:lnSpc>
+          <a:spcPct val="120000"/>
+        </a:lnSpc>
         <a:spcBef>
-          <a:spcPct val="20000"/>
+          <a:spcPts val="375"/>
         </a:spcBef>
-        <a:buFont typeface="Arial" pitchFamily="34" charset="0"/>
-        <a:buChar char="–"/>
-        <a:defRPr sz="2800" kern="1200">
+        <a:buClr>
+          <a:schemeClr val="accent1"/>
+        </a:buClr>
+        <a:buSzPct val="100000"/>
+        <a:buFont typeface="Arial" panose="020B0604020202020204" pitchFamily="34" charset="0"/>
+        <a:buChar char="•"/>
+        <a:defRPr sz="1350" kern="1200" cap="none" baseline="0">
           <a:solidFill>
             <a:schemeClr val="tx1"/>
           </a:solidFill>
+          <a:effectLst/>
           <a:latin typeface="+mn-lt"/>
           <a:ea typeface="+mn-ea"/>
           <a:cs typeface="+mn-cs"/>
         </a:defRPr>
       </a:lvl2pPr>
-      <a:lvl3pPr marL="1143000" indent="-228600" algn="l" defTabSz="914400" rtl="0" eaLnBrk="1" latinLnBrk="0" hangingPunct="1">
+      <a:lvl3pPr marL="857250" indent="-171450" algn="l" defTabSz="685800" rtl="0" eaLnBrk="1" latinLnBrk="0" hangingPunct="1">
+        <a:lnSpc>
+          <a:spcPct val="120000"/>
+        </a:lnSpc>
         <a:spcBef>
-          <a:spcPct val="20000"/>
+          <a:spcPts val="375"/>
         </a:spcBef>
-        <a:buFont typeface="Arial" pitchFamily="34" charset="0"/>
+        <a:buClr>
+          <a:schemeClr val="accent1"/>
+        </a:buClr>
+        <a:buSzPct val="100000"/>
+        <a:buFont typeface="Arial" panose="020B0604020202020204" pitchFamily="34" charset="0"/>
         <a:buChar char="•"/>
-        <a:defRPr sz="2400" kern="1200">
+        <a:defRPr sz="1200" kern="1200">
           <a:solidFill>
             <a:schemeClr val="tx1"/>
           </a:solidFill>
+          <a:effectLst/>
           <a:latin typeface="+mn-lt"/>
           <a:ea typeface="+mn-ea"/>
           <a:cs typeface="+mn-cs"/>
         </a:defRPr>
       </a:lvl3pPr>
-      <a:lvl4pPr marL="1600200" indent="-228600" algn="l" defTabSz="914400" rtl="0" eaLnBrk="1" latinLnBrk="0" hangingPunct="1">
+      <a:lvl4pPr marL="1200150" indent="-171450" algn="l" defTabSz="685800" rtl="0" eaLnBrk="1" latinLnBrk="0" hangingPunct="1">
+        <a:lnSpc>
+          <a:spcPct val="120000"/>
+        </a:lnSpc>
         <a:spcBef>
-          <a:spcPct val="20000"/>
+          <a:spcPts val="375"/>
         </a:spcBef>
-        <a:buFont typeface="Arial" pitchFamily="34" charset="0"/>
-        <a:buChar char="–"/>
-        <a:defRPr sz="2000" kern="1200">
+        <a:buClr>
+          <a:schemeClr val="accent1"/>
+        </a:buClr>
+        <a:buSzPct val="100000"/>
+        <a:buFont typeface="Arial" panose="020B0604020202020204" pitchFamily="34" charset="0"/>
+        <a:buChar char="•"/>
+        <a:defRPr sz="1050" kern="1200" cap="none" baseline="0">
           <a:solidFill>
             <a:schemeClr val="tx1"/>
           </a:solidFill>
+          <a:effectLst/>
           <a:latin typeface="+mn-lt"/>
           <a:ea typeface="+mn-ea"/>
           <a:cs typeface="+mn-cs"/>
         </a:defRPr>
       </a:lvl4pPr>
-      <a:lvl5pPr marL="2057400" indent="-228600" algn="l" defTabSz="914400" rtl="0" eaLnBrk="1" latinLnBrk="0" hangingPunct="1">
+      <a:lvl5pPr marL="1543050" indent="-171450" algn="l" defTabSz="685800" rtl="0" eaLnBrk="1" latinLnBrk="0" hangingPunct="1">
+        <a:lnSpc>
+          <a:spcPct val="120000"/>
+        </a:lnSpc>
         <a:spcBef>
-          <a:spcPct val="20000"/>
+          <a:spcPts val="375"/>
         </a:spcBef>
-        <a:buFont typeface="Arial" pitchFamily="34" charset="0"/>
-        <a:buChar char="»"/>
-        <a:defRPr sz="2000" kern="1200">
+        <a:buClr>
+          <a:schemeClr val="accent1"/>
+        </a:buClr>
+        <a:buSzPct val="100000"/>
+        <a:buFont typeface="Arial" panose="020B0604020202020204" pitchFamily="34" charset="0"/>
+        <a:buChar char="•"/>
+        <a:defRPr sz="900" kern="1200">
           <a:solidFill>
             <a:schemeClr val="tx1"/>
           </a:solidFill>
+          <a:effectLst/>
           <a:latin typeface="+mn-lt"/>
           <a:ea typeface="+mn-ea"/>
           <a:cs typeface="+mn-cs"/>
         </a:defRPr>
       </a:lvl5pPr>
-      <a:lvl6pPr marL="2514600" indent="-228600" algn="l" defTabSz="914400" rtl="0" eaLnBrk="1" latinLnBrk="0" hangingPunct="1">
+      <a:lvl6pPr marL="1885950" indent="-171450" algn="l" defTabSz="685800" rtl="0" eaLnBrk="1" latinLnBrk="0" hangingPunct="1">
+        <a:lnSpc>
+          <a:spcPct val="120000"/>
+        </a:lnSpc>
         <a:spcBef>
-          <a:spcPct val="20000"/>
+          <a:spcPts val="375"/>
         </a:spcBef>
-        <a:buFont typeface="Arial" pitchFamily="34" charset="0"/>
+        <a:buClr>
+          <a:schemeClr val="accent1"/>
+        </a:buClr>
+        <a:buSzPct val="100000"/>
+        <a:buFont typeface="Arial" panose="020B0604020202020204" pitchFamily="34" charset="0"/>
         <a:buChar char="•"/>
-        <a:defRPr sz="2000" kern="1200">
+        <a:defRPr sz="900" kern="1200">
           <a:solidFill>
             <a:schemeClr val="tx1"/>
           </a:solidFill>
+          <a:effectLst/>
           <a:latin typeface="+mn-lt"/>
           <a:ea typeface="+mn-ea"/>
           <a:cs typeface="+mn-cs"/>
         </a:defRPr>
       </a:lvl6pPr>
-      <a:lvl7pPr marL="2971800" indent="-228600" algn="l" defTabSz="914400" rtl="0" eaLnBrk="1" latinLnBrk="0" hangingPunct="1">
+      <a:lvl7pPr marL="2228850" indent="-171450" algn="l" defTabSz="685800" rtl="0" eaLnBrk="1" latinLnBrk="0" hangingPunct="1">
+        <a:lnSpc>
+          <a:spcPct val="120000"/>
+        </a:lnSpc>
         <a:spcBef>
-          <a:spcPct val="20000"/>
+          <a:spcPts val="375"/>
         </a:spcBef>
-        <a:buFont typeface="Arial" pitchFamily="34" charset="0"/>
+        <a:buClr>
+          <a:schemeClr val="accent1"/>
+        </a:buClr>
+        <a:buSzPct val="100000"/>
+        <a:buFont typeface="Arial" panose="020B0604020202020204" pitchFamily="34" charset="0"/>
         <a:buChar char="•"/>
-        <a:defRPr sz="2000" kern="1200">
+        <a:defRPr sz="900" kern="1200">
           <a:solidFill>
             <a:schemeClr val="tx1"/>
           </a:solidFill>
+          <a:effectLst/>
           <a:latin typeface="+mn-lt"/>
           <a:ea typeface="+mn-ea"/>
           <a:cs typeface="+mn-cs"/>
         </a:defRPr>
       </a:lvl7pPr>
-      <a:lvl8pPr marL="3429000" indent="-228600" algn="l" defTabSz="914400" rtl="0" eaLnBrk="1" latinLnBrk="0" hangingPunct="1">
+      <a:lvl8pPr marL="2571750" indent="-171450" algn="l" defTabSz="685800" rtl="0" eaLnBrk="1" latinLnBrk="0" hangingPunct="1">
+        <a:lnSpc>
+          <a:spcPct val="120000"/>
+        </a:lnSpc>
         <a:spcBef>
-          <a:spcPct val="20000"/>
+          <a:spcPts val="375"/>
         </a:spcBef>
-        <a:buFont typeface="Arial" pitchFamily="34" charset="0"/>
+        <a:buClr>
+          <a:schemeClr val="accent1"/>
+        </a:buClr>
+        <a:buSzPct val="100000"/>
+        <a:buFont typeface="Arial" panose="020B0604020202020204" pitchFamily="34" charset="0"/>
         <a:buChar char="•"/>
-        <a:defRPr sz="2000" kern="1200">
+        <a:defRPr sz="900" kern="1200" baseline="0">
           <a:solidFill>
             <a:schemeClr val="tx1"/>
           </a:solidFill>
+          <a:effectLst/>
           <a:latin typeface="+mn-lt"/>
           <a:ea typeface="+mn-ea"/>
           <a:cs typeface="+mn-cs"/>
         </a:defRPr>
       </a:lvl8pPr>
-      <a:lvl9pPr marL="3886200" indent="-228600" algn="l" defTabSz="914400" rtl="0" eaLnBrk="1" latinLnBrk="0" hangingPunct="1">
+      <a:lvl9pPr marL="2914650" indent="-171450" algn="l" defTabSz="685800" rtl="0" eaLnBrk="1" latinLnBrk="0" hangingPunct="1">
+        <a:lnSpc>
+          <a:spcPct val="120000"/>
+        </a:lnSpc>
         <a:spcBef>
-          <a:spcPct val="20000"/>
+          <a:spcPts val="375"/>
         </a:spcBef>
-        <a:buFont typeface="Arial" pitchFamily="34" charset="0"/>
+        <a:buClr>
+          <a:schemeClr val="accent1"/>
+        </a:buClr>
+        <a:buSzPct val="100000"/>
+        <a:buFont typeface="Arial" panose="020B0604020202020204" pitchFamily="34" charset="0"/>
         <a:buChar char="•"/>
-        <a:defRPr sz="2000" kern="1200">
+        <a:defRPr sz="900" kern="1200" baseline="0">
           <a:solidFill>
             <a:schemeClr val="tx1"/>
           </a:solidFill>
+          <a:effectLst/>
           <a:latin typeface="+mn-lt"/>
           <a:ea typeface="+mn-ea"/>
           <a:cs typeface="+mn-cs"/>
@@ -1023,8 +4031,8 @@
       <a:defPPr>
         <a:defRPr lang="en-US"/>
       </a:defPPr>
-      <a:lvl1pPr marL="0" algn="l" defTabSz="914400" rtl="0" eaLnBrk="1" latinLnBrk="0" hangingPunct="1">
-        <a:defRPr sz="1800" kern="1200">
+      <a:lvl1pPr marL="0" algn="l" defTabSz="685800" rtl="0" eaLnBrk="1" latinLnBrk="0" hangingPunct="1">
+        <a:defRPr sz="1350" kern="1200">
           <a:solidFill>
             <a:schemeClr val="tx1"/>
           </a:solidFill>
@@ -1033,8 +4041,8 @@
           <a:cs typeface="+mn-cs"/>
         </a:defRPr>
       </a:lvl1pPr>
-      <a:lvl2pPr marL="457200" algn="l" defTabSz="914400" rtl="0" eaLnBrk="1" latinLnBrk="0" hangingPunct="1">
-        <a:defRPr sz="1800" kern="1200">
+      <a:lvl2pPr marL="342900" algn="l" defTabSz="685800" rtl="0" eaLnBrk="1" latinLnBrk="0" hangingPunct="1">
+        <a:defRPr sz="1350" kern="1200">
           <a:solidFill>
             <a:schemeClr val="tx1"/>
           </a:solidFill>
@@ -1043,8 +4051,8 @@
           <a:cs typeface="+mn-cs"/>
         </a:defRPr>
       </a:lvl2pPr>
-      <a:lvl3pPr marL="914400" algn="l" defTabSz="914400" rtl="0" eaLnBrk="1" latinLnBrk="0" hangingPunct="1">
-        <a:defRPr sz="1800" kern="1200">
+      <a:lvl3pPr marL="685800" algn="l" defTabSz="685800" rtl="0" eaLnBrk="1" latinLnBrk="0" hangingPunct="1">
+        <a:defRPr sz="1350" kern="1200">
           <a:solidFill>
             <a:schemeClr val="tx1"/>
           </a:solidFill>
@@ -1053,8 +4061,8 @@
           <a:cs typeface="+mn-cs"/>
         </a:defRPr>
       </a:lvl3pPr>
-      <a:lvl4pPr marL="1371600" algn="l" defTabSz="914400" rtl="0" eaLnBrk="1" latinLnBrk="0" hangingPunct="1">
-        <a:defRPr sz="1800" kern="1200">
+      <a:lvl4pPr marL="1028700" algn="l" defTabSz="685800" rtl="0" eaLnBrk="1" latinLnBrk="0" hangingPunct="1">
+        <a:defRPr sz="1350" kern="1200">
           <a:solidFill>
             <a:schemeClr val="tx1"/>
           </a:solidFill>
@@ -1063,8 +4071,8 @@
           <a:cs typeface="+mn-cs"/>
         </a:defRPr>
       </a:lvl4pPr>
-      <a:lvl5pPr marL="1828800" algn="l" defTabSz="914400" rtl="0" eaLnBrk="1" latinLnBrk="0" hangingPunct="1">
-        <a:defRPr sz="1800" kern="1200">
+      <a:lvl5pPr marL="1371600" algn="l" defTabSz="685800" rtl="0" eaLnBrk="1" latinLnBrk="0" hangingPunct="1">
+        <a:defRPr sz="1350" kern="1200">
           <a:solidFill>
             <a:schemeClr val="tx1"/>
           </a:solidFill>
@@ -1073,8 +4081,8 @@
           <a:cs typeface="+mn-cs"/>
         </a:defRPr>
       </a:lvl5pPr>
-      <a:lvl6pPr marL="2286000" algn="l" defTabSz="914400" rtl="0" eaLnBrk="1" latinLnBrk="0" hangingPunct="1">
-        <a:defRPr sz="1800" kern="1200">
+      <a:lvl6pPr marL="1714500" algn="l" defTabSz="685800" rtl="0" eaLnBrk="1" latinLnBrk="0" hangingPunct="1">
+        <a:defRPr sz="1350" kern="1200">
           <a:solidFill>
             <a:schemeClr val="tx1"/>
           </a:solidFill>
@@ -1083,8 +4091,8 @@
           <a:cs typeface="+mn-cs"/>
         </a:defRPr>
       </a:lvl6pPr>
-      <a:lvl7pPr marL="2743200" algn="l" defTabSz="914400" rtl="0" eaLnBrk="1" latinLnBrk="0" hangingPunct="1">
-        <a:defRPr sz="1800" kern="1200">
+      <a:lvl7pPr marL="2057400" algn="l" defTabSz="685800" rtl="0" eaLnBrk="1" latinLnBrk="0" hangingPunct="1">
+        <a:defRPr sz="1350" kern="1200">
           <a:solidFill>
             <a:schemeClr val="tx1"/>
           </a:solidFill>
@@ -1093,8 +4101,8 @@
           <a:cs typeface="+mn-cs"/>
         </a:defRPr>
       </a:lvl7pPr>
-      <a:lvl8pPr marL="3200400" algn="l" defTabSz="914400" rtl="0" eaLnBrk="1" latinLnBrk="0" hangingPunct="1">
-        <a:defRPr sz="1800" kern="1200">
+      <a:lvl8pPr marL="2400300" algn="l" defTabSz="685800" rtl="0" eaLnBrk="1" latinLnBrk="0" hangingPunct="1">
+        <a:defRPr sz="1350" kern="1200">
           <a:solidFill>
             <a:schemeClr val="tx1"/>
           </a:solidFill>
@@ -1103,8 +4111,8 @@
           <a:cs typeface="+mn-cs"/>
         </a:defRPr>
       </a:lvl8pPr>
-      <a:lvl9pPr marL="3657600" algn="l" defTabSz="914400" rtl="0" eaLnBrk="1" latinLnBrk="0" hangingPunct="1">
-        <a:defRPr sz="1800" kern="1200">
+      <a:lvl9pPr marL="2743200" algn="l" defTabSz="685800" rtl="0" eaLnBrk="1" latinLnBrk="0" hangingPunct="1">
+        <a:defRPr sz="1350" kern="1200">
           <a:solidFill>
             <a:schemeClr val="tx1"/>
           </a:solidFill>
@@ -1126,6 +4134,7 @@
         <a:solidFill>
           <a:srgbClr val="0F4C3A"/>
         </a:solidFill>
+        <a:effectLst/>
       </p:bgPr>
     </p:bg>
     <p:spTree>
@@ -1163,11 +4172,11 @@
           <a:bodyPr wrap="square" lIns="0" tIns="0" rIns="0" bIns="0" rtlCol="0" anchor="ctr"/>
           <a:lstStyle/>
           <a:p>
-            <a:pPr indent="0" marL="0">
+            <a:pPr marL="0" indent="0">
               <a:buNone/>
             </a:pPr>
             <a:r>
-              <a:rPr lang="en-US" sz="1000" b="1" spc="400" kern="0" dirty="0">
+              <a:rPr lang="en-US" sz="1000" b="1" kern="0" spc="400" dirty="0">
                 <a:solidFill>
                   <a:srgbClr val="D4AF37"/>
                 </a:solidFill>
@@ -1202,7 +4211,7 @@
           <a:bodyPr wrap="square" lIns="0" tIns="0" rIns="0" bIns="0" rtlCol="0" anchor="ctr"/>
           <a:lstStyle/>
           <a:p>
-            <a:pPr indent="0" marL="0">
+            <a:pPr marL="0" indent="0">
               <a:buNone/>
             </a:pPr>
             <a:r>
@@ -1241,7 +4250,7 @@
           <a:bodyPr wrap="square" lIns="0" tIns="0" rIns="0" bIns="0" rtlCol="0" anchor="ctr"/>
           <a:lstStyle/>
           <a:p>
-            <a:pPr indent="0" marL="0">
+            <a:pPr marL="0" indent="0">
               <a:buNone/>
             </a:pPr>
             <a:r>
@@ -1280,14 +4289,11 @@
           <a:bodyPr wrap="square" lIns="0" tIns="0" rIns="0" bIns="0" rtlCol="0" anchor="ctr"/>
           <a:lstStyle/>
           <a:p>
-            <a:pPr indent="0" marL="0">
+            <a:pPr marL="0" indent="0">
               <a:buNone/>
             </a:pPr>
             <a:r>
               <a:rPr lang="en-US" sz="1600" dirty="0">
-                <a:solidFill>
-                  <a:srgbClr val="C8D4CE"/>
-                </a:solidFill>
                 <a:latin typeface="Calibri" pitchFamily="34" charset="0"/>
                 <a:ea typeface="Calibri" pitchFamily="34" charset="-122"/>
                 <a:cs typeface="Calibri" pitchFamily="34" charset="-120"/>
@@ -1305,9 +4311,9 @@
           <p:nvPr/>
         </p:nvSpPr>
         <p:spPr>
-          <a:xfrm>
-            <a:off x="548640" y="3749040"/>
-            <a:ext cx="548640" cy="36576"/>
+          <a:xfrm flipV="1">
+            <a:off x="548639" y="3703321"/>
+            <a:ext cx="4635305" cy="45719"/>
           </a:xfrm>
           <a:prstGeom prst="rect">
             <a:avLst/>
@@ -1317,6 +4323,13 @@
           </a:solidFill>
           <a:ln/>
         </p:spPr>
+        <p:txBody>
+          <a:bodyPr/>
+          <a:lstStyle/>
+          <a:p>
+            <a:endParaRPr lang="pt-PT"/>
+          </a:p>
+        </p:txBody>
       </p:sp>
       <p:sp>
         <p:nvSpPr>
@@ -1339,19 +4352,16 @@
           <a:bodyPr wrap="square" lIns="0" tIns="0" rIns="0" bIns="0" rtlCol="0" anchor="ctr"/>
           <a:lstStyle/>
           <a:p>
-            <a:pPr indent="0" marL="0">
+            <a:pPr marL="0" indent="0">
               <a:buNone/>
             </a:pPr>
             <a:r>
               <a:rPr lang="en-US" sz="1400" b="1" dirty="0">
-                <a:solidFill>
-                  <a:srgbClr val="FFFFFF"/>
-                </a:solidFill>
                 <a:latin typeface="Calibri" pitchFamily="34" charset="0"/>
                 <a:ea typeface="Calibri" pitchFamily="34" charset="-122"/>
                 <a:cs typeface="Calibri" pitchFamily="34" charset="-120"/>
               </a:rPr>
-              <a:t>Gonçalo  ·  Tiago  ·  Alex</a:t>
+              <a:t>Gonçalo  ·  Tiago  ·  Alexandre </a:t>
             </a:r>
             <a:endParaRPr lang="en-US" sz="1400" dirty="0"/>
           </a:p>
@@ -1378,14 +4388,11 @@
           <a:bodyPr wrap="square" lIns="0" tIns="0" rIns="0" bIns="0" rtlCol="0" anchor="ctr"/>
           <a:lstStyle/>
           <a:p>
-            <a:pPr indent="0" marL="0">
+            <a:pPr marL="0" indent="0">
               <a:buNone/>
             </a:pPr>
             <a:r>
               <a:rPr lang="en-US" sz="1100" dirty="0">
-                <a:solidFill>
-                  <a:srgbClr val="9FB1A8"/>
-                </a:solidFill>
                 <a:latin typeface="Calibri" pitchFamily="34" charset="0"/>
                 <a:ea typeface="Calibri" pitchFamily="34" charset="-122"/>
                 <a:cs typeface="Calibri" pitchFamily="34" charset="-120"/>
@@ -1396,6 +4403,36 @@
           </a:p>
         </p:txBody>
       </p:sp>
+      <p:pic>
+        <p:nvPicPr>
+          <p:cNvPr id="10" name="Imagem 9">
+            <a:extLst>
+              <a:ext uri="{FF2B5EF4-FFF2-40B4-BE49-F238E27FC236}">
+                <a16:creationId xmlns:a16="http://schemas.microsoft.com/office/drawing/2014/main" id="{C96A920B-E9B4-4BCD-EFEB-42D8285188EF}"/>
+              </a:ext>
+            </a:extLst>
+          </p:cNvPr>
+          <p:cNvPicPr>
+            <a:picLocks noChangeAspect="1"/>
+          </p:cNvPicPr>
+          <p:nvPr/>
+        </p:nvPicPr>
+        <p:blipFill>
+          <a:blip r:embed="rId3"/>
+          <a:stretch>
+            <a:fillRect/>
+          </a:stretch>
+        </p:blipFill>
+        <p:spPr>
+          <a:xfrm>
+            <a:off x="5711483" y="3284244"/>
+            <a:ext cx="3432517" cy="1519311"/>
+          </a:xfrm>
+          <a:prstGeom prst="rect">
+            <a:avLst/>
+          </a:prstGeom>
+        </p:spPr>
+      </p:pic>
     </p:spTree>
   </p:cSld>
   <p:clrMapOvr>
@@ -1406,12 +4443,13 @@
 
 <file path=ppt/slides/slide2.xml><?xml version="1.0" encoding="utf-8"?>
 <p:sld xmlns:a="http://schemas.openxmlformats.org/drawingml/2006/main" xmlns:r="http://schemas.openxmlformats.org/officeDocument/2006/relationships" xmlns:p="http://schemas.openxmlformats.org/presentationml/2006/main">
-  <p:cSld name="Slide 2">
+  <p:cSld name="Slide 3">
     <p:bg>
       <p:bgPr>
         <a:solidFill>
           <a:srgbClr val="FFFFFF"/>
         </a:solidFill>
+        <a:effectLst/>
       </p:bgPr>
     </p:bg>
     <p:spTree>
@@ -1428,6 +4466,36 @@
           <a:chExt cx="0" cy="0"/>
         </a:xfrm>
       </p:grpSpPr>
+      <p:pic>
+        <p:nvPicPr>
+          <p:cNvPr id="11" name="Imagem 10">
+            <a:extLst>
+              <a:ext uri="{FF2B5EF4-FFF2-40B4-BE49-F238E27FC236}">
+                <a16:creationId xmlns:a16="http://schemas.microsoft.com/office/drawing/2014/main" id="{FB65A29D-8858-7833-865E-BF2DF010BC1E}"/>
+              </a:ext>
+            </a:extLst>
+          </p:cNvPr>
+          <p:cNvPicPr>
+            <a:picLocks noChangeAspect="1"/>
+          </p:cNvPicPr>
+          <p:nvPr/>
+        </p:nvPicPr>
+        <p:blipFill>
+          <a:blip r:embed="rId3"/>
+          <a:stretch>
+            <a:fillRect/>
+          </a:stretch>
+        </p:blipFill>
+        <p:spPr>
+          <a:xfrm>
+            <a:off x="5015132" y="1463040"/>
+            <a:ext cx="2862775" cy="1908516"/>
+          </a:xfrm>
+          <a:prstGeom prst="rect">
+            <a:avLst/>
+          </a:prstGeom>
+        </p:spPr>
+      </p:pic>
       <p:sp>
         <p:nvSpPr>
           <p:cNvPr id="2" name="Text 0"/>
@@ -1449,11 +4517,11 @@
           <a:bodyPr wrap="square" lIns="0" tIns="0" rIns="0" bIns="0" rtlCol="0" anchor="ctr"/>
           <a:lstStyle/>
           <a:p>
-            <a:pPr indent="0" marL="0">
+            <a:pPr marL="0" indent="0">
               <a:buNone/>
             </a:pPr>
             <a:r>
-              <a:rPr lang="en-US" sz="1000" b="1" spc="400" kern="0" dirty="0">
+              <a:rPr lang="en-US" sz="1000" b="1" kern="0" spc="400" dirty="0">
                 <a:solidFill>
                   <a:srgbClr val="0F4C3A"/>
                 </a:solidFill>
@@ -1461,7 +4529,7 @@
                 <a:ea typeface="Calibri" pitchFamily="34" charset="-122"/>
                 <a:cs typeface="Calibri" pitchFamily="34" charset="-120"/>
               </a:rPr>
-              <a:t>01  ·  A SOLUÇÃO</a:t>
+              <a:t>01 ·  O PROBLEMA</a:t>
             </a:r>
             <a:endParaRPr lang="en-US" sz="1000" dirty="0"/>
           </a:p>
@@ -1475,7 +4543,7 @@
         </p:nvSpPr>
         <p:spPr>
           <a:xfrm>
-            <a:off x="548640" y="777240"/>
+            <a:off x="548640" y="789255"/>
             <a:ext cx="8229600" cy="640080"/>
           </a:xfrm>
           <a:prstGeom prst="rect">
@@ -1488,7 +4556,7 @@
           <a:bodyPr wrap="square" lIns="0" tIns="0" rIns="0" bIns="0" rtlCol="0" anchor="ctr"/>
           <a:lstStyle/>
           <a:p>
-            <a:pPr indent="0" marL="0">
+            <a:pPr marL="0" indent="0">
               <a:buNone/>
             </a:pPr>
             <a:r>
@@ -1500,7 +4568,7 @@
                 <a:ea typeface="Georgia" pitchFamily="34" charset="-122"/>
                 <a:cs typeface="Georgia" pitchFamily="34" charset="-120"/>
               </a:rPr>
-              <a:t>O que é a nossa solução</a:t>
+              <a:t>O problema que resolve</a:t>
             </a:r>
             <a:endParaRPr lang="en-US" sz="3400" dirty="0"/>
           </a:p>
@@ -1515,7 +4583,7 @@
         <p:spPr>
           <a:xfrm>
             <a:off x="548640" y="1554480"/>
-            <a:ext cx="8229600" cy="914400"/>
+            <a:ext cx="3931920" cy="1463040"/>
           </a:xfrm>
           <a:prstGeom prst="rect">
             <a:avLst/>
@@ -1527,7 +4595,10 @@
           <a:bodyPr wrap="square" lIns="0" tIns="0" rIns="0" bIns="0" rtlCol="0" anchor="ctr"/>
           <a:lstStyle/>
           <a:p>
-            <a:pPr indent="0" marL="0">
+            <a:pPr marL="0" indent="0">
+              <a:spcAft>
+                <a:spcPts val="600"/>
+              </a:spcAft>
               <a:buNone/>
             </a:pPr>
             <a:r>
@@ -1539,7 +4610,7 @@
                 <a:ea typeface="Calibri" pitchFamily="34" charset="-122"/>
                 <a:cs typeface="Calibri" pitchFamily="34" charset="-120"/>
               </a:rPr>
-              <a:t>Aplicação em Python que permite a uma família registar e organizar todas as suas receitas e despesas mensais. Os dados ficam guardados em JSON, agrupados por categorias adaptadas à realidade portuguesa, com cálculo automático de saldo.</a:t>
+              <a:t>Famílias portuguesas têm cada vez mais dificuldade em controlar o seu orçamento mensal. O custo de vida subiu, mas a maioria continua sem ferramentas adaptadas à sua realidade.</a:t>
             </a:r>
             <a:endParaRPr lang="en-US" sz="1300" dirty="0"/>
           </a:p>
@@ -1547,54 +4618,14 @@
       </p:sp>
       <p:sp>
         <p:nvSpPr>
-          <p:cNvPr id="5" name="Shape 3"/>
+          <p:cNvPr id="6" name="Text 4"/>
           <p:cNvSpPr/>
           <p:nvPr/>
         </p:nvSpPr>
         <p:spPr>
           <a:xfrm>
-            <a:off x="548640" y="2606040"/>
-            <a:ext cx="3931920" cy="960120"/>
-          </a:xfrm>
-          <a:prstGeom prst="rect">
-            <a:avLst/>
-          </a:prstGeom>
-          <a:solidFill>
-            <a:srgbClr val="F4F1EC"/>
-          </a:solidFill>
-          <a:ln/>
-        </p:spPr>
-      </p:sp>
-      <p:sp>
-        <p:nvSpPr>
-          <p:cNvPr id="6" name="Shape 4"/>
-          <p:cNvSpPr/>
-          <p:nvPr/>
-        </p:nvSpPr>
-        <p:spPr>
-          <a:xfrm>
-            <a:off x="548640" y="2606040"/>
-            <a:ext cx="54864" cy="960120"/>
-          </a:xfrm>
-          <a:prstGeom prst="rect">
-            <a:avLst/>
-          </a:prstGeom>
-          <a:solidFill>
-            <a:srgbClr val="0F4C3A"/>
-          </a:solidFill>
-          <a:ln/>
-        </p:spPr>
-      </p:sp>
-      <p:sp>
-        <p:nvSpPr>
-          <p:cNvPr id="7" name="Text 5"/>
-          <p:cNvSpPr/>
-          <p:nvPr/>
-        </p:nvSpPr>
-        <p:spPr>
-          <a:xfrm>
-            <a:off x="777240" y="2715768"/>
-            <a:ext cx="3611880" cy="320040"/>
+            <a:off x="4846320" y="1600200"/>
+            <a:ext cx="3749040" cy="914400"/>
           </a:xfrm>
           <a:prstGeom prst="rect">
             <a:avLst/>
@@ -1606,11 +4637,140 @@
           <a:bodyPr wrap="square" lIns="0" tIns="0" rIns="0" bIns="0" rtlCol="0" anchor="ctr"/>
           <a:lstStyle/>
           <a:p>
-            <a:pPr indent="0" marL="0">
+            <a:pPr marL="0" indent="0" algn="ctr">
               <a:buNone/>
             </a:pPr>
-            <a:r>
-              <a:rPr lang="en-US" sz="1400" b="1" dirty="0">
+            <a:endParaRPr lang="en-US" sz="6400" dirty="0"/>
+          </a:p>
+        </p:txBody>
+      </p:sp>
+      <p:sp>
+        <p:nvSpPr>
+          <p:cNvPr id="7" name="Text 5"/>
+          <p:cNvSpPr/>
+          <p:nvPr/>
+        </p:nvSpPr>
+        <p:spPr>
+          <a:xfrm>
+            <a:off x="4754880" y="1474467"/>
+            <a:ext cx="3566160" cy="502920"/>
+          </a:xfrm>
+          <a:prstGeom prst="rect">
+            <a:avLst/>
+          </a:prstGeom>
+          <a:noFill/>
+          <a:ln/>
+        </p:spPr>
+        <p:txBody>
+          <a:bodyPr wrap="square" lIns="0" tIns="0" rIns="0" bIns="0" rtlCol="0" anchor="ctr"/>
+          <a:lstStyle/>
+          <a:p>
+            <a:pPr marL="0" indent="0" algn="ctr">
+              <a:buNone/>
+            </a:pPr>
+            <a:r>
+              <a:rPr lang="en-US" sz="1100" b="1" i="1" dirty="0">
+                <a:latin typeface="Calibri" pitchFamily="34" charset="0"/>
+                <a:ea typeface="Calibri" pitchFamily="34" charset="-122"/>
+                <a:cs typeface="Calibri" pitchFamily="34" charset="-120"/>
+              </a:rPr>
+              <a:t>Quanto gastei este mês em supermercado?</a:t>
+            </a:r>
+            <a:endParaRPr lang="en-US" sz="1100" b="1" dirty="0"/>
+          </a:p>
+        </p:txBody>
+      </p:sp>
+      <p:sp>
+        <p:nvSpPr>
+          <p:cNvPr id="8" name="Text 6"/>
+          <p:cNvSpPr/>
+          <p:nvPr/>
+        </p:nvSpPr>
+        <p:spPr>
+          <a:xfrm>
+            <a:off x="548640" y="3200400"/>
+            <a:ext cx="8229600" cy="320040"/>
+          </a:xfrm>
+          <a:prstGeom prst="rect">
+            <a:avLst/>
+          </a:prstGeom>
+          <a:noFill/>
+          <a:ln/>
+        </p:spPr>
+        <p:txBody>
+          <a:bodyPr wrap="square" lIns="0" tIns="0" rIns="0" bIns="0" rtlCol="0" anchor="ctr"/>
+          <a:lstStyle/>
+          <a:p>
+            <a:pPr marL="0" indent="0">
+              <a:buNone/>
+            </a:pPr>
+            <a:r>
+              <a:rPr lang="en-US" sz="1300" b="1" kern="0" spc="200" dirty="0" err="1">
+                <a:solidFill>
+                  <a:srgbClr val="0F4C3A"/>
+                </a:solidFill>
+                <a:latin typeface="Calibri" pitchFamily="34" charset="0"/>
+                <a:ea typeface="Calibri" pitchFamily="34" charset="-122"/>
+                <a:cs typeface="Calibri" pitchFamily="34" charset="-120"/>
+              </a:rPr>
+              <a:t>Limitações</a:t>
+            </a:r>
+            <a:r>
+              <a:rPr lang="en-US" sz="1300" b="1" kern="0" spc="200" dirty="0">
+                <a:solidFill>
+                  <a:srgbClr val="0F4C3A"/>
+                </a:solidFill>
+                <a:latin typeface="Calibri" pitchFamily="34" charset="0"/>
+                <a:ea typeface="Calibri" pitchFamily="34" charset="-122"/>
+                <a:cs typeface="Calibri" pitchFamily="34" charset="-120"/>
+              </a:rPr>
+              <a:t> </a:t>
+            </a:r>
+            <a:r>
+              <a:rPr lang="en-US" sz="1300" b="1" kern="0" spc="200" dirty="0" err="1">
+                <a:solidFill>
+                  <a:srgbClr val="0F4C3A"/>
+                </a:solidFill>
+                <a:latin typeface="Calibri" pitchFamily="34" charset="0"/>
+                <a:ea typeface="Calibri" pitchFamily="34" charset="-122"/>
+                <a:cs typeface="Calibri" pitchFamily="34" charset="-120"/>
+              </a:rPr>
+              <a:t>atuais</a:t>
+            </a:r>
+            <a:endParaRPr lang="en-US" sz="1300" dirty="0"/>
+          </a:p>
+        </p:txBody>
+      </p:sp>
+      <p:sp>
+        <p:nvSpPr>
+          <p:cNvPr id="9" name="Text 7"/>
+          <p:cNvSpPr/>
+          <p:nvPr/>
+        </p:nvSpPr>
+        <p:spPr>
+          <a:xfrm>
+            <a:off x="548640" y="3578175"/>
+            <a:ext cx="8046720" cy="1371600"/>
+          </a:xfrm>
+          <a:prstGeom prst="rect">
+            <a:avLst/>
+          </a:prstGeom>
+          <a:noFill/>
+          <a:ln/>
+        </p:spPr>
+        <p:txBody>
+          <a:bodyPr wrap="square" lIns="0" tIns="0" rIns="0" bIns="0" rtlCol="0" anchor="ctr"/>
+          <a:lstStyle/>
+          <a:p>
+            <a:pPr marL="342900" indent="-342900">
+              <a:spcAft>
+                <a:spcPts val="400"/>
+              </a:spcAft>
+              <a:buSzPct val="100000"/>
+              <a:buChar char="•"/>
+            </a:pPr>
+            <a:r>
+              <a:rPr lang="en-US" sz="1200" dirty="0">
                 <a:solidFill>
                   <a:srgbClr val="1A1A1A"/>
                 </a:solidFill>
@@ -1618,117 +4778,10 @@
                 <a:ea typeface="Calibri" pitchFamily="34" charset="-122"/>
                 <a:cs typeface="Calibri" pitchFamily="34" charset="-120"/>
               </a:rPr>
-              <a:t>Registo simples</a:t>
-            </a:r>
-            <a:endParaRPr lang="en-US" sz="1400" dirty="0"/>
-          </a:p>
-        </p:txBody>
-      </p:sp>
-      <p:sp>
-        <p:nvSpPr>
-          <p:cNvPr id="8" name="Text 6"/>
-          <p:cNvSpPr/>
-          <p:nvPr/>
-        </p:nvSpPr>
-        <p:spPr>
-          <a:xfrm>
-            <a:off x="777240" y="3063240"/>
-            <a:ext cx="3611880" cy="457200"/>
-          </a:xfrm>
-          <a:prstGeom prst="rect">
-            <a:avLst/>
-          </a:prstGeom>
-          <a:noFill/>
-          <a:ln/>
-        </p:spPr>
-        <p:txBody>
-          <a:bodyPr wrap="square" lIns="0" tIns="0" rIns="0" bIns="0" rtlCol="0" anchor="ctr"/>
-          <a:lstStyle/>
-          <a:p>
-            <a:pPr indent="0" marL="0">
-              <a:buNone/>
-            </a:pPr>
-            <a:r>
-              <a:rPr lang="en-US" sz="1050" dirty="0">
-                <a:solidFill>
-                  <a:srgbClr val="5A6A6A"/>
-                </a:solidFill>
-                <a:latin typeface="Calibri" pitchFamily="34" charset="0"/>
-                <a:ea typeface="Calibri" pitchFamily="34" charset="-122"/>
-                <a:cs typeface="Calibri" pitchFamily="34" charset="-120"/>
-              </a:rPr>
-              <a:t>Inserção rápida de receitas e despesas via menu interativo no terminal.</a:t>
-            </a:r>
-            <a:endParaRPr lang="en-US" sz="1050" dirty="0"/>
-          </a:p>
-        </p:txBody>
-      </p:sp>
-      <p:sp>
-        <p:nvSpPr>
-          <p:cNvPr id="9" name="Shape 7"/>
-          <p:cNvSpPr/>
-          <p:nvPr/>
-        </p:nvSpPr>
-        <p:spPr>
-          <a:xfrm>
-            <a:off x="4663440" y="2606040"/>
-            <a:ext cx="3931920" cy="960120"/>
-          </a:xfrm>
-          <a:prstGeom prst="rect">
-            <a:avLst/>
-          </a:prstGeom>
-          <a:solidFill>
-            <a:srgbClr val="F4F1EC"/>
-          </a:solidFill>
-          <a:ln/>
-        </p:spPr>
-      </p:sp>
-      <p:sp>
-        <p:nvSpPr>
-          <p:cNvPr id="10" name="Shape 8"/>
-          <p:cNvSpPr/>
-          <p:nvPr/>
-        </p:nvSpPr>
-        <p:spPr>
-          <a:xfrm>
-            <a:off x="4663440" y="2606040"/>
-            <a:ext cx="54864" cy="960120"/>
-          </a:xfrm>
-          <a:prstGeom prst="rect">
-            <a:avLst/>
-          </a:prstGeom>
-          <a:solidFill>
-            <a:srgbClr val="0F4C3A"/>
-          </a:solidFill>
-          <a:ln/>
-        </p:spPr>
-      </p:sp>
-      <p:sp>
-        <p:nvSpPr>
-          <p:cNvPr id="11" name="Text 9"/>
-          <p:cNvSpPr/>
-          <p:nvPr/>
-        </p:nvSpPr>
-        <p:spPr>
-          <a:xfrm>
-            <a:off x="4892040" y="2715768"/>
-            <a:ext cx="3611880" cy="320040"/>
-          </a:xfrm>
-          <a:prstGeom prst="rect">
-            <a:avLst/>
-          </a:prstGeom>
-          <a:noFill/>
-          <a:ln/>
-        </p:spPr>
-        <p:txBody>
-          <a:bodyPr wrap="square" lIns="0" tIns="0" rIns="0" bIns="0" rtlCol="0" anchor="ctr"/>
-          <a:lstStyle/>
-          <a:p>
-            <a:pPr indent="0" marL="0">
-              <a:buNone/>
-            </a:pPr>
-            <a:r>
-              <a:rPr lang="en-US" sz="1400" b="1" dirty="0">
+              <a:t>Apps bancárias mostram movimentos individuais, mas </a:t>
+            </a:r>
+            <a:r>
+              <a:rPr lang="en-US" sz="1200" dirty="0" err="1">
                 <a:solidFill>
                   <a:srgbClr val="1A1A1A"/>
                 </a:solidFill>
@@ -1736,117 +4789,10 @@
                 <a:ea typeface="Calibri" pitchFamily="34" charset="-122"/>
                 <a:cs typeface="Calibri" pitchFamily="34" charset="-120"/>
               </a:rPr>
-              <a:t>Categorias PT</a:t>
-            </a:r>
-            <a:endParaRPr lang="en-US" sz="1400" dirty="0"/>
-          </a:p>
-        </p:txBody>
-      </p:sp>
-      <p:sp>
-        <p:nvSpPr>
-          <p:cNvPr id="12" name="Text 10"/>
-          <p:cNvSpPr/>
-          <p:nvPr/>
-        </p:nvSpPr>
-        <p:spPr>
-          <a:xfrm>
-            <a:off x="4892040" y="3063240"/>
-            <a:ext cx="3611880" cy="457200"/>
-          </a:xfrm>
-          <a:prstGeom prst="rect">
-            <a:avLst/>
-          </a:prstGeom>
-          <a:noFill/>
-          <a:ln/>
-        </p:spPr>
-        <p:txBody>
-          <a:bodyPr wrap="square" lIns="0" tIns="0" rIns="0" bIns="0" rtlCol="0" anchor="ctr"/>
-          <a:lstStyle/>
-          <a:p>
-            <a:pPr indent="0" marL="0">
-              <a:buNone/>
-            </a:pPr>
-            <a:r>
-              <a:rPr lang="en-US" sz="1050" dirty="0">
-                <a:solidFill>
-                  <a:srgbClr val="5A6A6A"/>
-                </a:solidFill>
-                <a:latin typeface="Calibri" pitchFamily="34" charset="0"/>
-                <a:ea typeface="Calibri" pitchFamily="34" charset="-122"/>
-                <a:cs typeface="Calibri" pitchFamily="34" charset="-120"/>
-              </a:rPr>
-              <a:t>Habitação, utilidades, alimentação, transportes, saúde, educação, lazer.</a:t>
-            </a:r>
-            <a:endParaRPr lang="en-US" sz="1050" dirty="0"/>
-          </a:p>
-        </p:txBody>
-      </p:sp>
-      <p:sp>
-        <p:nvSpPr>
-          <p:cNvPr id="13" name="Shape 11"/>
-          <p:cNvSpPr/>
-          <p:nvPr/>
-        </p:nvSpPr>
-        <p:spPr>
-          <a:xfrm>
-            <a:off x="548640" y="3703320"/>
-            <a:ext cx="3931920" cy="960120"/>
-          </a:xfrm>
-          <a:prstGeom prst="rect">
-            <a:avLst/>
-          </a:prstGeom>
-          <a:solidFill>
-            <a:srgbClr val="F4F1EC"/>
-          </a:solidFill>
-          <a:ln/>
-        </p:spPr>
-      </p:sp>
-      <p:sp>
-        <p:nvSpPr>
-          <p:cNvPr id="14" name="Shape 12"/>
-          <p:cNvSpPr/>
-          <p:nvPr/>
-        </p:nvSpPr>
-        <p:spPr>
-          <a:xfrm>
-            <a:off x="548640" y="3703320"/>
-            <a:ext cx="54864" cy="960120"/>
-          </a:xfrm>
-          <a:prstGeom prst="rect">
-            <a:avLst/>
-          </a:prstGeom>
-          <a:solidFill>
-            <a:srgbClr val="0F4C3A"/>
-          </a:solidFill>
-          <a:ln/>
-        </p:spPr>
-      </p:sp>
-      <p:sp>
-        <p:nvSpPr>
-          <p:cNvPr id="15" name="Text 13"/>
-          <p:cNvSpPr/>
-          <p:nvPr/>
-        </p:nvSpPr>
-        <p:spPr>
-          <a:xfrm>
-            <a:off x="777240" y="3813048"/>
-            <a:ext cx="3611880" cy="320040"/>
-          </a:xfrm>
-          <a:prstGeom prst="rect">
-            <a:avLst/>
-          </a:prstGeom>
-          <a:noFill/>
-          <a:ln/>
-        </p:spPr>
-        <p:txBody>
-          <a:bodyPr wrap="square" lIns="0" tIns="0" rIns="0" bIns="0" rtlCol="0" anchor="ctr"/>
-          <a:lstStyle/>
-          <a:p>
-            <a:pPr indent="0" marL="0">
-              <a:buNone/>
-            </a:pPr>
-            <a:r>
-              <a:rPr lang="en-US" sz="1400" b="1" dirty="0">
+              <a:t>não</a:t>
+            </a:r>
+            <a:r>
+              <a:rPr lang="en-US" sz="1200" dirty="0">
                 <a:solidFill>
                   <a:srgbClr val="1A1A1A"/>
                 </a:solidFill>
@@ -1854,117 +4800,10 @@
                 <a:ea typeface="Calibri" pitchFamily="34" charset="-122"/>
                 <a:cs typeface="Calibri" pitchFamily="34" charset="-120"/>
               </a:rPr>
-              <a:t>Saldo automático</a:t>
-            </a:r>
-            <a:endParaRPr lang="en-US" sz="1400" dirty="0"/>
-          </a:p>
-        </p:txBody>
-      </p:sp>
-      <p:sp>
-        <p:nvSpPr>
-          <p:cNvPr id="16" name="Text 14"/>
-          <p:cNvSpPr/>
-          <p:nvPr/>
-        </p:nvSpPr>
-        <p:spPr>
-          <a:xfrm>
-            <a:off x="777240" y="4160520"/>
-            <a:ext cx="3611880" cy="457200"/>
-          </a:xfrm>
-          <a:prstGeom prst="rect">
-            <a:avLst/>
-          </a:prstGeom>
-          <a:noFill/>
-          <a:ln/>
-        </p:spPr>
-        <p:txBody>
-          <a:bodyPr wrap="square" lIns="0" tIns="0" rIns="0" bIns="0" rtlCol="0" anchor="ctr"/>
-          <a:lstStyle/>
-          <a:p>
-            <a:pPr indent="0" marL="0">
-              <a:buNone/>
-            </a:pPr>
-            <a:r>
-              <a:rPr lang="en-US" sz="1050" dirty="0">
-                <a:solidFill>
-                  <a:srgbClr val="5A6A6A"/>
-                </a:solidFill>
-                <a:latin typeface="Calibri" pitchFamily="34" charset="0"/>
-                <a:ea typeface="Calibri" pitchFamily="34" charset="-122"/>
-                <a:cs typeface="Calibri" pitchFamily="34" charset="-120"/>
-              </a:rPr>
-              <a:t>Cálculo de saldo mensal e agrupamento de gastos por categoria.</a:t>
-            </a:r>
-            <a:endParaRPr lang="en-US" sz="1050" dirty="0"/>
-          </a:p>
-        </p:txBody>
-      </p:sp>
-      <p:sp>
-        <p:nvSpPr>
-          <p:cNvPr id="17" name="Shape 15"/>
-          <p:cNvSpPr/>
-          <p:nvPr/>
-        </p:nvSpPr>
-        <p:spPr>
-          <a:xfrm>
-            <a:off x="4663440" y="3703320"/>
-            <a:ext cx="3931920" cy="960120"/>
-          </a:xfrm>
-          <a:prstGeom prst="rect">
-            <a:avLst/>
-          </a:prstGeom>
-          <a:solidFill>
-            <a:srgbClr val="F4F1EC"/>
-          </a:solidFill>
-          <a:ln/>
-        </p:spPr>
-      </p:sp>
-      <p:sp>
-        <p:nvSpPr>
-          <p:cNvPr id="18" name="Shape 16"/>
-          <p:cNvSpPr/>
-          <p:nvPr/>
-        </p:nvSpPr>
-        <p:spPr>
-          <a:xfrm>
-            <a:off x="4663440" y="3703320"/>
-            <a:ext cx="54864" cy="960120"/>
-          </a:xfrm>
-          <a:prstGeom prst="rect">
-            <a:avLst/>
-          </a:prstGeom>
-          <a:solidFill>
-            <a:srgbClr val="0F4C3A"/>
-          </a:solidFill>
-          <a:ln/>
-        </p:spPr>
-      </p:sp>
-      <p:sp>
-        <p:nvSpPr>
-          <p:cNvPr id="19" name="Text 17"/>
-          <p:cNvSpPr/>
-          <p:nvPr/>
-        </p:nvSpPr>
-        <p:spPr>
-          <a:xfrm>
-            <a:off x="4892040" y="3813048"/>
-            <a:ext cx="3611880" cy="320040"/>
-          </a:xfrm>
-          <a:prstGeom prst="rect">
-            <a:avLst/>
-          </a:prstGeom>
-          <a:noFill/>
-          <a:ln/>
-        </p:spPr>
-        <p:txBody>
-          <a:bodyPr wrap="square" lIns="0" tIns="0" rIns="0" bIns="0" rtlCol="0" anchor="ctr"/>
-          <a:lstStyle/>
-          <a:p>
-            <a:pPr indent="0" marL="0">
-              <a:buNone/>
-            </a:pPr>
-            <a:r>
-              <a:rPr lang="en-US" sz="1400" b="1" dirty="0">
+              <a:t> </a:t>
+            </a:r>
+            <a:r>
+              <a:rPr lang="en-US" sz="1200" dirty="0" err="1">
                 <a:solidFill>
                   <a:srgbClr val="1A1A1A"/>
                 </a:solidFill>
@@ -1972,48 +4811,128 @@
                 <a:ea typeface="Calibri" pitchFamily="34" charset="-122"/>
                 <a:cs typeface="Calibri" pitchFamily="34" charset="-120"/>
               </a:rPr>
-              <a:t>JSON portátil</a:t>
-            </a:r>
-            <a:endParaRPr lang="en-US" sz="1400" dirty="0"/>
-          </a:p>
-        </p:txBody>
-      </p:sp>
-      <p:sp>
-        <p:nvSpPr>
-          <p:cNvPr id="20" name="Text 18"/>
-          <p:cNvSpPr/>
-          <p:nvPr/>
-        </p:nvSpPr>
-        <p:spPr>
-          <a:xfrm>
-            <a:off x="4892040" y="4160520"/>
-            <a:ext cx="3611880" cy="457200"/>
-          </a:xfrm>
-          <a:prstGeom prst="rect">
-            <a:avLst/>
-          </a:prstGeom>
-          <a:noFill/>
-          <a:ln/>
-        </p:spPr>
-        <p:txBody>
-          <a:bodyPr wrap="square" lIns="0" tIns="0" rIns="0" bIns="0" rtlCol="0" anchor="ctr"/>
-          <a:lstStyle/>
-          <a:p>
-            <a:pPr indent="0" marL="0">
-              <a:buNone/>
-            </a:pPr>
-            <a:r>
-              <a:rPr lang="en-US" sz="1050" dirty="0">
+              <a:t>categorizam</a:t>
+            </a:r>
+            <a:r>
+              <a:rPr lang="en-US" sz="1200" dirty="0">
                 <a:solidFill>
-                  <a:srgbClr val="5A6A6A"/>
+                  <a:srgbClr val="1A1A1A"/>
                 </a:solidFill>
                 <a:latin typeface="Calibri" pitchFamily="34" charset="0"/>
                 <a:ea typeface="Calibri" pitchFamily="34" charset="-122"/>
                 <a:cs typeface="Calibri" pitchFamily="34" charset="-120"/>
               </a:rPr>
-              <a:t>Persistência em ficheiro JSON, sem base de dados nem dependências externas.</a:t>
-            </a:r>
-            <a:endParaRPr lang="en-US" sz="1050" dirty="0"/>
+              <a:t>, </a:t>
+            </a:r>
+            <a:r>
+              <a:rPr lang="en-US" sz="1200" dirty="0" err="1">
+                <a:solidFill>
+                  <a:srgbClr val="1A1A1A"/>
+                </a:solidFill>
+                <a:latin typeface="Calibri" pitchFamily="34" charset="0"/>
+                <a:ea typeface="Calibri" pitchFamily="34" charset="-122"/>
+                <a:cs typeface="Calibri" pitchFamily="34" charset="-120"/>
+              </a:rPr>
+              <a:t>nem</a:t>
+            </a:r>
+            <a:r>
+              <a:rPr lang="en-US" sz="1200" dirty="0">
+                <a:solidFill>
+                  <a:srgbClr val="1A1A1A"/>
+                </a:solidFill>
+                <a:latin typeface="Calibri" pitchFamily="34" charset="0"/>
+                <a:ea typeface="Calibri" pitchFamily="34" charset="-122"/>
+                <a:cs typeface="Calibri" pitchFamily="34" charset="-120"/>
+              </a:rPr>
+              <a:t> somam ao nível familiar.</a:t>
+            </a:r>
+            <a:endParaRPr lang="en-US" sz="1200" dirty="0"/>
+          </a:p>
+          <a:p>
+            <a:pPr marL="342900" indent="-342900">
+              <a:spcAft>
+                <a:spcPts val="400"/>
+              </a:spcAft>
+              <a:buSzPct val="100000"/>
+              <a:buChar char="•"/>
+            </a:pPr>
+            <a:r>
+              <a:rPr lang="en-US" sz="1200" dirty="0">
+                <a:solidFill>
+                  <a:srgbClr val="1A1A1A"/>
+                </a:solidFill>
+                <a:latin typeface="Calibri" pitchFamily="34" charset="0"/>
+                <a:ea typeface="Calibri" pitchFamily="34" charset="-122"/>
+                <a:cs typeface="Calibri" pitchFamily="34" charset="-120"/>
+              </a:rPr>
+              <a:t>Folhas de Excel são manuais, propensas a erros e raramente se </a:t>
+            </a:r>
+            <a:r>
+              <a:rPr lang="en-US" sz="1200" dirty="0" err="1">
+                <a:solidFill>
+                  <a:srgbClr val="1A1A1A"/>
+                </a:solidFill>
+                <a:latin typeface="Calibri" pitchFamily="34" charset="0"/>
+                <a:ea typeface="Calibri" pitchFamily="34" charset="-122"/>
+                <a:cs typeface="Calibri" pitchFamily="34" charset="-120"/>
+              </a:rPr>
+              <a:t>mantêm</a:t>
+            </a:r>
+            <a:r>
+              <a:rPr lang="en-US" sz="1200" dirty="0">
+                <a:solidFill>
+                  <a:srgbClr val="1A1A1A"/>
+                </a:solidFill>
+                <a:latin typeface="Calibri" pitchFamily="34" charset="0"/>
+                <a:ea typeface="Calibri" pitchFamily="34" charset="-122"/>
+                <a:cs typeface="Calibri" pitchFamily="34" charset="-120"/>
+              </a:rPr>
+              <a:t> </a:t>
+            </a:r>
+            <a:r>
+              <a:rPr lang="en-US" sz="1200" dirty="0" err="1">
+                <a:solidFill>
+                  <a:srgbClr val="1A1A1A"/>
+                </a:solidFill>
+                <a:latin typeface="Calibri" pitchFamily="34" charset="0"/>
+                <a:ea typeface="Calibri" pitchFamily="34" charset="-122"/>
+                <a:cs typeface="Calibri" pitchFamily="34" charset="-120"/>
+              </a:rPr>
+              <a:t>atualizadas</a:t>
+            </a:r>
+            <a:r>
+              <a:rPr lang="en-US" sz="1200" dirty="0">
+                <a:solidFill>
+                  <a:srgbClr val="1A1A1A"/>
+                </a:solidFill>
+                <a:latin typeface="Calibri" pitchFamily="34" charset="0"/>
+                <a:ea typeface="Calibri" pitchFamily="34" charset="-122"/>
+                <a:cs typeface="Calibri" pitchFamily="34" charset="-120"/>
+              </a:rPr>
+              <a:t>.</a:t>
+            </a:r>
+            <a:endParaRPr lang="en-US" sz="1200" dirty="0"/>
+          </a:p>
+          <a:p>
+            <a:pPr marL="342900" indent="-342900">
+              <a:spcAft>
+                <a:spcPts val="400"/>
+              </a:spcAft>
+              <a:buSzPct val="100000"/>
+              <a:buChar char="•"/>
+            </a:pPr>
+            <a:r>
+              <a:rPr lang="en-US" sz="1200" dirty="0">
+                <a:solidFill>
+                  <a:srgbClr val="1A1A1A"/>
+                </a:solidFill>
+                <a:latin typeface="Calibri" pitchFamily="34" charset="0"/>
+                <a:ea typeface="Calibri" pitchFamily="34" charset="-122"/>
+                <a:cs typeface="Calibri" pitchFamily="34" charset="-120"/>
+              </a:rPr>
+              <a:t>Não há visibilidade sobre quanto entra, quanto sai e onde se gasta — saldo real fica obscuro.</a:t>
+            </a:r>
+            <a:endParaRPr lang="en-US" sz="1200" dirty="0"/>
           </a:p>
         </p:txBody>
       </p:sp>
@@ -2027,12 +4946,13 @@
 
 <file path=ppt/slides/slide3.xml><?xml version="1.0" encoding="utf-8"?>
 <p:sld xmlns:a="http://schemas.openxmlformats.org/drawingml/2006/main" xmlns:r="http://schemas.openxmlformats.org/officeDocument/2006/relationships" xmlns:p="http://schemas.openxmlformats.org/presentationml/2006/main">
-  <p:cSld name="Slide 3">
+  <p:cSld name="Slide 2">
     <p:bg>
       <p:bgPr>
         <a:solidFill>
           <a:srgbClr val="FFFFFF"/>
         </a:solidFill>
+        <a:effectLst/>
       </p:bgPr>
     </p:bg>
     <p:spTree>
@@ -2070,11 +4990,11 @@
           <a:bodyPr wrap="square" lIns="0" tIns="0" rIns="0" bIns="0" rtlCol="0" anchor="ctr"/>
           <a:lstStyle/>
           <a:p>
-            <a:pPr indent="0" marL="0">
+            <a:pPr marL="0" indent="0">
               <a:buNone/>
             </a:pPr>
             <a:r>
-              <a:rPr lang="en-US" sz="1000" b="1" spc="400" kern="0" dirty="0">
+              <a:rPr lang="en-US" sz="1000" b="1" kern="0" spc="400" dirty="0">
                 <a:solidFill>
                   <a:srgbClr val="0F4C3A"/>
                 </a:solidFill>
@@ -2082,7 +5002,7 @@
                 <a:ea typeface="Calibri" pitchFamily="34" charset="-122"/>
                 <a:cs typeface="Calibri" pitchFamily="34" charset="-120"/>
               </a:rPr>
-              <a:t>02  ·  O PROBLEMA</a:t>
+              <a:t>02  ·  A SOLUÇÃO</a:t>
             </a:r>
             <a:endParaRPr lang="en-US" sz="1000" dirty="0"/>
           </a:p>
@@ -2109,7 +5029,7 @@
           <a:bodyPr wrap="square" lIns="0" tIns="0" rIns="0" bIns="0" rtlCol="0" anchor="ctr"/>
           <a:lstStyle/>
           <a:p>
-            <a:pPr indent="0" marL="0">
+            <a:pPr marL="0" indent="0">
               <a:buNone/>
             </a:pPr>
             <a:r>
@@ -2121,7 +5041,7 @@
                 <a:ea typeface="Georgia" pitchFamily="34" charset="-122"/>
                 <a:cs typeface="Georgia" pitchFamily="34" charset="-120"/>
               </a:rPr>
-              <a:t>O problema que resolve</a:t>
+              <a:t>O que é a nossa solução</a:t>
             </a:r>
             <a:endParaRPr lang="en-US" sz="3400" dirty="0"/>
           </a:p>
@@ -2136,7 +5056,7 @@
         <p:spPr>
           <a:xfrm>
             <a:off x="548640" y="1554480"/>
-            <a:ext cx="3931920" cy="1463040"/>
+            <a:ext cx="8229600" cy="914400"/>
           </a:xfrm>
           <a:prstGeom prst="rect">
             <a:avLst/>
@@ -2148,10 +5068,7 @@
           <a:bodyPr wrap="square" lIns="0" tIns="0" rIns="0" bIns="0" rtlCol="0" anchor="ctr"/>
           <a:lstStyle/>
           <a:p>
-            <a:pPr indent="0" marL="0">
-              <a:spcAft>
-                <a:spcPts val="600"/>
-              </a:spcAft>
+            <a:pPr marL="0" indent="0">
               <a:buNone/>
             </a:pPr>
             <a:r>
@@ -2163,7 +5080,7 @@
                 <a:ea typeface="Calibri" pitchFamily="34" charset="-122"/>
                 <a:cs typeface="Calibri" pitchFamily="34" charset="-120"/>
               </a:rPr>
-              <a:t>Famílias portuguesas têm cada vez mais dificuldade em controlar o seu orçamento mensal. O custo de vida subiu, mas a maioria continua sem ferramentas adaptadas à sua realidade.</a:t>
+              <a:t>Aplicação em Python que permite a uma família registar e organizar todas as suas receitas e despesas mensais. Os dados ficam guardados em JSON, agrupados por categorias adaptadas à realidade portuguesa, com cálculo automático de saldo.</a:t>
             </a:r>
             <a:endParaRPr lang="en-US" sz="1300" dirty="0"/>
           </a:p>
@@ -2177,8 +5094,35 @@
         </p:nvSpPr>
         <p:spPr>
           <a:xfrm>
-            <a:off x="4846320" y="1554480"/>
-            <a:ext cx="3749040" cy="1463040"/>
+            <a:off x="548640" y="2606040"/>
+            <a:ext cx="3931920" cy="960120"/>
+          </a:xfrm>
+          <a:prstGeom prst="rect">
+            <a:avLst/>
+          </a:prstGeom>
+          <a:solidFill>
+            <a:srgbClr val="F4F1EC"/>
+          </a:solidFill>
+          <a:ln/>
+        </p:spPr>
+        <p:txBody>
+          <a:bodyPr/>
+          <a:lstStyle/>
+          <a:p>
+            <a:endParaRPr lang="pt-PT"/>
+          </a:p>
+        </p:txBody>
+      </p:sp>
+      <p:sp>
+        <p:nvSpPr>
+          <p:cNvPr id="6" name="Shape 4"/>
+          <p:cNvSpPr/>
+          <p:nvPr/>
+        </p:nvSpPr>
+        <p:spPr>
+          <a:xfrm>
+            <a:off x="548640" y="2606040"/>
+            <a:ext cx="54864" cy="960120"/>
           </a:xfrm>
           <a:prstGeom prst="rect">
             <a:avLst/>
@@ -2188,17 +5132,24 @@
           </a:solidFill>
           <a:ln/>
         </p:spPr>
-      </p:sp>
-      <p:sp>
-        <p:nvSpPr>
-          <p:cNvPr id="6" name="Text 4"/>
+        <p:txBody>
+          <a:bodyPr/>
+          <a:lstStyle/>
+          <a:p>
+            <a:endParaRPr lang="pt-PT"/>
+          </a:p>
+        </p:txBody>
+      </p:sp>
+      <p:sp>
+        <p:nvSpPr>
+          <p:cNvPr id="7" name="Text 5"/>
           <p:cNvSpPr/>
           <p:nvPr/>
         </p:nvSpPr>
         <p:spPr>
           <a:xfrm>
-            <a:off x="4846320" y="1600200"/>
-            <a:ext cx="3749040" cy="914400"/>
+            <a:off x="777240" y="2715768"/>
+            <a:ext cx="3611880" cy="320040"/>
           </a:xfrm>
           <a:prstGeom prst="rect">
             <a:avLst/>
@@ -2210,132 +5161,11 @@
           <a:bodyPr wrap="square" lIns="0" tIns="0" rIns="0" bIns="0" rtlCol="0" anchor="ctr"/>
           <a:lstStyle/>
           <a:p>
-            <a:pPr algn="ctr" indent="0" marL="0">
+            <a:pPr marL="0" indent="0">
               <a:buNone/>
             </a:pPr>
             <a:r>
-              <a:rPr lang="en-US" sz="6400" b="1" dirty="0">
-                <a:solidFill>
-                  <a:srgbClr val="D4AF37"/>
-                </a:solidFill>
-                <a:latin typeface="Georgia" pitchFamily="34" charset="0"/>
-                <a:ea typeface="Georgia" pitchFamily="34" charset="-122"/>
-                <a:cs typeface="Georgia" pitchFamily="34" charset="-120"/>
-              </a:rPr>
-              <a:t>?</a:t>
-            </a:r>
-            <a:endParaRPr lang="en-US" sz="6400" dirty="0"/>
-          </a:p>
-        </p:txBody>
-      </p:sp>
-      <p:sp>
-        <p:nvSpPr>
-          <p:cNvPr id="7" name="Text 5"/>
-          <p:cNvSpPr/>
-          <p:nvPr/>
-        </p:nvSpPr>
-        <p:spPr>
-          <a:xfrm>
-            <a:off x="4937760" y="2468880"/>
-            <a:ext cx="3566160" cy="502920"/>
-          </a:xfrm>
-          <a:prstGeom prst="rect">
-            <a:avLst/>
-          </a:prstGeom>
-          <a:noFill/>
-          <a:ln/>
-        </p:spPr>
-        <p:txBody>
-          <a:bodyPr wrap="square" lIns="0" tIns="0" rIns="0" bIns="0" rtlCol="0" anchor="ctr"/>
-          <a:lstStyle/>
-          <a:p>
-            <a:pPr algn="ctr" indent="0" marL="0">
-              <a:buNone/>
-            </a:pPr>
-            <a:r>
-              <a:rPr lang="en-US" sz="1100" i="1" dirty="0">
-                <a:solidFill>
-                  <a:srgbClr val="FFFFFF"/>
-                </a:solidFill>
-                <a:latin typeface="Calibri" pitchFamily="34" charset="0"/>
-                <a:ea typeface="Calibri" pitchFamily="34" charset="-122"/>
-                <a:cs typeface="Calibri" pitchFamily="34" charset="-120"/>
-              </a:rPr>
-              <a:t>Quanto gastei este mês em supermercado?</a:t>
-            </a:r>
-            <a:endParaRPr lang="en-US" sz="1100" dirty="0"/>
-          </a:p>
-        </p:txBody>
-      </p:sp>
-      <p:sp>
-        <p:nvSpPr>
-          <p:cNvPr id="8" name="Text 6"/>
-          <p:cNvSpPr/>
-          <p:nvPr/>
-        </p:nvSpPr>
-        <p:spPr>
-          <a:xfrm>
-            <a:off x="548640" y="3200400"/>
-            <a:ext cx="8229600" cy="320040"/>
-          </a:xfrm>
-          <a:prstGeom prst="rect">
-            <a:avLst/>
-          </a:prstGeom>
-          <a:noFill/>
-          <a:ln/>
-        </p:spPr>
-        <p:txBody>
-          <a:bodyPr wrap="square" lIns="0" tIns="0" rIns="0" bIns="0" rtlCol="0" anchor="ctr"/>
-          <a:lstStyle/>
-          <a:p>
-            <a:pPr indent="0" marL="0">
-              <a:buNone/>
-            </a:pPr>
-            <a:r>
-              <a:rPr lang="en-US" sz="1300" b="1" spc="200" kern="0" dirty="0">
-                <a:solidFill>
-                  <a:srgbClr val="0F4C3A"/>
-                </a:solidFill>
-                <a:latin typeface="Calibri" pitchFamily="34" charset="0"/>
-                <a:ea typeface="Calibri" pitchFamily="34" charset="-122"/>
-                <a:cs typeface="Calibri" pitchFamily="34" charset="-120"/>
-              </a:rPr>
-              <a:t>Limitações actuais</a:t>
-            </a:r>
-            <a:endParaRPr lang="en-US" sz="1300" dirty="0"/>
-          </a:p>
-        </p:txBody>
-      </p:sp>
-      <p:sp>
-        <p:nvSpPr>
-          <p:cNvPr id="9" name="Text 7"/>
-          <p:cNvSpPr/>
-          <p:nvPr/>
-        </p:nvSpPr>
-        <p:spPr>
-          <a:xfrm>
-            <a:off x="548640" y="3566160"/>
-            <a:ext cx="8046720" cy="1371600"/>
-          </a:xfrm>
-          <a:prstGeom prst="rect">
-            <a:avLst/>
-          </a:prstGeom>
-          <a:noFill/>
-          <a:ln/>
-        </p:spPr>
-        <p:txBody>
-          <a:bodyPr wrap="square" lIns="0" tIns="0" rIns="0" bIns="0" rtlCol="0" anchor="ctr"/>
-          <a:lstStyle/>
-          <a:p>
-            <a:pPr marL="342900" indent="-342900">
-              <a:spcAft>
-                <a:spcPts val="400"/>
-              </a:spcAft>
-              <a:buSzPct val="100000"/>
-              <a:buChar char="•"/>
-            </a:pPr>
-            <a:r>
-              <a:rPr lang="en-US" sz="1200" dirty="0">
+              <a:rPr lang="en-US" sz="1400" b="1" dirty="0">
                 <a:solidFill>
                   <a:srgbClr val="1A1A1A"/>
                 </a:solidFill>
@@ -2343,20 +5173,131 @@
                 <a:ea typeface="Calibri" pitchFamily="34" charset="-122"/>
                 <a:cs typeface="Calibri" pitchFamily="34" charset="-120"/>
               </a:rPr>
-              <a:t>Apps bancárias mostram movimentos individuais, mas não categorizam nem somam ao nível familiar.</a:t>
-            </a:r>
-            <a:endParaRPr lang="en-US" sz="1200" dirty="0"/>
-          </a:p>
-          <a:p>
-            <a:pPr marL="342900" indent="-342900">
-              <a:spcAft>
-                <a:spcPts val="400"/>
-              </a:spcAft>
-              <a:buSzPct val="100000"/>
-              <a:buChar char="•"/>
+              <a:t>Registo simples</a:t>
+            </a:r>
+            <a:endParaRPr lang="en-US" sz="1400" dirty="0"/>
+          </a:p>
+        </p:txBody>
+      </p:sp>
+      <p:sp>
+        <p:nvSpPr>
+          <p:cNvPr id="8" name="Text 6"/>
+          <p:cNvSpPr/>
+          <p:nvPr/>
+        </p:nvSpPr>
+        <p:spPr>
+          <a:xfrm>
+            <a:off x="777240" y="3063240"/>
+            <a:ext cx="3611880" cy="457200"/>
+          </a:xfrm>
+          <a:prstGeom prst="rect">
+            <a:avLst/>
+          </a:prstGeom>
+          <a:noFill/>
+          <a:ln/>
+        </p:spPr>
+        <p:txBody>
+          <a:bodyPr wrap="square" lIns="0" tIns="0" rIns="0" bIns="0" rtlCol="0" anchor="ctr"/>
+          <a:lstStyle/>
+          <a:p>
+            <a:pPr marL="0" indent="0">
+              <a:buNone/>
             </a:pPr>
             <a:r>
-              <a:rPr lang="en-US" sz="1200" dirty="0">
+              <a:rPr lang="en-US" sz="1050" dirty="0">
+                <a:solidFill>
+                  <a:srgbClr val="5A6A6A"/>
+                </a:solidFill>
+                <a:latin typeface="Calibri" pitchFamily="34" charset="0"/>
+                <a:ea typeface="Calibri" pitchFamily="34" charset="-122"/>
+                <a:cs typeface="Calibri" pitchFamily="34" charset="-120"/>
+              </a:rPr>
+              <a:t>Inserção rápida de receitas e despesas via menu interativo no terminal.</a:t>
+            </a:r>
+            <a:endParaRPr lang="en-US" sz="1050" dirty="0"/>
+          </a:p>
+        </p:txBody>
+      </p:sp>
+      <p:sp>
+        <p:nvSpPr>
+          <p:cNvPr id="9" name="Shape 7"/>
+          <p:cNvSpPr/>
+          <p:nvPr/>
+        </p:nvSpPr>
+        <p:spPr>
+          <a:xfrm>
+            <a:off x="4663440" y="2606040"/>
+            <a:ext cx="3931920" cy="960120"/>
+          </a:xfrm>
+          <a:prstGeom prst="rect">
+            <a:avLst/>
+          </a:prstGeom>
+          <a:solidFill>
+            <a:srgbClr val="F4F1EC"/>
+          </a:solidFill>
+          <a:ln/>
+        </p:spPr>
+        <p:txBody>
+          <a:bodyPr/>
+          <a:lstStyle/>
+          <a:p>
+            <a:endParaRPr lang="pt-PT"/>
+          </a:p>
+        </p:txBody>
+      </p:sp>
+      <p:sp>
+        <p:nvSpPr>
+          <p:cNvPr id="10" name="Shape 8"/>
+          <p:cNvSpPr/>
+          <p:nvPr/>
+        </p:nvSpPr>
+        <p:spPr>
+          <a:xfrm>
+            <a:off x="4663440" y="2606040"/>
+            <a:ext cx="54864" cy="960120"/>
+          </a:xfrm>
+          <a:prstGeom prst="rect">
+            <a:avLst/>
+          </a:prstGeom>
+          <a:solidFill>
+            <a:srgbClr val="0F4C3A"/>
+          </a:solidFill>
+          <a:ln/>
+        </p:spPr>
+        <p:txBody>
+          <a:bodyPr/>
+          <a:lstStyle/>
+          <a:p>
+            <a:endParaRPr lang="pt-PT"/>
+          </a:p>
+        </p:txBody>
+      </p:sp>
+      <p:sp>
+        <p:nvSpPr>
+          <p:cNvPr id="11" name="Text 9"/>
+          <p:cNvSpPr/>
+          <p:nvPr/>
+        </p:nvSpPr>
+        <p:spPr>
+          <a:xfrm>
+            <a:off x="4892040" y="2715768"/>
+            <a:ext cx="3611880" cy="320040"/>
+          </a:xfrm>
+          <a:prstGeom prst="rect">
+            <a:avLst/>
+          </a:prstGeom>
+          <a:noFill/>
+          <a:ln/>
+        </p:spPr>
+        <p:txBody>
+          <a:bodyPr wrap="square" lIns="0" tIns="0" rIns="0" bIns="0" rtlCol="0" anchor="ctr"/>
+          <a:lstStyle/>
+          <a:p>
+            <a:pPr marL="0" indent="0">
+              <a:buNone/>
+            </a:pPr>
+            <a:r>
+              <a:rPr lang="en-US" sz="1400" b="1" dirty="0">
                 <a:solidFill>
                   <a:srgbClr val="1A1A1A"/>
                 </a:solidFill>
@@ -2364,20 +5305,131 @@
                 <a:ea typeface="Calibri" pitchFamily="34" charset="-122"/>
                 <a:cs typeface="Calibri" pitchFamily="34" charset="-120"/>
               </a:rPr>
-              <a:t>Folhas de Excel são manuais, propensas a erros e raramente se mantêm actualizadas.</a:t>
-            </a:r>
-            <a:endParaRPr lang="en-US" sz="1200" dirty="0"/>
-          </a:p>
-          <a:p>
-            <a:pPr marL="342900" indent="-342900">
-              <a:spcAft>
-                <a:spcPts val="400"/>
-              </a:spcAft>
-              <a:buSzPct val="100000"/>
-              <a:buChar char="•"/>
+              <a:t>Categorias PT</a:t>
+            </a:r>
+            <a:endParaRPr lang="en-US" sz="1400" dirty="0"/>
+          </a:p>
+        </p:txBody>
+      </p:sp>
+      <p:sp>
+        <p:nvSpPr>
+          <p:cNvPr id="12" name="Text 10"/>
+          <p:cNvSpPr/>
+          <p:nvPr/>
+        </p:nvSpPr>
+        <p:spPr>
+          <a:xfrm>
+            <a:off x="4892040" y="3063240"/>
+            <a:ext cx="3611880" cy="457200"/>
+          </a:xfrm>
+          <a:prstGeom prst="rect">
+            <a:avLst/>
+          </a:prstGeom>
+          <a:noFill/>
+          <a:ln/>
+        </p:spPr>
+        <p:txBody>
+          <a:bodyPr wrap="square" lIns="0" tIns="0" rIns="0" bIns="0" rtlCol="0" anchor="ctr"/>
+          <a:lstStyle/>
+          <a:p>
+            <a:pPr marL="0" indent="0">
+              <a:buNone/>
             </a:pPr>
             <a:r>
-              <a:rPr lang="en-US" sz="1200" dirty="0">
+              <a:rPr lang="en-US" sz="1050" dirty="0">
+                <a:solidFill>
+                  <a:srgbClr val="5A6A6A"/>
+                </a:solidFill>
+                <a:latin typeface="Calibri" pitchFamily="34" charset="0"/>
+                <a:ea typeface="Calibri" pitchFamily="34" charset="-122"/>
+                <a:cs typeface="Calibri" pitchFamily="34" charset="-120"/>
+              </a:rPr>
+              <a:t>Habitação, utilidades, alimentação, transportes, saúde, educação, lazer.</a:t>
+            </a:r>
+            <a:endParaRPr lang="en-US" sz="1050" dirty="0"/>
+          </a:p>
+        </p:txBody>
+      </p:sp>
+      <p:sp>
+        <p:nvSpPr>
+          <p:cNvPr id="13" name="Shape 11"/>
+          <p:cNvSpPr/>
+          <p:nvPr/>
+        </p:nvSpPr>
+        <p:spPr>
+          <a:xfrm>
+            <a:off x="548640" y="3703320"/>
+            <a:ext cx="3931920" cy="960120"/>
+          </a:xfrm>
+          <a:prstGeom prst="rect">
+            <a:avLst/>
+          </a:prstGeom>
+          <a:solidFill>
+            <a:srgbClr val="F4F1EC"/>
+          </a:solidFill>
+          <a:ln/>
+        </p:spPr>
+        <p:txBody>
+          <a:bodyPr/>
+          <a:lstStyle/>
+          <a:p>
+            <a:endParaRPr lang="pt-PT"/>
+          </a:p>
+        </p:txBody>
+      </p:sp>
+      <p:sp>
+        <p:nvSpPr>
+          <p:cNvPr id="14" name="Shape 12"/>
+          <p:cNvSpPr/>
+          <p:nvPr/>
+        </p:nvSpPr>
+        <p:spPr>
+          <a:xfrm>
+            <a:off x="548640" y="3703320"/>
+            <a:ext cx="54864" cy="960120"/>
+          </a:xfrm>
+          <a:prstGeom prst="rect">
+            <a:avLst/>
+          </a:prstGeom>
+          <a:solidFill>
+            <a:srgbClr val="0F4C3A"/>
+          </a:solidFill>
+          <a:ln/>
+        </p:spPr>
+        <p:txBody>
+          <a:bodyPr/>
+          <a:lstStyle/>
+          <a:p>
+            <a:endParaRPr lang="pt-PT"/>
+          </a:p>
+        </p:txBody>
+      </p:sp>
+      <p:sp>
+        <p:nvSpPr>
+          <p:cNvPr id="15" name="Text 13"/>
+          <p:cNvSpPr/>
+          <p:nvPr/>
+        </p:nvSpPr>
+        <p:spPr>
+          <a:xfrm>
+            <a:off x="777240" y="3813048"/>
+            <a:ext cx="3611880" cy="320040"/>
+          </a:xfrm>
+          <a:prstGeom prst="rect">
+            <a:avLst/>
+          </a:prstGeom>
+          <a:noFill/>
+          <a:ln/>
+        </p:spPr>
+        <p:txBody>
+          <a:bodyPr wrap="square" lIns="0" tIns="0" rIns="0" bIns="0" rtlCol="0" anchor="ctr"/>
+          <a:lstStyle/>
+          <a:p>
+            <a:pPr marL="0" indent="0">
+              <a:buNone/>
+            </a:pPr>
+            <a:r>
+              <a:rPr lang="en-US" sz="1400" b="1" dirty="0">
                 <a:solidFill>
                   <a:srgbClr val="1A1A1A"/>
                 </a:solidFill>
@@ -2385,12 +5437,213 @@
                 <a:ea typeface="Calibri" pitchFamily="34" charset="-122"/>
                 <a:cs typeface="Calibri" pitchFamily="34" charset="-120"/>
               </a:rPr>
-              <a:t>Não há visibilidade sobre quanto entra, quanto sai e onde se gasta — saldo real fica obscuro.</a:t>
-            </a:r>
-            <a:endParaRPr lang="en-US" sz="1200" dirty="0"/>
-          </a:p>
-        </p:txBody>
-      </p:sp>
+              <a:t>Saldo automático</a:t>
+            </a:r>
+            <a:endParaRPr lang="en-US" sz="1400" dirty="0"/>
+          </a:p>
+        </p:txBody>
+      </p:sp>
+      <p:sp>
+        <p:nvSpPr>
+          <p:cNvPr id="16" name="Text 14"/>
+          <p:cNvSpPr/>
+          <p:nvPr/>
+        </p:nvSpPr>
+        <p:spPr>
+          <a:xfrm>
+            <a:off x="777240" y="4160520"/>
+            <a:ext cx="3611880" cy="457200"/>
+          </a:xfrm>
+          <a:prstGeom prst="rect">
+            <a:avLst/>
+          </a:prstGeom>
+          <a:noFill/>
+          <a:ln/>
+        </p:spPr>
+        <p:txBody>
+          <a:bodyPr wrap="square" lIns="0" tIns="0" rIns="0" bIns="0" rtlCol="0" anchor="ctr"/>
+          <a:lstStyle/>
+          <a:p>
+            <a:pPr marL="0" indent="0">
+              <a:buNone/>
+            </a:pPr>
+            <a:r>
+              <a:rPr lang="en-US" sz="1050" dirty="0">
+                <a:solidFill>
+                  <a:srgbClr val="5A6A6A"/>
+                </a:solidFill>
+                <a:latin typeface="Calibri" pitchFamily="34" charset="0"/>
+                <a:ea typeface="Calibri" pitchFamily="34" charset="-122"/>
+                <a:cs typeface="Calibri" pitchFamily="34" charset="-120"/>
+              </a:rPr>
+              <a:t>Cálculo de saldo mensal e agrupamento de gastos por categoria.</a:t>
+            </a:r>
+            <a:endParaRPr lang="en-US" sz="1050" dirty="0"/>
+          </a:p>
+        </p:txBody>
+      </p:sp>
+      <p:sp>
+        <p:nvSpPr>
+          <p:cNvPr id="17" name="Shape 15"/>
+          <p:cNvSpPr/>
+          <p:nvPr/>
+        </p:nvSpPr>
+        <p:spPr>
+          <a:xfrm>
+            <a:off x="4663440" y="3703320"/>
+            <a:ext cx="3931920" cy="960120"/>
+          </a:xfrm>
+          <a:prstGeom prst="rect">
+            <a:avLst/>
+          </a:prstGeom>
+          <a:solidFill>
+            <a:srgbClr val="F4F1EC"/>
+          </a:solidFill>
+          <a:ln/>
+        </p:spPr>
+        <p:txBody>
+          <a:bodyPr/>
+          <a:lstStyle/>
+          <a:p>
+            <a:endParaRPr lang="pt-PT"/>
+          </a:p>
+        </p:txBody>
+      </p:sp>
+      <p:sp>
+        <p:nvSpPr>
+          <p:cNvPr id="18" name="Shape 16"/>
+          <p:cNvSpPr/>
+          <p:nvPr/>
+        </p:nvSpPr>
+        <p:spPr>
+          <a:xfrm>
+            <a:off x="4663440" y="3703320"/>
+            <a:ext cx="54864" cy="960120"/>
+          </a:xfrm>
+          <a:prstGeom prst="rect">
+            <a:avLst/>
+          </a:prstGeom>
+          <a:solidFill>
+            <a:srgbClr val="0F4C3A"/>
+          </a:solidFill>
+          <a:ln/>
+        </p:spPr>
+        <p:txBody>
+          <a:bodyPr/>
+          <a:lstStyle/>
+          <a:p>
+            <a:endParaRPr lang="pt-PT"/>
+          </a:p>
+        </p:txBody>
+      </p:sp>
+      <p:sp>
+        <p:nvSpPr>
+          <p:cNvPr id="19" name="Text 17"/>
+          <p:cNvSpPr/>
+          <p:nvPr/>
+        </p:nvSpPr>
+        <p:spPr>
+          <a:xfrm>
+            <a:off x="4892040" y="3813048"/>
+            <a:ext cx="3611880" cy="320040"/>
+          </a:xfrm>
+          <a:prstGeom prst="rect">
+            <a:avLst/>
+          </a:prstGeom>
+          <a:noFill/>
+          <a:ln/>
+        </p:spPr>
+        <p:txBody>
+          <a:bodyPr wrap="square" lIns="0" tIns="0" rIns="0" bIns="0" rtlCol="0" anchor="ctr"/>
+          <a:lstStyle/>
+          <a:p>
+            <a:pPr marL="0" indent="0">
+              <a:buNone/>
+            </a:pPr>
+            <a:r>
+              <a:rPr lang="en-US" sz="1400" b="1" dirty="0">
+                <a:solidFill>
+                  <a:srgbClr val="1A1A1A"/>
+                </a:solidFill>
+                <a:latin typeface="Calibri" pitchFamily="34" charset="0"/>
+                <a:ea typeface="Calibri" pitchFamily="34" charset="-122"/>
+                <a:cs typeface="Calibri" pitchFamily="34" charset="-120"/>
+              </a:rPr>
+              <a:t>JSON portátil</a:t>
+            </a:r>
+            <a:endParaRPr lang="en-US" sz="1400" dirty="0"/>
+          </a:p>
+        </p:txBody>
+      </p:sp>
+      <p:sp>
+        <p:nvSpPr>
+          <p:cNvPr id="20" name="Text 18"/>
+          <p:cNvSpPr/>
+          <p:nvPr/>
+        </p:nvSpPr>
+        <p:spPr>
+          <a:xfrm>
+            <a:off x="4892040" y="4160520"/>
+            <a:ext cx="3611880" cy="457200"/>
+          </a:xfrm>
+          <a:prstGeom prst="rect">
+            <a:avLst/>
+          </a:prstGeom>
+          <a:noFill/>
+          <a:ln/>
+        </p:spPr>
+        <p:txBody>
+          <a:bodyPr wrap="square" lIns="0" tIns="0" rIns="0" bIns="0" rtlCol="0" anchor="ctr"/>
+          <a:lstStyle/>
+          <a:p>
+            <a:pPr marL="0" indent="0">
+              <a:buNone/>
+            </a:pPr>
+            <a:r>
+              <a:rPr lang="en-US" sz="1050" dirty="0">
+                <a:solidFill>
+                  <a:srgbClr val="5A6A6A"/>
+                </a:solidFill>
+                <a:latin typeface="Calibri" pitchFamily="34" charset="0"/>
+                <a:ea typeface="Calibri" pitchFamily="34" charset="-122"/>
+                <a:cs typeface="Calibri" pitchFamily="34" charset="-120"/>
+              </a:rPr>
+              <a:t>Persistência em ficheiro JSON, sem base de dados nem dependências externas.</a:t>
+            </a:r>
+            <a:endParaRPr lang="en-US" sz="1050" dirty="0"/>
+          </a:p>
+        </p:txBody>
+      </p:sp>
+      <p:pic>
+        <p:nvPicPr>
+          <p:cNvPr id="25" name="Imagem 24">
+            <a:extLst>
+              <a:ext uri="{FF2B5EF4-FFF2-40B4-BE49-F238E27FC236}">
+                <a16:creationId xmlns:a16="http://schemas.microsoft.com/office/drawing/2014/main" id="{9AB10978-0A6A-F2B8-793E-9BBB1FDFD7F2}"/>
+              </a:ext>
+            </a:extLst>
+          </p:cNvPr>
+          <p:cNvPicPr>
+            <a:picLocks noChangeAspect="1"/>
+          </p:cNvPicPr>
+          <p:nvPr/>
+        </p:nvPicPr>
+        <p:blipFill>
+          <a:blip r:embed="rId3"/>
+          <a:stretch>
+            <a:fillRect/>
+          </a:stretch>
+        </p:blipFill>
+        <p:spPr>
+          <a:xfrm>
+            <a:off x="6372665" y="194135"/>
+            <a:ext cx="1479920" cy="1479920"/>
+          </a:xfrm>
+          <a:prstGeom prst="rect">
+            <a:avLst/>
+          </a:prstGeom>
+        </p:spPr>
+      </p:pic>
     </p:spTree>
   </p:cSld>
   <p:clrMapOvr>
@@ -2407,6 +5660,7 @@
         <a:solidFill>
           <a:srgbClr val="0F4C3A"/>
         </a:solidFill>
+        <a:effectLst/>
       </p:bgPr>
     </p:bg>
     <p:spTree>
@@ -2444,7 +5698,7 @@
           <a:bodyPr wrap="square" lIns="0" tIns="0" rIns="0" bIns="0" rtlCol="0" anchor="ctr"/>
           <a:lstStyle/>
           <a:p>
-            <a:pPr indent="0" marL="0">
+            <a:pPr marL="0" indent="0">
               <a:buNone/>
             </a:pPr>
             <a:r>
@@ -2483,7 +5737,7 @@
           <a:bodyPr wrap="square" lIns="0" tIns="0" rIns="0" bIns="0" rtlCol="0" anchor="ctr"/>
           <a:lstStyle/>
           <a:p>
-            <a:pPr indent="0" marL="0">
+            <a:pPr marL="0" indent="0">
               <a:buNone/>
             </a:pPr>
             <a:r>
@@ -2520,6 +5774,13 @@
           </a:solidFill>
           <a:ln/>
         </p:spPr>
+        <p:txBody>
+          <a:bodyPr/>
+          <a:lstStyle/>
+          <a:p>
+            <a:endParaRPr lang="pt-PT"/>
+          </a:p>
+        </p:txBody>
       </p:sp>
       <p:sp>
         <p:nvSpPr>
@@ -2542,14 +5803,11 @@
           <a:bodyPr wrap="square" lIns="0" tIns="0" rIns="0" bIns="0" rtlCol="0" anchor="ctr"/>
           <a:lstStyle/>
           <a:p>
-            <a:pPr indent="0" marL="0">
+            <a:pPr marL="0" indent="0">
               <a:buNone/>
             </a:pPr>
             <a:r>
-              <a:rPr lang="en-US" sz="1200" b="1" spc="200" kern="0" dirty="0">
-                <a:solidFill>
-                  <a:srgbClr val="FFFFFF"/>
-                </a:solidFill>
+              <a:rPr lang="en-US" sz="1200" b="1" kern="0" spc="200" dirty="0">
                 <a:latin typeface="Calibri" pitchFamily="34" charset="0"/>
                 <a:ea typeface="Calibri" pitchFamily="34" charset="-122"/>
                 <a:cs typeface="Calibri" pitchFamily="34" charset="-120"/>
@@ -2581,14 +5839,11 @@
           <a:bodyPr wrap="square" lIns="0" tIns="0" rIns="0" bIns="0" rtlCol="0" anchor="ctr"/>
           <a:lstStyle/>
           <a:p>
-            <a:pPr indent="0" marL="0">
+            <a:pPr marL="0" indent="0">
               <a:buNone/>
             </a:pPr>
             <a:r>
               <a:rPr lang="en-US" sz="1100" dirty="0">
-                <a:solidFill>
-                  <a:srgbClr val="9FB1A8"/>
-                </a:solidFill>
                 <a:latin typeface="Calibri" pitchFamily="34" charset="0"/>
                 <a:ea typeface="Calibri" pitchFamily="34" charset="-122"/>
                 <a:cs typeface="Calibri" pitchFamily="34" charset="-120"/>
@@ -2608,7 +5863,260 @@
 </file>
 
 <file path=ppt/theme/theme1.xml><?xml version="1.0" encoding="utf-8"?>
-<a:theme xmlns:a="http://schemas.openxmlformats.org/drawingml/2006/main" name="Office Theme">
+<a:theme xmlns:a="http://schemas.openxmlformats.org/drawingml/2006/main" name="Galeria">
+  <a:themeElements>
+    <a:clrScheme name="Galeria">
+      <a:dk1>
+        <a:sysClr val="windowText" lastClr="000000"/>
+      </a:dk1>
+      <a:lt1>
+        <a:sysClr val="window" lastClr="FFFFFF"/>
+      </a:lt1>
+      <a:dk2>
+        <a:srgbClr val="454545"/>
+      </a:dk2>
+      <a:lt2>
+        <a:srgbClr val="DFDBD5"/>
+      </a:lt2>
+      <a:accent1>
+        <a:srgbClr val="B71E42"/>
+      </a:accent1>
+      <a:accent2>
+        <a:srgbClr val="DE478E"/>
+      </a:accent2>
+      <a:accent3>
+        <a:srgbClr val="BC72F0"/>
+      </a:accent3>
+      <a:accent4>
+        <a:srgbClr val="795FAF"/>
+      </a:accent4>
+      <a:accent5>
+        <a:srgbClr val="586EA6"/>
+      </a:accent5>
+      <a:accent6>
+        <a:srgbClr val="6892A0"/>
+      </a:accent6>
+      <a:hlink>
+        <a:srgbClr val="FA2B5C"/>
+      </a:hlink>
+      <a:folHlink>
+        <a:srgbClr val="BC658E"/>
+      </a:folHlink>
+    </a:clrScheme>
+    <a:fontScheme name="Galeria">
+      <a:majorFont>
+        <a:latin typeface="Gill Sans MT" panose="020B0502020104020203"/>
+        <a:ea typeface=""/>
+        <a:cs typeface=""/>
+        <a:font script="Jpan" typeface="游ゴシック Light"/>
+        <a:font script="Hang" typeface="맑은 고딕"/>
+        <a:font script="Hans" typeface="等线 Light"/>
+        <a:font script="Hant" typeface="新細明體"/>
+        <a:font script="Arab" typeface="Times New Roman"/>
+        <a:font script="Hebr" typeface="Times New Roman"/>
+        <a:font script="Thai" typeface="Angsana New"/>
+        <a:font script="Ethi" typeface="Nyala"/>
+        <a:font script="Beng" typeface="Vrinda"/>
+        <a:font script="Gujr" typeface="Shruti"/>
+        <a:font script="Khmr" typeface="MoolBoran"/>
+        <a:font script="Knda" typeface="Tunga"/>
+        <a:font script="Guru" typeface="Raavi"/>
+        <a:font script="Cans" typeface="Euphemia"/>
+        <a:font script="Cher" typeface="Plantagenet Cherokee"/>
+        <a:font script="Yiii" typeface="Microsoft Yi Baiti"/>
+        <a:font script="Tibt" typeface="Microsoft Himalaya"/>
+        <a:font script="Thaa" typeface="MV Boli"/>
+        <a:font script="Deva" typeface="Mangal"/>
+        <a:font script="Telu" typeface="Gautami"/>
+        <a:font script="Taml" typeface="Latha"/>
+        <a:font script="Syrc" typeface="Estrangelo Edessa"/>
+        <a:font script="Orya" typeface="Kalinga"/>
+        <a:font script="Mlym" typeface="Kartika"/>
+        <a:font script="Laoo" typeface="DokChampa"/>
+        <a:font script="Sinh" typeface="Iskoola Pota"/>
+        <a:font script="Mong" typeface="Mongolian Baiti"/>
+        <a:font script="Viet" typeface="Times New Roman"/>
+        <a:font script="Uigh" typeface="Microsoft Uighur"/>
+        <a:font script="Geor" typeface="Sylfaen"/>
+      </a:majorFont>
+      <a:minorFont>
+        <a:latin typeface="Gill Sans MT" panose="020B0502020104020203"/>
+        <a:ea typeface=""/>
+        <a:cs typeface=""/>
+        <a:font script="Jpan" typeface="游ゴシック"/>
+        <a:font script="Hang" typeface="맑은 고딕"/>
+        <a:font script="Hans" typeface="等线"/>
+        <a:font script="Hant" typeface="新細明體"/>
+        <a:font script="Arab" typeface="Arial"/>
+        <a:font script="Hebr" typeface="Arial"/>
+        <a:font script="Thai" typeface="Cordia New"/>
+        <a:font script="Ethi" typeface="Nyala"/>
+        <a:font script="Beng" typeface="Vrinda"/>
+        <a:font script="Gujr" typeface="Shruti"/>
+        <a:font script="Khmr" typeface="DaunPenh"/>
+        <a:font script="Knda" typeface="Tunga"/>
+        <a:font script="Guru" typeface="Raavi"/>
+        <a:font script="Cans" typeface="Euphemia"/>
+        <a:font script="Cher" typeface="Plantagenet Cherokee"/>
+        <a:font script="Yiii" typeface="Microsoft Yi Baiti"/>
+        <a:font script="Tibt" typeface="Microsoft Himalaya"/>
+        <a:font script="Thaa" typeface="MV Boli"/>
+        <a:font script="Deva" typeface="Mangal"/>
+        <a:font script="Telu" typeface="Gautami"/>
+        <a:font script="Taml" typeface="Latha"/>
+        <a:font script="Syrc" typeface="Estrangelo Edessa"/>
+        <a:font script="Orya" typeface="Kalinga"/>
+        <a:font script="Mlym" typeface="Kartika"/>
+        <a:font script="Laoo" typeface="DokChampa"/>
+        <a:font script="Sinh" typeface="Iskoola Pota"/>
+        <a:font script="Mong" typeface="Mongolian Baiti"/>
+        <a:font script="Viet" typeface="Arial"/>
+        <a:font script="Uigh" typeface="Microsoft Uighur"/>
+        <a:font script="Geor" typeface="Sylfaen"/>
+      </a:minorFont>
+    </a:fontScheme>
+    <a:fmtScheme name="Galeria">
+      <a:fillStyleLst>
+        <a:solidFill>
+          <a:schemeClr val="phClr"/>
+        </a:solidFill>
+        <a:gradFill rotWithShape="1">
+          <a:gsLst>
+            <a:gs pos="0">
+              <a:schemeClr val="phClr">
+                <a:tint val="54000"/>
+                <a:alpha val="100000"/>
+                <a:satMod val="105000"/>
+                <a:lumMod val="110000"/>
+              </a:schemeClr>
+            </a:gs>
+            <a:gs pos="100000">
+              <a:schemeClr val="phClr">
+                <a:tint val="78000"/>
+                <a:alpha val="92000"/>
+                <a:satMod val="109000"/>
+                <a:lumMod val="100000"/>
+              </a:schemeClr>
+            </a:gs>
+          </a:gsLst>
+          <a:lin ang="5400000" scaled="0"/>
+        </a:gradFill>
+        <a:gradFill rotWithShape="1">
+          <a:gsLst>
+            <a:gs pos="0">
+              <a:schemeClr val="phClr">
+                <a:tint val="98000"/>
+                <a:satMod val="110000"/>
+                <a:lumMod val="104000"/>
+              </a:schemeClr>
+            </a:gs>
+            <a:gs pos="69000">
+              <a:schemeClr val="phClr">
+                <a:shade val="88000"/>
+                <a:satMod val="130000"/>
+                <a:lumMod val="92000"/>
+              </a:schemeClr>
+            </a:gs>
+            <a:gs pos="100000">
+              <a:schemeClr val="phClr">
+                <a:shade val="78000"/>
+                <a:satMod val="130000"/>
+                <a:lumMod val="92000"/>
+              </a:schemeClr>
+            </a:gs>
+          </a:gsLst>
+          <a:lin ang="5400000" scaled="0"/>
+        </a:gradFill>
+      </a:fillStyleLst>
+      <a:lnStyleLst>
+        <a:ln w="9525" cap="flat" cmpd="sng" algn="ctr">
+          <a:solidFill>
+            <a:schemeClr val="phClr"/>
+          </a:solidFill>
+          <a:prstDash val="solid"/>
+        </a:ln>
+        <a:ln w="15875" cap="flat" cmpd="sng" algn="ctr">
+          <a:solidFill>
+            <a:schemeClr val="phClr"/>
+          </a:solidFill>
+          <a:prstDash val="solid"/>
+        </a:ln>
+        <a:ln w="22225" cap="flat" cmpd="sng" algn="ctr">
+          <a:solidFill>
+            <a:schemeClr val="phClr"/>
+          </a:solidFill>
+          <a:prstDash val="solid"/>
+        </a:ln>
+      </a:lnStyleLst>
+      <a:effectStyleLst>
+        <a:effectStyle>
+          <a:effectLst/>
+        </a:effectStyle>
+        <a:effectStyle>
+          <a:effectLst/>
+        </a:effectStyle>
+        <a:effectStyle>
+          <a:effectLst>
+            <a:outerShdw blurRad="50800" dist="50800" dir="5400000" sx="96000" sy="96000" rotWithShape="0">
+              <a:srgbClr val="000000">
+                <a:alpha val="48000"/>
+              </a:srgbClr>
+            </a:outerShdw>
+          </a:effectLst>
+          <a:scene3d>
+            <a:camera prst="orthographicFront">
+              <a:rot lat="0" lon="0" rev="0"/>
+            </a:camera>
+            <a:lightRig rig="balanced" dir="t">
+              <a:rot lat="0" lon="0" rev="1080000"/>
+            </a:lightRig>
+          </a:scene3d>
+          <a:sp3d>
+            <a:bevelT w="38100" h="12700" prst="softRound"/>
+          </a:sp3d>
+        </a:effectStyle>
+      </a:effectStyleLst>
+      <a:bgFillStyleLst>
+        <a:solidFill>
+          <a:schemeClr val="phClr"/>
+        </a:solidFill>
+        <a:solidFill>
+          <a:schemeClr val="phClr"/>
+        </a:solidFill>
+        <a:gradFill rotWithShape="1">
+          <a:gsLst>
+            <a:gs pos="0">
+              <a:schemeClr val="phClr">
+                <a:tint val="94000"/>
+                <a:satMod val="80000"/>
+                <a:lumMod val="106000"/>
+              </a:schemeClr>
+            </a:gs>
+            <a:gs pos="100000">
+              <a:schemeClr val="phClr">
+                <a:shade val="80000"/>
+              </a:schemeClr>
+            </a:gs>
+          </a:gsLst>
+          <a:path path="circle">
+            <a:fillToRect l="43000" r="43000" b="100000"/>
+          </a:path>
+        </a:gradFill>
+      </a:bgFillStyleLst>
+    </a:fmtScheme>
+  </a:themeElements>
+  <a:objectDefaults/>
+  <a:extraClrSchemeLst/>
+  <a:extLst>
+    <a:ext uri="{05A4C25C-085E-4340-85A3-A5531E510DB2}">
+      <thm15:themeFamily xmlns:thm15="http://schemas.microsoft.com/office/thememl/2012/main" name="Gallery" id="{BBFCD31E-59A1-489D-B089-A3EAD7CAE12E}" vid="{F5E91637-A7B6-4E27-B710-77DA7014EE1E}"/>
+    </a:ext>
+  </a:extLst>
+</a:theme>
+</file>
+
+<file path=ppt/theme/theme2.xml><?xml version="1.0" encoding="utf-8"?>
+<a:theme xmlns:a="http://schemas.openxmlformats.org/drawingml/2006/main" name="Tema do Office">
   <a:themeElements>
     <a:clrScheme name="Office">
       <a:dk1>
@@ -2618,39 +6126,39 @@
         <a:sysClr val="window" lastClr="FFFFFF"/>
       </a:lt1>
       <a:dk2>
-        <a:srgbClr val="44546A"/>
+        <a:srgbClr val="0E2841"/>
       </a:dk2>
       <a:lt2>
-        <a:srgbClr val="E7E6E6"/>
+        <a:srgbClr val="E8E8E8"/>
       </a:lt2>
       <a:accent1>
-        <a:srgbClr val="4472C4"/>
+        <a:srgbClr val="156082"/>
       </a:accent1>
       <a:accent2>
-        <a:srgbClr val="ED7D31"/>
+        <a:srgbClr val="E97132"/>
       </a:accent2>
       <a:accent3>
-        <a:srgbClr val="A5A5A5"/>
+        <a:srgbClr val="196B24"/>
       </a:accent3>
       <a:accent4>
-        <a:srgbClr val="FFC000"/>
+        <a:srgbClr val="0F9ED5"/>
       </a:accent4>
       <a:accent5>
-        <a:srgbClr val="5B9BD5"/>
+        <a:srgbClr val="A02B93"/>
       </a:accent5>
       <a:accent6>
-        <a:srgbClr val="70AD47"/>
+        <a:srgbClr val="4EA72E"/>
       </a:accent6>
       <a:hlink>
-        <a:srgbClr val="0563C1"/>
+        <a:srgbClr val="467886"/>
       </a:hlink>
       <a:folHlink>
-        <a:srgbClr val="954F72"/>
+        <a:srgbClr val="96607D"/>
       </a:folHlink>
     </a:clrScheme>
     <a:fontScheme name="Office">
       <a:majorFont>
-        <a:latin typeface="Calibri Light" panose="020F0302020204030204"/>
+        <a:latin typeface="Aptos Display" panose="02110004020202020204"/>
         <a:ea typeface=""/>
         <a:cs typeface=""/>
         <a:font script="Jpan" typeface="游ゴシック Light"/>
@@ -2702,7 +6210,7 @@
         <a:font script="Tfng" typeface="Ebrima"/>
       </a:majorFont>
       <a:minorFont>
-        <a:latin typeface="Calibri" panose="020F0502020204030204"/>
+        <a:latin typeface="Aptos" panose="02110004020202020204"/>
         <a:ea typeface=""/>
         <a:cs typeface=""/>
         <a:font script="Jpan" typeface="游ゴシック"/>
@@ -2813,13 +6321,6 @@
         </a:gradFill>
       </a:fillStyleLst>
       <a:lnStyleLst>
-        <a:ln w="6350" cap="flat" cmpd="sng" algn="ctr">
-          <a:solidFill>
-            <a:schemeClr val="phClr"/>
-          </a:solidFill>
-          <a:prstDash val="solid"/>
-          <a:miter lim="800000"/>
-        </a:ln>
         <a:ln w="12700" cap="flat" cmpd="sng" algn="ctr">
           <a:solidFill>
             <a:schemeClr val="phClr"/>
@@ -2828,6 +6329,13 @@
           <a:miter lim="800000"/>
         </a:ln>
         <a:ln w="19050" cap="flat" cmpd="sng" algn="ctr">
+          <a:solidFill>
+            <a:schemeClr val="phClr"/>
+          </a:solidFill>
+          <a:prstDash val="solid"/>
+          <a:miter lim="800000"/>
+        </a:ln>
+        <a:ln w="25400" cap="flat" cmpd="sng" algn="ctr">
           <a:solidFill>
             <a:schemeClr val="phClr"/>
           </a:solidFill>
@@ -2892,11 +6400,31 @@
       </a:bgFillStyleLst>
     </a:fmtScheme>
   </a:themeElements>
-  <a:objectDefaults/>
+  <a:objectDefaults>
+    <a:lnDef>
+      <a:spPr/>
+      <a:bodyPr/>
+      <a:lstStyle/>
+      <a:style>
+        <a:lnRef idx="2">
+          <a:schemeClr val="accent1"/>
+        </a:lnRef>
+        <a:fillRef idx="0">
+          <a:schemeClr val="accent1"/>
+        </a:fillRef>
+        <a:effectRef idx="1">
+          <a:schemeClr val="accent1"/>
+        </a:effectRef>
+        <a:fontRef idx="minor">
+          <a:schemeClr val="tx1"/>
+        </a:fontRef>
+      </a:style>
+    </a:lnDef>
+  </a:objectDefaults>
   <a:extraClrSchemeLst/>
   <a:extLst>
     <a:ext uri="{05A4C25C-085E-4340-85A3-A5531E510DB2}">
-      <thm15:themeFamily xmlns:thm15="http://schemas.microsoft.com/office/thememl/2012/main" name="Office Theme" id="{62F939B6-93AF-4DB8-9C6B-D6C7DFDC589F}" vid="{4A3C46E8-61CC-4603-A589-7422A47A8E4A}"/>
+      <thm15:themeFamily xmlns:thm15="http://schemas.microsoft.com/office/thememl/2012/main" name="Office Theme" id="{2E142A2C-CD16-42D6-873A-C26D2A0506FA}" vid="{1BDDFF52-6CD6-40A5-AB3C-68EB2F1E4D0A}"/>
     </a:ext>
   </a:extLst>
 </a:theme>
